--- a/clases/clase02/Clase_02_slides.pptx
+++ b/clases/clase02/Clase_02_slides.pptx
@@ -4,6 +4,9 @@
   <p:sldMasterIdLst>
     <p:sldMasterId id="2147483648" r:id="rId1"/>
   </p:sldMasterIdLst>
+  <p:notesMasterIdLst>
+    <p:notesMasterId r:id="rId16"/>
+  </p:notesMasterIdLst>
   <p:sldIdLst>
     <p:sldId id="256" r:id="rId2"/>
     <p:sldId id="257" r:id="rId3"/>
@@ -20,10 +23,7 @@
     <p:sldId id="268" r:id="rId14"/>
     <p:sldId id="269" r:id="rId15"/>
   </p:sldIdLst>
-  <p:notesMasterIdLst>
-    <p:notesMasterId r:id="rId16"/>
-  </p:notesMasterIdLst>
-  <p:sldSz cx="9144000" cy="5143500"/>
+  <p:sldSz cx="9144000" cy="5143500" type="screen16x9"/>
   <p:notesSz cx="5143500" cy="9144000"/>
   <p:defaultTextStyle>
     <a:lvl1pPr marL="0" algn="l" defTabSz="914400" rtl="0" eaLnBrk="1" latinLnBrk="0" hangingPunct="1">
@@ -117,6 +117,11 @@
       </a:defRPr>
     </a:lvl9pPr>
   </p:defaultTextStyle>
+  <p:extLst>
+    <p:ext uri="{EFAFB233-063F-42B5-8137-9DF3F51BA10A}">
+      <p15:sldGuideLst xmlns:p15="http://schemas.microsoft.com/office/powerpoint/2012/main"/>
+    </p:ext>
+  </p:extLst>
 </p:presentation>
 </file>
 
@@ -142,234 +147,10 @@
           <a:chExt cx="0" cy="0"/>
         </a:xfrm>
       </p:grpSpPr>
-      <p:sp>
-        <p:nvSpPr>
-          <p:cNvPr id="2" name="Header Placeholder 1"/>
-          <p:cNvSpPr>
-            <a:spLocks noGrp="1"/>
-          </p:cNvSpPr>
-          <p:nvPr>
-            <p:ph type="hdr" sz="quarter"/>
-          </p:nvPr>
-        </p:nvSpPr>
-        <p:spPr>
-          <a:xfrm>
-            <a:off x="0" y="0"/>
-            <a:ext cx="2971800" cy="458788"/>
-          </a:xfrm>
-          <a:prstGeom prst="rect">
-            <a:avLst/>
-          </a:prstGeom>
-        </p:spPr>
-        <p:txBody>
-          <a:bodyPr vert="horz" lIns="91440" tIns="45720" rIns="91440" bIns="45720" rtlCol="0"/>
-          <a:lstStyle>
-            <a:lvl1pPr algn="l">
-              <a:defRPr sz="1200"/>
-            </a:lvl1pPr>
-          </a:lstStyle>
-          <a:p>
-            <a:endParaRPr lang="en-US"/>
-          </a:p>
-        </p:txBody>
-      </p:sp>
-      <p:sp>
-        <p:nvSpPr>
-          <p:cNvPr id="3" name="Date Placeholder 2"/>
-          <p:cNvSpPr>
-            <a:spLocks noGrp="1"/>
-          </p:cNvSpPr>
-          <p:nvPr>
-            <p:ph type="dt" idx="1"/>
-          </p:nvPr>
-        </p:nvSpPr>
-        <p:spPr>
-          <a:xfrm>
-            <a:off x="3884613" y="0"/>
-            <a:ext cx="2971800" cy="458788"/>
-          </a:xfrm>
-          <a:prstGeom prst="rect">
-            <a:avLst/>
-          </a:prstGeom>
-        </p:spPr>
-        <p:txBody>
-          <a:bodyPr vert="horz" lIns="91440" tIns="45720" rIns="91440" bIns="45720" rtlCol="0"/>
-          <a:lstStyle>
-            <a:lvl1pPr algn="r">
-              <a:defRPr sz="1200"/>
-            </a:lvl1pPr>
-          </a:lstStyle>
-          <a:p>
-            <a:fld id="{5282F153-3F37-0F45-9E97-73ACFA13230C}" type="datetimeFigureOut">
-              <a:rPr lang="en-US"/>
-              <a:t>7/23/19</a:t>
-            </a:fld>
-            <a:endParaRPr lang="en-US"/>
-          </a:p>
-        </p:txBody>
-      </p:sp>
-      <p:sp>
-        <p:nvSpPr>
-          <p:cNvPr id="4" name="Slide Image Placeholder 3"/>
-          <p:cNvSpPr>
-            <a:spLocks noGrp="1" noRot="1" noChangeAspect="1"/>
-          </p:cNvSpPr>
-          <p:nvPr>
-            <p:ph type="sldImg" idx="2"/>
-          </p:nvPr>
-        </p:nvSpPr>
-        <p:spPr>
-          <a:xfrm>
-            <a:off x="685800" y="1143000"/>
-            <a:ext cx="5486400" cy="3086100"/>
-          </a:xfrm>
-          <a:prstGeom prst="rect">
-            <a:avLst/>
-          </a:prstGeom>
-          <a:noFill/>
-          <a:ln w="12700">
-            <a:solidFill>
-              <a:prstClr val="black"/>
-            </a:solidFill>
-          </a:ln>
-        </p:spPr>
-        <p:txBody>
-          <a:bodyPr vert="horz" lIns="91440" tIns="45720" rIns="91440" bIns="45720" rtlCol="0" anchor="ctr"/>
-          <a:lstStyle/>
-          <a:p>
-            <a:endParaRPr lang="en-US"/>
-          </a:p>
-        </p:txBody>
-      </p:sp>
-      <p:sp>
-        <p:nvSpPr>
-          <p:cNvPr id="5" name="Notes Placeholder 4"/>
-          <p:cNvSpPr>
-            <a:spLocks noGrp="1"/>
-          </p:cNvSpPr>
-          <p:nvPr>
-            <p:ph type="body" sz="quarter" idx="3"/>
-          </p:nvPr>
-        </p:nvSpPr>
-        <p:spPr>
-          <a:xfrm>
-            <a:off x="685800" y="4400550"/>
-            <a:ext cx="5486400" cy="3600450"/>
-          </a:xfrm>
-          <a:prstGeom prst="rect">
-            <a:avLst/>
-          </a:prstGeom>
-        </p:spPr>
-        <p:txBody>
-          <a:bodyPr vert="horz" lIns="91440" tIns="45720" rIns="91440" bIns="45720" rtlCol="0"/>
-          <a:lstStyle/>
-          <a:p>
-            <a:pPr lvl="0"/>
-            <a:r>
-              <a:rPr lang="en-US"/>
-              <a:t>Click to edit Master text styles</a:t>
-            </a:r>
-          </a:p>
-          <a:p>
-            <a:pPr lvl="1"/>
-            <a:r>
-              <a:rPr lang="en-US"/>
-              <a:t>Second level</a:t>
-            </a:r>
-          </a:p>
-          <a:p>
-            <a:pPr lvl="2"/>
-            <a:r>
-              <a:rPr lang="en-US"/>
-              <a:t>Third level</a:t>
-            </a:r>
-          </a:p>
-          <a:p>
-            <a:pPr lvl="3"/>
-            <a:r>
-              <a:rPr lang="en-US"/>
-              <a:t>Fourth level</a:t>
-            </a:r>
-          </a:p>
-          <a:p>
-            <a:pPr lvl="4"/>
-            <a:r>
-              <a:rPr lang="en-US"/>
-              <a:t>Fifth level</a:t>
-            </a:r>
-          </a:p>
-        </p:txBody>
-      </p:sp>
-      <p:sp>
-        <p:nvSpPr>
-          <p:cNvPr id="6" name="Footer Placeholder 5"/>
-          <p:cNvSpPr>
-            <a:spLocks noGrp="1"/>
-          </p:cNvSpPr>
-          <p:nvPr>
-            <p:ph type="ftr" sz="quarter" idx="4"/>
-          </p:nvPr>
-        </p:nvSpPr>
-        <p:spPr>
-          <a:xfrm>
-            <a:off x="0" y="8685213"/>
-            <a:ext cx="2971800" cy="458787"/>
-          </a:xfrm>
-          <a:prstGeom prst="rect">
-            <a:avLst/>
-          </a:prstGeom>
-        </p:spPr>
-        <p:txBody>
-          <a:bodyPr vert="horz" lIns="91440" tIns="45720" rIns="91440" bIns="45720" rtlCol="0" anchor="b"/>
-          <a:lstStyle>
-            <a:lvl1pPr algn="l">
-              <a:defRPr sz="1200"/>
-            </a:lvl1pPr>
-          </a:lstStyle>
-          <a:p>
-            <a:endParaRPr lang="en-US"/>
-          </a:p>
-        </p:txBody>
-      </p:sp>
-      <p:sp>
-        <p:nvSpPr>
-          <p:cNvPr id="7" name="Slide Number Placeholder 6"/>
-          <p:cNvSpPr>
-            <a:spLocks noGrp="1"/>
-          </p:cNvSpPr>
-          <p:nvPr>
-            <p:ph type="sldNum" sz="quarter" idx="5"/>
-          </p:nvPr>
-        </p:nvSpPr>
-        <p:spPr>
-          <a:xfrm>
-            <a:off x="3884613" y="8685213"/>
-            <a:ext cx="2971800" cy="458787"/>
-          </a:xfrm>
-          <a:prstGeom prst="rect">
-            <a:avLst/>
-          </a:prstGeom>
-        </p:spPr>
-        <p:txBody>
-          <a:bodyPr vert="horz" lIns="91440" tIns="45720" rIns="91440" bIns="45720" rtlCol="0" anchor="b"/>
-          <a:lstStyle>
-            <a:lvl1pPr algn="r">
-              <a:defRPr sz="1200"/>
-            </a:lvl1pPr>
-          </a:lstStyle>
-          <a:p>
-            <a:fld id="{CE5E9CC1-C706-0F49-92D6-E571CC5EEA8F}" type="slidenum">
-              <a:rPr lang="en-US"/>
-              <a:t>‹#›</a:t>
-            </a:fld>
-            <a:endParaRPr lang="en-US"/>
-          </a:p>
-        </p:txBody>
-      </p:sp>
     </p:spTree>
     <p:extLst>
       <p:ext uri="{BB962C8B-B14F-4D97-AF65-F5344CB8AC3E}">
-        <p14:creationId xmlns:p14="http://schemas.microsoft.com/office/powerpoint/2010/main" val="1024086991"/>
+        <p14:creationId xmlns:p14="http://schemas.microsoft.com/office/powerpoint/2010/main" val="351739394"/>
       </p:ext>
     </p:extLst>
   </p:cSld>
@@ -513,10 +294,6 @@
           <a:bodyPr/>
           <a:lstStyle/>
           <a:p>
-            <a:r>
-              <a:rPr lang="en-US" dirty="0"/>
-              <a:t/>
-            </a:r>
             <a:endParaRPr lang="en-US" dirty="0"/>
           </a:p>
         </p:txBody>
@@ -601,10 +378,6 @@
           <a:bodyPr/>
           <a:lstStyle/>
           <a:p>
-            <a:r>
-              <a:rPr lang="en-US" dirty="0"/>
-              <a:t/>
-            </a:r>
             <a:endParaRPr lang="en-US" dirty="0"/>
           </a:p>
         </p:txBody>
@@ -689,10 +462,6 @@
           <a:bodyPr/>
           <a:lstStyle/>
           <a:p>
-            <a:r>
-              <a:rPr lang="en-US" dirty="0"/>
-              <a:t/>
-            </a:r>
             <a:endParaRPr lang="en-US" dirty="0"/>
           </a:p>
         </p:txBody>
@@ -777,10 +546,6 @@
           <a:bodyPr/>
           <a:lstStyle/>
           <a:p>
-            <a:r>
-              <a:rPr lang="en-US" dirty="0"/>
-              <a:t/>
-            </a:r>
             <a:endParaRPr lang="en-US" dirty="0"/>
           </a:p>
         </p:txBody>
@@ -865,10 +630,6 @@
           <a:bodyPr/>
           <a:lstStyle/>
           <a:p>
-            <a:r>
-              <a:rPr lang="en-US" dirty="0"/>
-              <a:t/>
-            </a:r>
             <a:endParaRPr lang="en-US" dirty="0"/>
           </a:p>
         </p:txBody>
@@ -953,10 +714,6 @@
           <a:bodyPr/>
           <a:lstStyle/>
           <a:p>
-            <a:r>
-              <a:rPr lang="en-US" dirty="0"/>
-              <a:t/>
-            </a:r>
             <a:endParaRPr lang="en-US" dirty="0"/>
           </a:p>
         </p:txBody>
@@ -1041,10 +798,6 @@
           <a:bodyPr/>
           <a:lstStyle/>
           <a:p>
-            <a:r>
-              <a:rPr lang="en-US" dirty="0"/>
-              <a:t/>
-            </a:r>
             <a:endParaRPr lang="en-US" dirty="0"/>
           </a:p>
         </p:txBody>
@@ -1129,10 +882,6 @@
           <a:bodyPr/>
           <a:lstStyle/>
           <a:p>
-            <a:r>
-              <a:rPr lang="en-US" dirty="0"/>
-              <a:t/>
-            </a:r>
             <a:endParaRPr lang="en-US" dirty="0"/>
           </a:p>
         </p:txBody>
@@ -1217,10 +966,6 @@
           <a:bodyPr/>
           <a:lstStyle/>
           <a:p>
-            <a:r>
-              <a:rPr lang="en-US" dirty="0"/>
-              <a:t/>
-            </a:r>
             <a:endParaRPr lang="en-US" dirty="0"/>
           </a:p>
         </p:txBody>
@@ -1305,10 +1050,6 @@
           <a:bodyPr/>
           <a:lstStyle/>
           <a:p>
-            <a:r>
-              <a:rPr lang="en-US" dirty="0"/>
-              <a:t/>
-            </a:r>
             <a:endParaRPr lang="en-US" dirty="0"/>
           </a:p>
         </p:txBody>
@@ -1393,10 +1134,6 @@
           <a:bodyPr/>
           <a:lstStyle/>
           <a:p>
-            <a:r>
-              <a:rPr lang="en-US" dirty="0"/>
-              <a:t/>
-            </a:r>
             <a:endParaRPr lang="en-US" dirty="0"/>
           </a:p>
         </p:txBody>
@@ -1481,10 +1218,6 @@
           <a:bodyPr/>
           <a:lstStyle/>
           <a:p>
-            <a:r>
-              <a:rPr lang="en-US" dirty="0"/>
-              <a:t/>
-            </a:r>
             <a:endParaRPr lang="en-US" dirty="0"/>
           </a:p>
         </p:txBody>
@@ -1569,10 +1302,6 @@
           <a:bodyPr/>
           <a:lstStyle/>
           <a:p>
-            <a:r>
-              <a:rPr lang="en-US" dirty="0"/>
-              <a:t/>
-            </a:r>
             <a:endParaRPr lang="en-US" dirty="0"/>
           </a:p>
         </p:txBody>
@@ -1657,10 +1386,6 @@
           <a:bodyPr/>
           <a:lstStyle/>
           <a:p>
-            <a:r>
-              <a:rPr lang="en-US" dirty="0"/>
-              <a:t/>
-            </a:r>
             <a:endParaRPr lang="en-US" dirty="0"/>
           </a:p>
         </p:txBody>
@@ -1734,6 +1459,11 @@
 <file path=ppt/slideMasters/slideMaster1.xml><?xml version="1.0" encoding="utf-8"?>
 <p:sldMaster xmlns:a="http://schemas.openxmlformats.org/drawingml/2006/main" xmlns:r="http://schemas.openxmlformats.org/officeDocument/2006/relationships" xmlns:p="http://schemas.openxmlformats.org/presentationml/2006/main">
   <p:cSld>
+    <p:bg>
+      <p:bgRef idx="1001">
+        <a:schemeClr val="bg1"/>
+      </p:bgRef>
+    </p:bg>
     <p:spTree>
       <p:nvGrpSpPr>
         <p:cNvPr id="1" name=""/>
@@ -2016,6 +1746,7 @@
         <a:solidFill>
           <a:srgbClr val="0F1B33"/>
         </a:solidFill>
+        <a:effectLst/>
       </p:bgPr>
     </p:bg>
     <p:spTree>
@@ -2051,6 +1782,13 @@
           </a:solidFill>
           <a:ln/>
         </p:spPr>
+        <p:txBody>
+          <a:bodyPr/>
+          <a:lstStyle/>
+          <a:p>
+            <a:endParaRPr lang="es-AR"/>
+          </a:p>
+        </p:txBody>
       </p:sp>
       <p:sp>
         <p:nvSpPr>
@@ -2071,6 +1809,13 @@
           </a:solidFill>
           <a:ln/>
         </p:spPr>
+        <p:txBody>
+          <a:bodyPr/>
+          <a:lstStyle/>
+          <a:p>
+            <a:endParaRPr lang="es-AR"/>
+          </a:p>
+        </p:txBody>
       </p:sp>
       <p:sp>
         <p:nvSpPr>
@@ -2093,6 +1838,13 @@
           </a:solidFill>
           <a:ln/>
         </p:spPr>
+        <p:txBody>
+          <a:bodyPr/>
+          <a:lstStyle/>
+          <a:p>
+            <a:endParaRPr lang="es-AR"/>
+          </a:p>
+        </p:txBody>
       </p:sp>
       <p:sp>
         <p:nvSpPr>
@@ -2115,7 +1867,7 @@
           <a:bodyPr wrap="square" lIns="0" tIns="0" rIns="0" bIns="0" rtlCol="0" anchor="ctr"/>
           <a:lstStyle/>
           <a:p>
-            <a:pPr algn="ctr" indent="0" marL="0">
+            <a:pPr marL="0" indent="0" algn="ctr">
               <a:buNone/>
             </a:pPr>
             <a:r>
@@ -2154,7 +1906,7 @@
           <a:bodyPr wrap="square" lIns="0" tIns="0" rIns="0" bIns="0" rtlCol="0" anchor="t"/>
           <a:lstStyle/>
           <a:p>
-            <a:pPr indent="0" marL="0">
+            <a:pPr marL="0" indent="0">
               <a:buNone/>
             </a:pPr>
             <a:r>
@@ -2171,7 +1923,7 @@
             <a:endParaRPr lang="en-US" sz="3400" dirty="0"/>
           </a:p>
           <a:p>
-            <a:pPr indent="0" marL="0">
+            <a:pPr marL="0" indent="0">
               <a:buNone/>
             </a:pPr>
             <a:r>
@@ -2210,7 +1962,7 @@
           <a:bodyPr wrap="square" lIns="0" tIns="0" rIns="0" bIns="0" rtlCol="0" anchor="ctr"/>
           <a:lstStyle/>
           <a:p>
-            <a:pPr indent="0" marL="0">
+            <a:pPr marL="0" indent="0">
               <a:buNone/>
             </a:pPr>
             <a:r>
@@ -2230,14 +1982,14 @@
       </p:sp>
       <p:pic>
         <p:nvPicPr>
-          <p:cNvPr id="8" name="Image 0" descr="preencoded.png">    </p:cNvPr>
+          <p:cNvPr id="8" name="Image 0" descr="preencoded.png"/>
           <p:cNvPicPr>
             <a:picLocks noChangeAspect="1"/>
           </p:cNvPicPr>
           <p:nvPr/>
         </p:nvPicPr>
         <p:blipFill>
-          <a:blip r:embed="rId1"/>
+          <a:blip r:embed="rId3"/>
           <a:stretch>
             <a:fillRect/>
           </a:stretch>
@@ -2254,14 +2006,14 @@
       </p:pic>
       <p:pic>
         <p:nvPicPr>
-          <p:cNvPr id="9" name="Image 1" descr="preencoded.png">    </p:cNvPr>
+          <p:cNvPr id="9" name="Image 1" descr="preencoded.png"/>
           <p:cNvPicPr>
             <a:picLocks noChangeAspect="1"/>
           </p:cNvPicPr>
           <p:nvPr/>
         </p:nvPicPr>
         <p:blipFill>
-          <a:blip r:embed="rId2"/>
+          <a:blip r:embed="rId4"/>
           <a:stretch>
             <a:fillRect/>
           </a:stretch>
@@ -2295,6 +2047,13 @@
           </a:solidFill>
           <a:ln/>
         </p:spPr>
+        <p:txBody>
+          <a:bodyPr/>
+          <a:lstStyle/>
+          <a:p>
+            <a:endParaRPr lang="es-AR"/>
+          </a:p>
+        </p:txBody>
       </p:sp>
       <p:sp>
         <p:nvSpPr>
@@ -2317,7 +2076,7 @@
           <a:bodyPr wrap="square" lIns="0" tIns="0" rIns="0" bIns="0" rtlCol="0" anchor="ctr"/>
           <a:lstStyle/>
           <a:p>
-            <a:pPr indent="0" marL="0">
+            <a:pPr marL="0" indent="0">
               <a:buNone/>
             </a:pPr>
             <a:r>
@@ -2351,6 +2110,7 @@
         <a:solidFill>
           <a:srgbClr val="F0F9FF"/>
         </a:solidFill>
+        <a:effectLst/>
       </p:bgPr>
     </p:bg>
     <p:spTree>
@@ -2386,6 +2146,13 @@
           </a:solidFill>
           <a:ln/>
         </p:spPr>
+        <p:txBody>
+          <a:bodyPr/>
+          <a:lstStyle/>
+          <a:p>
+            <a:endParaRPr lang="es-AR"/>
+          </a:p>
+        </p:txBody>
       </p:sp>
       <p:sp>
         <p:nvSpPr>
@@ -2408,7 +2175,7 @@
           <a:bodyPr wrap="square" lIns="0" tIns="0" rIns="0" bIns="0" rtlCol="0" anchor="ctr"/>
           <a:lstStyle/>
           <a:p>
-            <a:pPr indent="0" marL="0">
+            <a:pPr marL="0" indent="0">
               <a:buNone/>
             </a:pPr>
             <a:r>
@@ -2447,7 +2214,7 @@
           <a:bodyPr wrap="square" lIns="0" tIns="0" rIns="0" bIns="0" rtlCol="0" anchor="ctr"/>
           <a:lstStyle/>
           <a:p>
-            <a:pPr indent="0" marL="0">
+            <a:pPr marL="0" indent="0">
               <a:buNone/>
             </a:pPr>
             <a:r>
@@ -2484,6 +2251,13 @@
           </a:solidFill>
           <a:ln/>
         </p:spPr>
+        <p:txBody>
+          <a:bodyPr/>
+          <a:lstStyle/>
+          <a:p>
+            <a:endParaRPr lang="es-AR"/>
+          </a:p>
+        </p:txBody>
       </p:sp>
       <p:sp>
         <p:nvSpPr>
@@ -2506,7 +2280,7 @@
           <a:bodyPr wrap="square" lIns="0" tIns="0" rIns="0" bIns="0" rtlCol="0" anchor="t"/>
           <a:lstStyle/>
           <a:p>
-            <a:pPr indent="0" marL="0">
+            <a:pPr marL="0" indent="0">
               <a:lnSpc>
                 <a:spcPct val="120000"/>
               </a:lnSpc>
@@ -2526,7 +2300,7 @@
             <a:endParaRPr lang="en-US" sz="1150" dirty="0"/>
           </a:p>
           <a:p>
-            <a:pPr indent="0" marL="0">
+            <a:pPr marL="0" indent="0">
               <a:lnSpc>
                 <a:spcPct val="120000"/>
               </a:lnSpc>
@@ -2546,7 +2320,7 @@
             <a:endParaRPr lang="en-US" sz="1150" dirty="0"/>
           </a:p>
           <a:p>
-            <a:pPr indent="0" marL="0">
+            <a:pPr marL="0" indent="0">
               <a:lnSpc>
                 <a:spcPct val="120000"/>
               </a:lnSpc>
@@ -2566,7 +2340,7 @@
             <a:endParaRPr lang="en-US" sz="1150" dirty="0"/>
           </a:p>
           <a:p>
-            <a:pPr indent="0" marL="0">
+            <a:pPr marL="0" indent="0">
               <a:lnSpc>
                 <a:spcPct val="120000"/>
               </a:lnSpc>
@@ -2586,7 +2360,7 @@
             <a:endParaRPr lang="en-US" sz="1150" dirty="0"/>
           </a:p>
           <a:p>
-            <a:pPr indent="0" marL="0">
+            <a:pPr marL="0" indent="0">
               <a:lnSpc>
                 <a:spcPct val="120000"/>
               </a:lnSpc>
@@ -2606,7 +2380,7 @@
             <a:endParaRPr lang="en-US" sz="1150" dirty="0"/>
           </a:p>
           <a:p>
-            <a:pPr indent="0" marL="0">
+            <a:pPr marL="0" indent="0">
               <a:lnSpc>
                 <a:spcPct val="120000"/>
               </a:lnSpc>
@@ -2626,7 +2400,7 @@
             <a:endParaRPr lang="en-US" sz="1150" dirty="0"/>
           </a:p>
           <a:p>
-            <a:pPr indent="0" marL="0">
+            <a:pPr marL="0" indent="0">
               <a:lnSpc>
                 <a:spcPct val="120000"/>
               </a:lnSpc>
@@ -2635,7 +2409,7 @@
             <a:endParaRPr lang="en-US" sz="1150" dirty="0"/>
           </a:p>
           <a:p>
-            <a:pPr indent="0" marL="0">
+            <a:pPr marL="0" indent="0">
               <a:lnSpc>
                 <a:spcPct val="120000"/>
               </a:lnSpc>
@@ -2675,6 +2449,13 @@
           </a:solidFill>
           <a:ln/>
         </p:spPr>
+        <p:txBody>
+          <a:bodyPr/>
+          <a:lstStyle/>
+          <a:p>
+            <a:endParaRPr lang="es-AR"/>
+          </a:p>
+        </p:txBody>
       </p:sp>
       <p:sp>
         <p:nvSpPr>
@@ -2697,7 +2478,7 @@
           <a:bodyPr wrap="square" lIns="0" tIns="0" rIns="0" bIns="0" rtlCol="0" anchor="ctr"/>
           <a:lstStyle/>
           <a:p>
-            <a:pPr indent="0" marL="0">
+            <a:pPr marL="0" indent="0">
               <a:buNone/>
             </a:pPr>
             <a:r>
@@ -2734,6 +2515,13 @@
           </a:solidFill>
           <a:ln/>
         </p:spPr>
+        <p:txBody>
+          <a:bodyPr/>
+          <a:lstStyle/>
+          <a:p>
+            <a:endParaRPr lang="es-AR"/>
+          </a:p>
+        </p:txBody>
       </p:sp>
       <p:sp>
         <p:nvSpPr>
@@ -2756,7 +2544,7 @@
           <a:bodyPr wrap="square" lIns="0" tIns="0" rIns="0" bIns="0" rtlCol="0" anchor="ctr"/>
           <a:lstStyle/>
           <a:p>
-            <a:pPr algn="ctr" indent="0" marL="0">
+            <a:pPr marL="0" indent="0" algn="ctr">
               <a:buNone/>
             </a:pPr>
             <a:r>
@@ -2793,6 +2581,13 @@
           </a:solidFill>
           <a:ln/>
         </p:spPr>
+        <p:txBody>
+          <a:bodyPr/>
+          <a:lstStyle/>
+          <a:p>
+            <a:endParaRPr lang="es-AR"/>
+          </a:p>
+        </p:txBody>
       </p:sp>
       <p:sp>
         <p:nvSpPr>
@@ -2815,7 +2610,7 @@
           <a:bodyPr wrap="square" lIns="0" tIns="0" rIns="0" bIns="0" rtlCol="0" anchor="ctr"/>
           <a:lstStyle/>
           <a:p>
-            <a:pPr algn="ctr" indent="0" marL="0">
+            <a:pPr marL="0" indent="0" algn="ctr">
               <a:buNone/>
             </a:pPr>
             <a:r>
@@ -2852,6 +2647,13 @@
           </a:solidFill>
           <a:ln/>
         </p:spPr>
+        <p:txBody>
+          <a:bodyPr/>
+          <a:lstStyle/>
+          <a:p>
+            <a:endParaRPr lang="es-AR"/>
+          </a:p>
+        </p:txBody>
       </p:sp>
       <p:sp>
         <p:nvSpPr>
@@ -2874,7 +2676,7 @@
           <a:bodyPr wrap="square" lIns="0" tIns="0" rIns="0" bIns="0" rtlCol="0" anchor="ctr"/>
           <a:lstStyle/>
           <a:p>
-            <a:pPr algn="ctr" indent="0" marL="0">
+            <a:pPr marL="0" indent="0" algn="ctr">
               <a:buNone/>
             </a:pPr>
             <a:r>
@@ -2911,6 +2713,13 @@
           </a:solidFill>
           <a:ln/>
         </p:spPr>
+        <p:txBody>
+          <a:bodyPr/>
+          <a:lstStyle/>
+          <a:p>
+            <a:endParaRPr lang="es-AR"/>
+          </a:p>
+        </p:txBody>
       </p:sp>
       <p:sp>
         <p:nvSpPr>
@@ -2933,7 +2742,7 @@
           <a:bodyPr wrap="square" lIns="0" tIns="0" rIns="0" bIns="0" rtlCol="0" anchor="ctr"/>
           <a:lstStyle/>
           <a:p>
-            <a:pPr algn="ctr" indent="0" marL="0">
+            <a:pPr marL="0" indent="0" algn="ctr">
               <a:buNone/>
             </a:pPr>
             <a:r>
@@ -2970,6 +2779,13 @@
           </a:solidFill>
           <a:ln/>
         </p:spPr>
+        <p:txBody>
+          <a:bodyPr/>
+          <a:lstStyle/>
+          <a:p>
+            <a:endParaRPr lang="es-AR"/>
+          </a:p>
+        </p:txBody>
       </p:sp>
       <p:sp>
         <p:nvSpPr>
@@ -2992,7 +2808,7 @@
           <a:bodyPr wrap="square" lIns="0" tIns="0" rIns="0" bIns="0" rtlCol="0" anchor="ctr"/>
           <a:lstStyle/>
           <a:p>
-            <a:pPr algn="ctr" indent="0" marL="0">
+            <a:pPr marL="0" indent="0" algn="ctr">
               <a:buNone/>
             </a:pPr>
             <a:r>
@@ -3029,6 +2845,13 @@
           </a:solidFill>
           <a:ln/>
         </p:spPr>
+        <p:txBody>
+          <a:bodyPr/>
+          <a:lstStyle/>
+          <a:p>
+            <a:endParaRPr lang="es-AR"/>
+          </a:p>
+        </p:txBody>
       </p:sp>
       <p:sp>
         <p:nvSpPr>
@@ -3051,7 +2874,7 @@
           <a:bodyPr wrap="square" lIns="0" tIns="0" rIns="0" bIns="0" rtlCol="0" anchor="ctr"/>
           <a:lstStyle/>
           <a:p>
-            <a:pPr algn="ctr" indent="0" marL="0">
+            <a:pPr marL="0" indent="0" algn="ctr">
               <a:buNone/>
             </a:pPr>
             <a:r>
@@ -3088,6 +2911,13 @@
           </a:solidFill>
           <a:ln/>
         </p:spPr>
+        <p:txBody>
+          <a:bodyPr/>
+          <a:lstStyle/>
+          <a:p>
+            <a:endParaRPr lang="es-AR"/>
+          </a:p>
+        </p:txBody>
       </p:sp>
       <p:sp>
         <p:nvSpPr>
@@ -3110,7 +2940,7 @@
           <a:bodyPr wrap="square" lIns="0" tIns="0" rIns="0" bIns="0" rtlCol="0" anchor="ctr"/>
           <a:lstStyle/>
           <a:p>
-            <a:pPr algn="ctr" indent="0" marL="0">
+            <a:pPr marL="0" indent="0" algn="ctr">
               <a:buNone/>
             </a:pPr>
             <a:r>
@@ -3147,6 +2977,13 @@
           </a:solidFill>
           <a:ln/>
         </p:spPr>
+        <p:txBody>
+          <a:bodyPr/>
+          <a:lstStyle/>
+          <a:p>
+            <a:endParaRPr lang="es-AR"/>
+          </a:p>
+        </p:txBody>
       </p:sp>
       <p:sp>
         <p:nvSpPr>
@@ -3169,7 +3006,7 @@
           <a:bodyPr wrap="square" lIns="0" tIns="0" rIns="0" bIns="0" rtlCol="0" anchor="ctr"/>
           <a:lstStyle/>
           <a:p>
-            <a:pPr algn="ctr" indent="0" marL="0">
+            <a:pPr marL="0" indent="0" algn="ctr">
               <a:buNone/>
             </a:pPr>
             <a:r>
@@ -3206,6 +3043,13 @@
           </a:solidFill>
           <a:ln/>
         </p:spPr>
+        <p:txBody>
+          <a:bodyPr/>
+          <a:lstStyle/>
+          <a:p>
+            <a:endParaRPr lang="es-AR"/>
+          </a:p>
+        </p:txBody>
       </p:sp>
       <p:sp>
         <p:nvSpPr>
@@ -3228,7 +3072,7 @@
           <a:bodyPr wrap="square" lIns="0" tIns="0" rIns="0" bIns="0" rtlCol="0" anchor="ctr"/>
           <a:lstStyle/>
           <a:p>
-            <a:pPr algn="ctr" indent="0" marL="0">
+            <a:pPr marL="0" indent="0" algn="ctr">
               <a:buNone/>
             </a:pPr>
             <a:r>
@@ -3265,6 +3109,13 @@
           </a:solidFill>
           <a:ln/>
         </p:spPr>
+        <p:txBody>
+          <a:bodyPr/>
+          <a:lstStyle/>
+          <a:p>
+            <a:endParaRPr lang="es-AR"/>
+          </a:p>
+        </p:txBody>
       </p:sp>
       <p:sp>
         <p:nvSpPr>
@@ -3287,7 +3138,7 @@
           <a:bodyPr wrap="square" lIns="0" tIns="0" rIns="0" bIns="0" rtlCol="0" anchor="ctr"/>
           <a:lstStyle/>
           <a:p>
-            <a:pPr algn="ctr" indent="0" marL="0">
+            <a:pPr marL="0" indent="0" algn="ctr">
               <a:buNone/>
             </a:pPr>
             <a:r>
@@ -3324,6 +3175,13 @@
           </a:solidFill>
           <a:ln/>
         </p:spPr>
+        <p:txBody>
+          <a:bodyPr/>
+          <a:lstStyle/>
+          <a:p>
+            <a:endParaRPr lang="es-AR"/>
+          </a:p>
+        </p:txBody>
       </p:sp>
       <p:sp>
         <p:nvSpPr>
@@ -3346,7 +3204,7 @@
           <a:bodyPr wrap="square" lIns="0" tIns="0" rIns="0" bIns="0" rtlCol="0" anchor="ctr"/>
           <a:lstStyle/>
           <a:p>
-            <a:pPr algn="ctr" indent="0" marL="0">
+            <a:pPr marL="0" indent="0" algn="ctr">
               <a:buNone/>
             </a:pPr>
             <a:r>
@@ -3383,6 +3241,13 @@
           </a:solidFill>
           <a:ln/>
         </p:spPr>
+        <p:txBody>
+          <a:bodyPr/>
+          <a:lstStyle/>
+          <a:p>
+            <a:endParaRPr lang="es-AR"/>
+          </a:p>
+        </p:txBody>
       </p:sp>
       <p:sp>
         <p:nvSpPr>
@@ -3405,7 +3270,7 @@
           <a:bodyPr wrap="square" lIns="0" tIns="0" rIns="0" bIns="0" rtlCol="0" anchor="ctr"/>
           <a:lstStyle/>
           <a:p>
-            <a:pPr algn="ctr" indent="0" marL="0">
+            <a:pPr marL="0" indent="0" algn="ctr">
               <a:buNone/>
             </a:pPr>
             <a:r>
@@ -3442,13 +3307,20 @@
           </a:solidFill>
           <a:ln/>
           <a:effectLst>
-            <a:outerShdw sx="100000" sy="100000" kx="0" ky="0" algn="bl" rotWithShape="0" blurRad="101600" dist="38100" dir="8100000">
+            <a:outerShdw blurRad="101600" dist="38100" dir="8100000" algn="bl" rotWithShape="0">
               <a:srgbClr val="000000">
                 <a:alpha val="10000"/>
               </a:srgbClr>
             </a:outerShdw>
           </a:effectLst>
         </p:spPr>
+        <p:txBody>
+          <a:bodyPr/>
+          <a:lstStyle/>
+          <a:p>
+            <a:endParaRPr lang="es-AR"/>
+          </a:p>
+        </p:txBody>
       </p:sp>
       <p:sp>
         <p:nvSpPr>
@@ -3469,6 +3341,13 @@
           </a:solidFill>
           <a:ln/>
         </p:spPr>
+        <p:txBody>
+          <a:bodyPr/>
+          <a:lstStyle/>
+          <a:p>
+            <a:endParaRPr lang="es-AR"/>
+          </a:p>
+        </p:txBody>
       </p:sp>
       <p:sp>
         <p:nvSpPr>
@@ -3491,7 +3370,7 @@
           <a:bodyPr wrap="square" lIns="0" tIns="0" rIns="0" bIns="0" rtlCol="0" anchor="ctr"/>
           <a:lstStyle/>
           <a:p>
-            <a:pPr indent="0" marL="0">
+            <a:pPr marL="0" indent="0">
               <a:buNone/>
             </a:pPr>
             <a:r>
@@ -3530,7 +3409,7 @@
           <a:bodyPr wrap="square" lIns="0" tIns="0" rIns="0" bIns="0" rtlCol="0" anchor="t"/>
           <a:lstStyle/>
           <a:p>
-            <a:pPr indent="0" marL="0">
+            <a:pPr marL="0" indent="0">
               <a:lnSpc>
                 <a:spcPct val="125000"/>
               </a:lnSpc>
@@ -3550,7 +3429,7 @@
             <a:endParaRPr lang="en-US" sz="1000" dirty="0"/>
           </a:p>
           <a:p>
-            <a:pPr indent="0" marL="0">
+            <a:pPr marL="0" indent="0">
               <a:lnSpc>
                 <a:spcPct val="125000"/>
               </a:lnSpc>
@@ -3570,7 +3449,7 @@
             <a:endParaRPr lang="en-US" sz="1000" dirty="0"/>
           </a:p>
           <a:p>
-            <a:pPr indent="0" marL="0">
+            <a:pPr marL="0" indent="0">
               <a:lnSpc>
                 <a:spcPct val="125000"/>
               </a:lnSpc>
@@ -3610,13 +3489,20 @@
           </a:solidFill>
           <a:ln/>
           <a:effectLst>
-            <a:outerShdw sx="100000" sy="100000" kx="0" ky="0" algn="bl" rotWithShape="0" blurRad="101600" dist="38100" dir="8100000">
+            <a:outerShdw blurRad="101600" dist="38100" dir="8100000" algn="bl" rotWithShape="0">
               <a:srgbClr val="000000">
                 <a:alpha val="10000"/>
               </a:srgbClr>
             </a:outerShdw>
           </a:effectLst>
         </p:spPr>
+        <p:txBody>
+          <a:bodyPr/>
+          <a:lstStyle/>
+          <a:p>
+            <a:endParaRPr lang="es-AR"/>
+          </a:p>
+        </p:txBody>
       </p:sp>
       <p:sp>
         <p:nvSpPr>
@@ -3637,6 +3523,13 @@
           </a:solidFill>
           <a:ln/>
         </p:spPr>
+        <p:txBody>
+          <a:bodyPr/>
+          <a:lstStyle/>
+          <a:p>
+            <a:endParaRPr lang="es-AR"/>
+          </a:p>
+        </p:txBody>
       </p:sp>
       <p:sp>
         <p:nvSpPr>
@@ -3659,7 +3552,7 @@
           <a:bodyPr wrap="square" lIns="0" tIns="0" rIns="0" bIns="0" rtlCol="0" anchor="ctr"/>
           <a:lstStyle/>
           <a:p>
-            <a:pPr indent="0" marL="0">
+            <a:pPr marL="0" indent="0">
               <a:buNone/>
             </a:pPr>
             <a:r>
@@ -3698,7 +3591,7 @@
           <a:bodyPr wrap="square" lIns="0" tIns="0" rIns="0" bIns="0" rtlCol="0" anchor="t"/>
           <a:lstStyle/>
           <a:p>
-            <a:pPr indent="0" marL="0">
+            <a:pPr marL="0" indent="0">
               <a:lnSpc>
                 <a:spcPct val="125000"/>
               </a:lnSpc>
@@ -3718,7 +3611,7 @@
             <a:endParaRPr lang="en-US" sz="1000" dirty="0"/>
           </a:p>
           <a:p>
-            <a:pPr indent="0" marL="0">
+            <a:pPr marL="0" indent="0">
               <a:lnSpc>
                 <a:spcPct val="125000"/>
               </a:lnSpc>
@@ -3738,7 +3631,7 @@
             <a:endParaRPr lang="en-US" sz="1000" dirty="0"/>
           </a:p>
           <a:p>
-            <a:pPr indent="0" marL="0">
+            <a:pPr marL="0" indent="0">
               <a:lnSpc>
                 <a:spcPct val="125000"/>
               </a:lnSpc>
@@ -3778,6 +3671,13 @@
           </a:solidFill>
           <a:ln/>
         </p:spPr>
+        <p:txBody>
+          <a:bodyPr/>
+          <a:lstStyle/>
+          <a:p>
+            <a:endParaRPr lang="es-AR"/>
+          </a:p>
+        </p:txBody>
       </p:sp>
       <p:sp>
         <p:nvSpPr>
@@ -3800,7 +3700,7 @@
           <a:bodyPr wrap="square" lIns="0" tIns="0" rIns="0" bIns="0" rtlCol="0" anchor="ctr"/>
           <a:lstStyle/>
           <a:p>
-            <a:pPr indent="0" marL="0">
+            <a:pPr marL="0" indent="0">
               <a:buNone/>
             </a:pPr>
             <a:r>
@@ -3839,7 +3739,7 @@
           <a:bodyPr wrap="square" lIns="0" tIns="0" rIns="0" bIns="0" rtlCol="0" anchor="ctr"/>
           <a:lstStyle/>
           <a:p>
-            <a:pPr algn="r" indent="0" marL="0">
+            <a:pPr marL="0" indent="0" algn="r">
               <a:buNone/>
             </a:pPr>
             <a:r>
@@ -3873,6 +3773,7 @@
         <a:solidFill>
           <a:srgbClr val="F0F9FF"/>
         </a:solidFill>
+        <a:effectLst/>
       </p:bgPr>
     </p:bg>
     <p:spTree>
@@ -3908,6 +3809,13 @@
           </a:solidFill>
           <a:ln/>
         </p:spPr>
+        <p:txBody>
+          <a:bodyPr/>
+          <a:lstStyle/>
+          <a:p>
+            <a:endParaRPr lang="es-AR"/>
+          </a:p>
+        </p:txBody>
       </p:sp>
       <p:sp>
         <p:nvSpPr>
@@ -3930,7 +3838,7 @@
           <a:bodyPr wrap="square" lIns="0" tIns="0" rIns="0" bIns="0" rtlCol="0" anchor="ctr"/>
           <a:lstStyle/>
           <a:p>
-            <a:pPr indent="0" marL="0">
+            <a:pPr marL="0" indent="0">
               <a:buNone/>
             </a:pPr>
             <a:r>
@@ -3967,6 +3875,13 @@
           </a:solidFill>
           <a:ln/>
         </p:spPr>
+        <p:txBody>
+          <a:bodyPr/>
+          <a:lstStyle/>
+          <a:p>
+            <a:endParaRPr lang="es-AR"/>
+          </a:p>
+        </p:txBody>
       </p:sp>
       <p:sp>
         <p:nvSpPr>
@@ -3989,7 +3904,7 @@
           <a:bodyPr wrap="square" lIns="0" tIns="0" rIns="0" bIns="0" rtlCol="0" anchor="ctr"/>
           <a:lstStyle/>
           <a:p>
-            <a:pPr algn="ctr" indent="0" marL="0">
+            <a:pPr marL="0" indent="0" algn="ctr">
               <a:buNone/>
             </a:pPr>
             <a:r>
@@ -4026,13 +3941,20 @@
           </a:solidFill>
           <a:ln/>
           <a:effectLst>
-            <a:outerShdw sx="100000" sy="100000" kx="0" ky="0" algn="bl" rotWithShape="0" blurRad="101600" dist="38100" dir="8100000">
+            <a:outerShdw blurRad="101600" dist="38100" dir="8100000" algn="bl" rotWithShape="0">
               <a:srgbClr val="000000">
                 <a:alpha val="10000"/>
               </a:srgbClr>
             </a:outerShdw>
           </a:effectLst>
         </p:spPr>
+        <p:txBody>
+          <a:bodyPr/>
+          <a:lstStyle/>
+          <a:p>
+            <a:endParaRPr lang="es-AR"/>
+          </a:p>
+        </p:txBody>
       </p:sp>
       <p:sp>
         <p:nvSpPr>
@@ -4055,7 +3977,7 @@
           <a:bodyPr wrap="square" lIns="0" tIns="0" rIns="0" bIns="0" rtlCol="0" anchor="ctr"/>
           <a:lstStyle/>
           <a:p>
-            <a:pPr indent="0" marL="0">
+            <a:pPr marL="0" indent="0">
               <a:buNone/>
             </a:pPr>
             <a:r>
@@ -4094,7 +4016,7 @@
           <a:bodyPr wrap="square" lIns="0" tIns="0" rIns="0" bIns="0" rtlCol="0" anchor="ctr"/>
           <a:lstStyle/>
           <a:p>
-            <a:pPr indent="0" marL="0">
+            <a:pPr marL="0" indent="0">
               <a:buNone/>
             </a:pPr>
             <a:r>
@@ -4133,7 +4055,7 @@
           <a:bodyPr wrap="square" lIns="0" tIns="0" rIns="0" bIns="0" rtlCol="0" anchor="ctr"/>
           <a:lstStyle/>
           <a:p>
-            <a:pPr indent="0" marL="0">
+            <a:pPr marL="0" indent="0">
               <a:buNone/>
             </a:pPr>
             <a:r>
@@ -4172,7 +4094,7 @@
           <a:bodyPr wrap="square" lIns="0" tIns="0" rIns="0" bIns="0" rtlCol="0" anchor="ctr"/>
           <a:lstStyle/>
           <a:p>
-            <a:pPr indent="0" marL="0">
+            <a:pPr marL="0" indent="0">
               <a:buNone/>
             </a:pPr>
             <a:r>
@@ -4211,7 +4133,7 @@
           <a:bodyPr wrap="square" lIns="0" tIns="0" rIns="0" bIns="0" rtlCol="0" anchor="ctr"/>
           <a:lstStyle/>
           <a:p>
-            <a:pPr indent="0" marL="0">
+            <a:pPr marL="0" indent="0">
               <a:buNone/>
             </a:pPr>
             <a:r>
@@ -4250,7 +4172,7 @@
           <a:bodyPr wrap="square" lIns="0" tIns="0" rIns="0" bIns="0" rtlCol="0" anchor="ctr"/>
           <a:lstStyle/>
           <a:p>
-            <a:pPr indent="0" marL="0">
+            <a:pPr marL="0" indent="0">
               <a:buNone/>
             </a:pPr>
             <a:r>
@@ -4287,6 +4209,13 @@
           </a:solidFill>
           <a:ln/>
         </p:spPr>
+        <p:txBody>
+          <a:bodyPr/>
+          <a:lstStyle/>
+          <a:p>
+            <a:endParaRPr lang="es-AR"/>
+          </a:p>
+        </p:txBody>
       </p:sp>
       <p:sp>
         <p:nvSpPr>
@@ -4309,7 +4238,7 @@
           <a:bodyPr wrap="square" lIns="0" tIns="0" rIns="0" bIns="0" rtlCol="0" anchor="ctr"/>
           <a:lstStyle/>
           <a:p>
-            <a:pPr algn="ctr" indent="0" marL="0">
+            <a:pPr marL="0" indent="0" algn="ctr">
               <a:buNone/>
             </a:pPr>
             <a:r>
@@ -4346,13 +4275,20 @@
           </a:solidFill>
           <a:ln/>
           <a:effectLst>
-            <a:outerShdw sx="100000" sy="100000" kx="0" ky="0" algn="bl" rotWithShape="0" blurRad="101600" dist="38100" dir="8100000">
+            <a:outerShdw blurRad="101600" dist="38100" dir="8100000" algn="bl" rotWithShape="0">
               <a:srgbClr val="000000">
                 <a:alpha val="10000"/>
               </a:srgbClr>
             </a:outerShdw>
           </a:effectLst>
         </p:spPr>
+        <p:txBody>
+          <a:bodyPr/>
+          <a:lstStyle/>
+          <a:p>
+            <a:endParaRPr lang="es-AR"/>
+          </a:p>
+        </p:txBody>
       </p:sp>
       <p:sp>
         <p:nvSpPr>
@@ -4375,7 +4311,7 @@
           <a:bodyPr wrap="square" lIns="0" tIns="0" rIns="0" bIns="0" rtlCol="0" anchor="ctr"/>
           <a:lstStyle/>
           <a:p>
-            <a:pPr indent="0" marL="0">
+            <a:pPr marL="0" indent="0">
               <a:buNone/>
             </a:pPr>
             <a:r>
@@ -4414,7 +4350,7 @@
           <a:bodyPr wrap="square" lIns="0" tIns="0" rIns="0" bIns="0" rtlCol="0" anchor="ctr"/>
           <a:lstStyle/>
           <a:p>
-            <a:pPr indent="0" marL="0">
+            <a:pPr marL="0" indent="0">
               <a:buNone/>
             </a:pPr>
             <a:r>
@@ -4453,7 +4389,7 @@
           <a:bodyPr wrap="square" lIns="0" tIns="0" rIns="0" bIns="0" rtlCol="0" anchor="ctr"/>
           <a:lstStyle/>
           <a:p>
-            <a:pPr indent="0" marL="0">
+            <a:pPr marL="0" indent="0">
               <a:buNone/>
             </a:pPr>
             <a:r>
@@ -4492,7 +4428,7 @@
           <a:bodyPr wrap="square" lIns="0" tIns="0" rIns="0" bIns="0" rtlCol="0" anchor="ctr"/>
           <a:lstStyle/>
           <a:p>
-            <a:pPr indent="0" marL="0">
+            <a:pPr marL="0" indent="0">
               <a:buNone/>
             </a:pPr>
             <a:r>
@@ -4531,7 +4467,7 @@
           <a:bodyPr wrap="square" lIns="0" tIns="0" rIns="0" bIns="0" rtlCol="0" anchor="ctr"/>
           <a:lstStyle/>
           <a:p>
-            <a:pPr indent="0" marL="0">
+            <a:pPr marL="0" indent="0">
               <a:buNone/>
             </a:pPr>
             <a:r>
@@ -4570,7 +4506,7 @@
           <a:bodyPr wrap="square" lIns="0" tIns="0" rIns="0" bIns="0" rtlCol="0" anchor="ctr"/>
           <a:lstStyle/>
           <a:p>
-            <a:pPr indent="0" marL="0">
+            <a:pPr marL="0" indent="0">
               <a:buNone/>
             </a:pPr>
             <a:r>
@@ -4607,6 +4543,13 @@
           </a:solidFill>
           <a:ln/>
         </p:spPr>
+        <p:txBody>
+          <a:bodyPr/>
+          <a:lstStyle/>
+          <a:p>
+            <a:endParaRPr lang="es-AR"/>
+          </a:p>
+        </p:txBody>
       </p:sp>
       <p:sp>
         <p:nvSpPr>
@@ -4629,7 +4572,7 @@
           <a:bodyPr wrap="square" lIns="0" tIns="0" rIns="0" bIns="0" rtlCol="0" anchor="ctr"/>
           <a:lstStyle/>
           <a:p>
-            <a:pPr algn="ctr" indent="0" marL="0">
+            <a:pPr marL="0" indent="0" algn="ctr">
               <a:buNone/>
             </a:pPr>
             <a:r>
@@ -4666,13 +4609,20 @@
           </a:solidFill>
           <a:ln/>
           <a:effectLst>
-            <a:outerShdw sx="100000" sy="100000" kx="0" ky="0" algn="bl" rotWithShape="0" blurRad="101600" dist="38100" dir="8100000">
+            <a:outerShdw blurRad="101600" dist="38100" dir="8100000" algn="bl" rotWithShape="0">
               <a:srgbClr val="000000">
                 <a:alpha val="10000"/>
               </a:srgbClr>
             </a:outerShdw>
           </a:effectLst>
         </p:spPr>
+        <p:txBody>
+          <a:bodyPr/>
+          <a:lstStyle/>
+          <a:p>
+            <a:endParaRPr lang="es-AR"/>
+          </a:p>
+        </p:txBody>
       </p:sp>
       <p:sp>
         <p:nvSpPr>
@@ -4695,7 +4645,7 @@
           <a:bodyPr wrap="square" lIns="0" tIns="0" rIns="0" bIns="0" rtlCol="0" anchor="ctr"/>
           <a:lstStyle/>
           <a:p>
-            <a:pPr indent="0" marL="0">
+            <a:pPr marL="0" indent="0">
               <a:buNone/>
             </a:pPr>
             <a:r>
@@ -4734,7 +4684,7 @@
           <a:bodyPr wrap="square" lIns="0" tIns="0" rIns="0" bIns="0" rtlCol="0" anchor="ctr"/>
           <a:lstStyle/>
           <a:p>
-            <a:pPr indent="0" marL="0">
+            <a:pPr marL="0" indent="0">
               <a:buNone/>
             </a:pPr>
             <a:r>
@@ -4773,7 +4723,7 @@
           <a:bodyPr wrap="square" lIns="0" tIns="0" rIns="0" bIns="0" rtlCol="0" anchor="ctr"/>
           <a:lstStyle/>
           <a:p>
-            <a:pPr indent="0" marL="0">
+            <a:pPr marL="0" indent="0">
               <a:buNone/>
             </a:pPr>
             <a:r>
@@ -4812,7 +4762,7 @@
           <a:bodyPr wrap="square" lIns="0" tIns="0" rIns="0" bIns="0" rtlCol="0" anchor="ctr"/>
           <a:lstStyle/>
           <a:p>
-            <a:pPr indent="0" marL="0">
+            <a:pPr marL="0" indent="0">
               <a:buNone/>
             </a:pPr>
             <a:r>
@@ -4849,6 +4799,13 @@
           </a:solidFill>
           <a:ln/>
         </p:spPr>
+        <p:txBody>
+          <a:bodyPr/>
+          <a:lstStyle/>
+          <a:p>
+            <a:endParaRPr lang="es-AR"/>
+          </a:p>
+        </p:txBody>
       </p:sp>
       <p:sp>
         <p:nvSpPr>
@@ -4871,7 +4828,7 @@
           <a:bodyPr wrap="square" lIns="0" tIns="0" rIns="0" bIns="0" rtlCol="0" anchor="ctr"/>
           <a:lstStyle/>
           <a:p>
-            <a:pPr indent="0" marL="0">
+            <a:pPr marL="0" indent="0">
               <a:buNone/>
             </a:pPr>
             <a:r>
@@ -4908,6 +4865,13 @@
           </a:solidFill>
           <a:ln/>
         </p:spPr>
+        <p:txBody>
+          <a:bodyPr/>
+          <a:lstStyle/>
+          <a:p>
+            <a:endParaRPr lang="es-AR"/>
+          </a:p>
+        </p:txBody>
       </p:sp>
       <p:sp>
         <p:nvSpPr>
@@ -4930,7 +4894,7 @@
           <a:bodyPr wrap="square" lIns="0" tIns="0" rIns="0" bIns="0" rtlCol="0" anchor="ctr"/>
           <a:lstStyle/>
           <a:p>
-            <a:pPr indent="0" marL="0">
+            <a:pPr marL="0" indent="0">
               <a:buNone/>
             </a:pPr>
             <a:r>
@@ -4969,7 +4933,7 @@
           <a:bodyPr wrap="square" lIns="0" tIns="0" rIns="0" bIns="0" rtlCol="0" anchor="ctr"/>
           <a:lstStyle/>
           <a:p>
-            <a:pPr algn="r" indent="0" marL="0">
+            <a:pPr marL="0" indent="0" algn="r">
               <a:buNone/>
             </a:pPr>
             <a:r>
@@ -5003,6 +4967,7 @@
         <a:solidFill>
           <a:srgbClr val="F0F9FF"/>
         </a:solidFill>
+        <a:effectLst/>
       </p:bgPr>
     </p:bg>
     <p:spTree>
@@ -5038,6 +5003,13 @@
           </a:solidFill>
           <a:ln/>
         </p:spPr>
+        <p:txBody>
+          <a:bodyPr/>
+          <a:lstStyle/>
+          <a:p>
+            <a:endParaRPr lang="es-AR"/>
+          </a:p>
+        </p:txBody>
       </p:sp>
       <p:sp>
         <p:nvSpPr>
@@ -5060,7 +5032,7 @@
           <a:bodyPr wrap="square" lIns="0" tIns="0" rIns="0" bIns="0" rtlCol="0" anchor="ctr"/>
           <a:lstStyle/>
           <a:p>
-            <a:pPr indent="0" marL="0">
+            <a:pPr marL="0" indent="0">
               <a:buNone/>
             </a:pPr>
             <a:r>
@@ -5099,7 +5071,7 @@
           <a:bodyPr wrap="square" lIns="0" tIns="0" rIns="0" bIns="0" rtlCol="0" anchor="ctr"/>
           <a:lstStyle/>
           <a:p>
-            <a:pPr indent="0" marL="0">
+            <a:pPr marL="0" indent="0">
               <a:buNone/>
             </a:pPr>
             <a:r>
@@ -5136,13 +5108,20 @@
           </a:solidFill>
           <a:ln/>
           <a:effectLst>
-            <a:outerShdw sx="100000" sy="100000" kx="0" ky="0" algn="bl" rotWithShape="0" blurRad="101600" dist="38100" dir="8100000">
+            <a:outerShdw blurRad="101600" dist="38100" dir="8100000" algn="bl" rotWithShape="0">
               <a:srgbClr val="000000">
                 <a:alpha val="10000"/>
               </a:srgbClr>
             </a:outerShdw>
           </a:effectLst>
         </p:spPr>
+        <p:txBody>
+          <a:bodyPr/>
+          <a:lstStyle/>
+          <a:p>
+            <a:endParaRPr lang="es-AR"/>
+          </a:p>
+        </p:txBody>
       </p:sp>
       <p:sp>
         <p:nvSpPr>
@@ -5163,6 +5142,13 @@
           </a:solidFill>
           <a:ln/>
         </p:spPr>
+        <p:txBody>
+          <a:bodyPr/>
+          <a:lstStyle/>
+          <a:p>
+            <a:endParaRPr lang="es-AR"/>
+          </a:p>
+        </p:txBody>
       </p:sp>
       <p:sp>
         <p:nvSpPr>
@@ -5185,7 +5171,7 @@
           <a:bodyPr wrap="square" lIns="0" tIns="0" rIns="0" bIns="0" rtlCol="0" anchor="ctr"/>
           <a:lstStyle/>
           <a:p>
-            <a:pPr indent="0" marL="0">
+            <a:pPr marL="0" indent="0">
               <a:buNone/>
             </a:pPr>
             <a:r>
@@ -5224,7 +5210,7 @@
           <a:bodyPr wrap="square" lIns="0" tIns="0" rIns="0" bIns="0" rtlCol="0" anchor="t"/>
           <a:lstStyle/>
           <a:p>
-            <a:pPr indent="0" marL="0">
+            <a:pPr marL="0" indent="0">
               <a:buNone/>
             </a:pPr>
             <a:r>
@@ -5261,6 +5247,13 @@
           </a:solidFill>
           <a:ln/>
         </p:spPr>
+        <p:txBody>
+          <a:bodyPr/>
+          <a:lstStyle/>
+          <a:p>
+            <a:endParaRPr lang="es-AR"/>
+          </a:p>
+        </p:txBody>
       </p:sp>
       <p:sp>
         <p:nvSpPr>
@@ -5283,7 +5276,7 @@
           <a:bodyPr wrap="square" lIns="0" tIns="0" rIns="0" bIns="0" rtlCol="0" anchor="ctr"/>
           <a:lstStyle/>
           <a:p>
-            <a:pPr indent="0" marL="0">
+            <a:pPr marL="0" indent="0">
               <a:buNone/>
             </a:pPr>
             <a:r>
@@ -5320,13 +5313,20 @@
           </a:solidFill>
           <a:ln/>
           <a:effectLst>
-            <a:outerShdw sx="100000" sy="100000" kx="0" ky="0" algn="bl" rotWithShape="0" blurRad="101600" dist="38100" dir="8100000">
+            <a:outerShdw blurRad="101600" dist="38100" dir="8100000" algn="bl" rotWithShape="0">
               <a:srgbClr val="000000">
                 <a:alpha val="10000"/>
               </a:srgbClr>
             </a:outerShdw>
           </a:effectLst>
         </p:spPr>
+        <p:txBody>
+          <a:bodyPr/>
+          <a:lstStyle/>
+          <a:p>
+            <a:endParaRPr lang="es-AR"/>
+          </a:p>
+        </p:txBody>
       </p:sp>
       <p:sp>
         <p:nvSpPr>
@@ -5347,6 +5347,13 @@
           </a:solidFill>
           <a:ln/>
         </p:spPr>
+        <p:txBody>
+          <a:bodyPr/>
+          <a:lstStyle/>
+          <a:p>
+            <a:endParaRPr lang="es-AR"/>
+          </a:p>
+        </p:txBody>
       </p:sp>
       <p:sp>
         <p:nvSpPr>
@@ -5369,7 +5376,7 @@
           <a:bodyPr wrap="square" lIns="0" tIns="0" rIns="0" bIns="0" rtlCol="0" anchor="ctr"/>
           <a:lstStyle/>
           <a:p>
-            <a:pPr indent="0" marL="0">
+            <a:pPr marL="0" indent="0">
               <a:buNone/>
             </a:pPr>
             <a:r>
@@ -5408,7 +5415,7 @@
           <a:bodyPr wrap="square" lIns="0" tIns="0" rIns="0" bIns="0" rtlCol="0" anchor="t"/>
           <a:lstStyle/>
           <a:p>
-            <a:pPr indent="0" marL="0">
+            <a:pPr marL="0" indent="0">
               <a:buNone/>
             </a:pPr>
             <a:r>
@@ -5445,6 +5452,13 @@
           </a:solidFill>
           <a:ln/>
         </p:spPr>
+        <p:txBody>
+          <a:bodyPr/>
+          <a:lstStyle/>
+          <a:p>
+            <a:endParaRPr lang="es-AR"/>
+          </a:p>
+        </p:txBody>
       </p:sp>
       <p:sp>
         <p:nvSpPr>
@@ -5467,7 +5481,7 @@
           <a:bodyPr wrap="square" lIns="0" tIns="0" rIns="0" bIns="0" rtlCol="0" anchor="ctr"/>
           <a:lstStyle/>
           <a:p>
-            <a:pPr indent="0" marL="0">
+            <a:pPr marL="0" indent="0">
               <a:buNone/>
             </a:pPr>
             <a:r>
@@ -5504,13 +5518,20 @@
           </a:solidFill>
           <a:ln/>
           <a:effectLst>
-            <a:outerShdw sx="100000" sy="100000" kx="0" ky="0" algn="bl" rotWithShape="0" blurRad="101600" dist="38100" dir="8100000">
+            <a:outerShdw blurRad="101600" dist="38100" dir="8100000" algn="bl" rotWithShape="0">
               <a:srgbClr val="000000">
                 <a:alpha val="10000"/>
               </a:srgbClr>
             </a:outerShdw>
           </a:effectLst>
         </p:spPr>
+        <p:txBody>
+          <a:bodyPr/>
+          <a:lstStyle/>
+          <a:p>
+            <a:endParaRPr lang="es-AR"/>
+          </a:p>
+        </p:txBody>
       </p:sp>
       <p:sp>
         <p:nvSpPr>
@@ -5531,6 +5552,13 @@
           </a:solidFill>
           <a:ln/>
         </p:spPr>
+        <p:txBody>
+          <a:bodyPr/>
+          <a:lstStyle/>
+          <a:p>
+            <a:endParaRPr lang="es-AR"/>
+          </a:p>
+        </p:txBody>
       </p:sp>
       <p:sp>
         <p:nvSpPr>
@@ -5553,7 +5581,7 @@
           <a:bodyPr wrap="square" lIns="0" tIns="0" rIns="0" bIns="0" rtlCol="0" anchor="ctr"/>
           <a:lstStyle/>
           <a:p>
-            <a:pPr indent="0" marL="0">
+            <a:pPr marL="0" indent="0">
               <a:buNone/>
             </a:pPr>
             <a:r>
@@ -5592,7 +5620,7 @@
           <a:bodyPr wrap="square" lIns="0" tIns="0" rIns="0" bIns="0" rtlCol="0" anchor="t"/>
           <a:lstStyle/>
           <a:p>
-            <a:pPr indent="0" marL="0">
+            <a:pPr marL="0" indent="0">
               <a:buNone/>
             </a:pPr>
             <a:r>
@@ -5629,6 +5657,13 @@
           </a:solidFill>
           <a:ln/>
         </p:spPr>
+        <p:txBody>
+          <a:bodyPr/>
+          <a:lstStyle/>
+          <a:p>
+            <a:endParaRPr lang="es-AR"/>
+          </a:p>
+        </p:txBody>
       </p:sp>
       <p:sp>
         <p:nvSpPr>
@@ -5651,7 +5686,7 @@
           <a:bodyPr wrap="square" lIns="0" tIns="0" rIns="0" bIns="0" rtlCol="0" anchor="ctr"/>
           <a:lstStyle/>
           <a:p>
-            <a:pPr indent="0" marL="0">
+            <a:pPr marL="0" indent="0">
               <a:buNone/>
             </a:pPr>
             <a:r>
@@ -5688,13 +5723,20 @@
           </a:solidFill>
           <a:ln/>
           <a:effectLst>
-            <a:outerShdw sx="100000" sy="100000" kx="0" ky="0" algn="bl" rotWithShape="0" blurRad="101600" dist="38100" dir="8100000">
+            <a:outerShdw blurRad="101600" dist="38100" dir="8100000" algn="bl" rotWithShape="0">
               <a:srgbClr val="000000">
                 <a:alpha val="10000"/>
               </a:srgbClr>
             </a:outerShdw>
           </a:effectLst>
         </p:spPr>
+        <p:txBody>
+          <a:bodyPr/>
+          <a:lstStyle/>
+          <a:p>
+            <a:endParaRPr lang="es-AR"/>
+          </a:p>
+        </p:txBody>
       </p:sp>
       <p:sp>
         <p:nvSpPr>
@@ -5715,6 +5757,13 @@
           </a:solidFill>
           <a:ln/>
         </p:spPr>
+        <p:txBody>
+          <a:bodyPr/>
+          <a:lstStyle/>
+          <a:p>
+            <a:endParaRPr lang="es-AR"/>
+          </a:p>
+        </p:txBody>
       </p:sp>
       <p:sp>
         <p:nvSpPr>
@@ -5737,7 +5786,7 @@
           <a:bodyPr wrap="square" lIns="0" tIns="0" rIns="0" bIns="0" rtlCol="0" anchor="ctr"/>
           <a:lstStyle/>
           <a:p>
-            <a:pPr indent="0" marL="0">
+            <a:pPr marL="0" indent="0">
               <a:buNone/>
             </a:pPr>
             <a:r>
@@ -5776,7 +5825,7 @@
           <a:bodyPr wrap="square" lIns="0" tIns="0" rIns="0" bIns="0" rtlCol="0" anchor="t"/>
           <a:lstStyle/>
           <a:p>
-            <a:pPr indent="0" marL="0">
+            <a:pPr marL="0" indent="0">
               <a:buNone/>
             </a:pPr>
             <a:r>
@@ -5813,6 +5862,13 @@
           </a:solidFill>
           <a:ln/>
         </p:spPr>
+        <p:txBody>
+          <a:bodyPr/>
+          <a:lstStyle/>
+          <a:p>
+            <a:endParaRPr lang="es-AR"/>
+          </a:p>
+        </p:txBody>
       </p:sp>
       <p:sp>
         <p:nvSpPr>
@@ -5835,7 +5891,7 @@
           <a:bodyPr wrap="square" lIns="0" tIns="0" rIns="0" bIns="0" rtlCol="0" anchor="ctr"/>
           <a:lstStyle/>
           <a:p>
-            <a:pPr indent="0" marL="0">
+            <a:pPr marL="0" indent="0">
               <a:buNone/>
             </a:pPr>
             <a:r>
@@ -5872,6 +5928,13 @@
           </a:solidFill>
           <a:ln/>
         </p:spPr>
+        <p:txBody>
+          <a:bodyPr/>
+          <a:lstStyle/>
+          <a:p>
+            <a:endParaRPr lang="es-AR"/>
+          </a:p>
+        </p:txBody>
       </p:sp>
       <p:sp>
         <p:nvSpPr>
@@ -5894,7 +5957,7 @@
           <a:bodyPr wrap="square" lIns="0" tIns="0" rIns="0" bIns="0" rtlCol="0" anchor="ctr"/>
           <a:lstStyle/>
           <a:p>
-            <a:pPr indent="0" marL="0">
+            <a:pPr marL="0" indent="0">
               <a:buNone/>
             </a:pPr>
             <a:r>
@@ -5933,7 +5996,7 @@
           <a:bodyPr wrap="square" lIns="0" tIns="0" rIns="0" bIns="0" rtlCol="0" anchor="ctr"/>
           <a:lstStyle/>
           <a:p>
-            <a:pPr algn="r" indent="0" marL="0">
+            <a:pPr marL="0" indent="0" algn="r">
               <a:buNone/>
             </a:pPr>
             <a:r>
@@ -5967,6 +6030,7 @@
         <a:solidFill>
           <a:srgbClr val="F0F9FF"/>
         </a:solidFill>
+        <a:effectLst/>
       </p:bgPr>
     </p:bg>
     <p:spTree>
@@ -6002,6 +6066,13 @@
           </a:solidFill>
           <a:ln/>
         </p:spPr>
+        <p:txBody>
+          <a:bodyPr/>
+          <a:lstStyle/>
+          <a:p>
+            <a:endParaRPr lang="es-AR"/>
+          </a:p>
+        </p:txBody>
       </p:sp>
       <p:sp>
         <p:nvSpPr>
@@ -6024,7 +6095,7 @@
           <a:bodyPr wrap="square" lIns="0" tIns="0" rIns="0" bIns="0" rtlCol="0" anchor="ctr"/>
           <a:lstStyle/>
           <a:p>
-            <a:pPr indent="0" marL="0">
+            <a:pPr marL="0" indent="0">
               <a:buNone/>
             </a:pPr>
             <a:r>
@@ -6061,13 +6132,20 @@
           </a:solidFill>
           <a:ln/>
           <a:effectLst>
-            <a:outerShdw sx="100000" sy="100000" kx="0" ky="0" algn="bl" rotWithShape="0" blurRad="101600" dist="38100" dir="8100000">
+            <a:outerShdw blurRad="101600" dist="38100" dir="8100000" algn="bl" rotWithShape="0">
               <a:srgbClr val="000000">
                 <a:alpha val="10000"/>
               </a:srgbClr>
             </a:outerShdw>
           </a:effectLst>
         </p:spPr>
+        <p:txBody>
+          <a:bodyPr/>
+          <a:lstStyle/>
+          <a:p>
+            <a:endParaRPr lang="es-AR"/>
+          </a:p>
+        </p:txBody>
       </p:sp>
       <p:sp>
         <p:nvSpPr>
@@ -6088,17 +6166,24 @@
           </a:solidFill>
           <a:ln/>
         </p:spPr>
+        <p:txBody>
+          <a:bodyPr/>
+          <a:lstStyle/>
+          <a:p>
+            <a:endParaRPr lang="es-AR"/>
+          </a:p>
+        </p:txBody>
       </p:sp>
       <p:pic>
         <p:nvPicPr>
-          <p:cNvPr id="6" name="Image 0" descr="preencoded.png">    </p:cNvPr>
+          <p:cNvPr id="6" name="Image 0" descr="preencoded.png"/>
           <p:cNvPicPr>
             <a:picLocks noChangeAspect="1"/>
           </p:cNvPicPr>
           <p:nvPr/>
         </p:nvPicPr>
         <p:blipFill>
-          <a:blip r:embed="rId1"/>
+          <a:blip r:embed="rId3"/>
           <a:stretch>
             <a:fillRect/>
           </a:stretch>
@@ -6134,7 +6219,7 @@
           <a:bodyPr wrap="square" lIns="0" tIns="0" rIns="0" bIns="0" rtlCol="0" anchor="ctr"/>
           <a:lstStyle/>
           <a:p>
-            <a:pPr indent="0" marL="0">
+            <a:pPr marL="0" indent="0">
               <a:buNone/>
             </a:pPr>
             <a:r>
@@ -6173,7 +6258,7 @@
           <a:bodyPr wrap="square" lIns="0" tIns="0" rIns="0" bIns="0" rtlCol="0" anchor="t"/>
           <a:lstStyle/>
           <a:p>
-            <a:pPr indent="0" marL="0">
+            <a:pPr marL="0" indent="0">
               <a:lnSpc>
                 <a:spcPct val="115000"/>
               </a:lnSpc>
@@ -6193,7 +6278,7 @@
             <a:endParaRPr lang="en-US" sz="1100" dirty="0"/>
           </a:p>
           <a:p>
-            <a:pPr indent="0" marL="0">
+            <a:pPr marL="0" indent="0">
               <a:lnSpc>
                 <a:spcPct val="115000"/>
               </a:lnSpc>
@@ -6202,7 +6287,7 @@
             <a:endParaRPr lang="en-US" sz="1100" dirty="0"/>
           </a:p>
           <a:p>
-            <a:pPr indent="0" marL="0">
+            <a:pPr marL="0" indent="0">
               <a:lnSpc>
                 <a:spcPct val="115000"/>
               </a:lnSpc>
@@ -6222,7 +6307,7 @@
             <a:endParaRPr lang="en-US" sz="1100" dirty="0"/>
           </a:p>
           <a:p>
-            <a:pPr indent="0" marL="0">
+            <a:pPr marL="0" indent="0">
               <a:lnSpc>
                 <a:spcPct val="115000"/>
               </a:lnSpc>
@@ -6231,7 +6316,7 @@
             <a:endParaRPr lang="en-US" sz="1100" dirty="0"/>
           </a:p>
           <a:p>
-            <a:pPr indent="0" marL="0">
+            <a:pPr marL="0" indent="0">
               <a:lnSpc>
                 <a:spcPct val="115000"/>
               </a:lnSpc>
@@ -6251,7 +6336,7 @@
             <a:endParaRPr lang="en-US" sz="1100" dirty="0"/>
           </a:p>
           <a:p>
-            <a:pPr indent="0" marL="0">
+            <a:pPr marL="0" indent="0">
               <a:lnSpc>
                 <a:spcPct val="115000"/>
               </a:lnSpc>
@@ -6260,7 +6345,7 @@
             <a:endParaRPr lang="en-US" sz="1100" dirty="0"/>
           </a:p>
           <a:p>
-            <a:pPr indent="0" marL="0">
+            <a:pPr marL="0" indent="0">
               <a:lnSpc>
                 <a:spcPct val="115000"/>
               </a:lnSpc>
@@ -6280,7 +6365,7 @@
             <a:endParaRPr lang="en-US" sz="1100" dirty="0"/>
           </a:p>
           <a:p>
-            <a:pPr indent="0" marL="0">
+            <a:pPr marL="0" indent="0">
               <a:lnSpc>
                 <a:spcPct val="115000"/>
               </a:lnSpc>
@@ -6289,7 +6374,7 @@
             <a:endParaRPr lang="en-US" sz="1100" dirty="0"/>
           </a:p>
           <a:p>
-            <a:pPr indent="0" marL="0">
+            <a:pPr marL="0" indent="0">
               <a:lnSpc>
                 <a:spcPct val="115000"/>
               </a:lnSpc>
@@ -6309,7 +6394,7 @@
             <a:endParaRPr lang="en-US" sz="1100" dirty="0"/>
           </a:p>
           <a:p>
-            <a:pPr indent="0" marL="0">
+            <a:pPr marL="0" indent="0">
               <a:lnSpc>
                 <a:spcPct val="115000"/>
               </a:lnSpc>
@@ -6349,13 +6434,20 @@
           </a:solidFill>
           <a:ln/>
           <a:effectLst>
-            <a:outerShdw sx="100000" sy="100000" kx="0" ky="0" algn="bl" rotWithShape="0" blurRad="101600" dist="38100" dir="8100000">
+            <a:outerShdw blurRad="101600" dist="38100" dir="8100000" algn="bl" rotWithShape="0">
               <a:srgbClr val="000000">
                 <a:alpha val="10000"/>
               </a:srgbClr>
             </a:outerShdw>
           </a:effectLst>
         </p:spPr>
+        <p:txBody>
+          <a:bodyPr/>
+          <a:lstStyle/>
+          <a:p>
+            <a:endParaRPr lang="es-AR"/>
+          </a:p>
+        </p:txBody>
       </p:sp>
       <p:sp>
         <p:nvSpPr>
@@ -6376,17 +6468,24 @@
           </a:solidFill>
           <a:ln/>
         </p:spPr>
+        <p:txBody>
+          <a:bodyPr/>
+          <a:lstStyle/>
+          <a:p>
+            <a:endParaRPr lang="es-AR"/>
+          </a:p>
+        </p:txBody>
       </p:sp>
       <p:pic>
         <p:nvPicPr>
-          <p:cNvPr id="11" name="Image 1" descr="preencoded.png">    </p:cNvPr>
+          <p:cNvPr id="11" name="Image 1" descr="preencoded.png"/>
           <p:cNvPicPr>
             <a:picLocks noChangeAspect="1"/>
           </p:cNvPicPr>
           <p:nvPr/>
         </p:nvPicPr>
         <p:blipFill>
-          <a:blip r:embed="rId2"/>
+          <a:blip r:embed="rId4"/>
           <a:stretch>
             <a:fillRect/>
           </a:stretch>
@@ -6422,7 +6521,7 @@
           <a:bodyPr wrap="square" lIns="0" tIns="0" rIns="0" bIns="0" rtlCol="0" anchor="ctr"/>
           <a:lstStyle/>
           <a:p>
-            <a:pPr indent="0" marL="0">
+            <a:pPr marL="0" indent="0">
               <a:buNone/>
             </a:pPr>
             <a:r>
@@ -6461,7 +6560,7 @@
           <a:bodyPr wrap="square" lIns="0" tIns="0" rIns="0" bIns="0" rtlCol="0" anchor="t"/>
           <a:lstStyle/>
           <a:p>
-            <a:pPr indent="0" marL="0">
+            <a:pPr marL="0" indent="0">
               <a:lnSpc>
                 <a:spcPct val="115000"/>
               </a:lnSpc>
@@ -6481,7 +6580,7 @@
             <a:endParaRPr lang="en-US" sz="1100" dirty="0"/>
           </a:p>
           <a:p>
-            <a:pPr indent="0" marL="0">
+            <a:pPr marL="0" indent="0">
               <a:lnSpc>
                 <a:spcPct val="115000"/>
               </a:lnSpc>
@@ -6490,7 +6589,7 @@
             <a:endParaRPr lang="en-US" sz="1100" dirty="0"/>
           </a:p>
           <a:p>
-            <a:pPr indent="0" marL="0">
+            <a:pPr marL="0" indent="0">
               <a:lnSpc>
                 <a:spcPct val="115000"/>
               </a:lnSpc>
@@ -6510,7 +6609,7 @@
             <a:endParaRPr lang="en-US" sz="1100" dirty="0"/>
           </a:p>
           <a:p>
-            <a:pPr indent="0" marL="0">
+            <a:pPr marL="0" indent="0">
               <a:lnSpc>
                 <a:spcPct val="115000"/>
               </a:lnSpc>
@@ -6519,7 +6618,7 @@
             <a:endParaRPr lang="en-US" sz="1100" dirty="0"/>
           </a:p>
           <a:p>
-            <a:pPr indent="0" marL="0">
+            <a:pPr marL="0" indent="0">
               <a:lnSpc>
                 <a:spcPct val="115000"/>
               </a:lnSpc>
@@ -6539,7 +6638,7 @@
             <a:endParaRPr lang="en-US" sz="1100" dirty="0"/>
           </a:p>
           <a:p>
-            <a:pPr indent="0" marL="0">
+            <a:pPr marL="0" indent="0">
               <a:lnSpc>
                 <a:spcPct val="115000"/>
               </a:lnSpc>
@@ -6548,7 +6647,7 @@
             <a:endParaRPr lang="en-US" sz="1100" dirty="0"/>
           </a:p>
           <a:p>
-            <a:pPr indent="0" marL="0">
+            <a:pPr marL="0" indent="0">
               <a:lnSpc>
                 <a:spcPct val="115000"/>
               </a:lnSpc>
@@ -6568,7 +6667,7 @@
             <a:endParaRPr lang="en-US" sz="1100" dirty="0"/>
           </a:p>
           <a:p>
-            <a:pPr indent="0" marL="0">
+            <a:pPr marL="0" indent="0">
               <a:lnSpc>
                 <a:spcPct val="115000"/>
               </a:lnSpc>
@@ -6577,7 +6676,7 @@
             <a:endParaRPr lang="en-US" sz="1100" dirty="0"/>
           </a:p>
           <a:p>
-            <a:pPr indent="0" marL="0">
+            <a:pPr marL="0" indent="0">
               <a:lnSpc>
                 <a:spcPct val="115000"/>
               </a:lnSpc>
@@ -6597,7 +6696,7 @@
             <a:endParaRPr lang="en-US" sz="1100" dirty="0"/>
           </a:p>
           <a:p>
-            <a:pPr indent="0" marL="0">
+            <a:pPr marL="0" indent="0">
               <a:lnSpc>
                 <a:spcPct val="115000"/>
               </a:lnSpc>
@@ -6637,6 +6736,13 @@
           </a:solidFill>
           <a:ln/>
         </p:spPr>
+        <p:txBody>
+          <a:bodyPr/>
+          <a:lstStyle/>
+          <a:p>
+            <a:endParaRPr lang="es-AR"/>
+          </a:p>
+        </p:txBody>
       </p:sp>
       <p:sp>
         <p:nvSpPr>
@@ -6659,7 +6765,7 @@
           <a:bodyPr wrap="square" lIns="0" tIns="0" rIns="0" bIns="0" rtlCol="0" anchor="ctr"/>
           <a:lstStyle/>
           <a:p>
-            <a:pPr indent="0" marL="0">
+            <a:pPr marL="0" indent="0">
               <a:buNone/>
             </a:pPr>
             <a:r>
@@ -6698,7 +6804,7 @@
           <a:bodyPr wrap="square" lIns="0" tIns="0" rIns="0" bIns="0" rtlCol="0" anchor="ctr"/>
           <a:lstStyle/>
           <a:p>
-            <a:pPr algn="r" indent="0" marL="0">
+            <a:pPr marL="0" indent="0" algn="r">
               <a:buNone/>
             </a:pPr>
             <a:r>
@@ -6732,6 +6838,7 @@
         <a:solidFill>
           <a:srgbClr val="1B2A4A"/>
         </a:solidFill>
+        <a:effectLst/>
       </p:bgPr>
     </p:bg>
     <p:spTree>
@@ -6767,333 +6874,17 @@
           </a:solidFill>
           <a:ln/>
         </p:spPr>
+        <p:txBody>
+          <a:bodyPr/>
+          <a:lstStyle/>
+          <a:p>
+            <a:endParaRPr lang="es-AR"/>
+          </a:p>
+        </p:txBody>
       </p:sp>
       <p:pic>
         <p:nvPicPr>
-          <p:cNvPr id="3" name="Image 0" descr="preencoded.png">    </p:cNvPr>
-          <p:cNvPicPr>
-            <a:picLocks noChangeAspect="1"/>
-          </p:cNvPicPr>
-          <p:nvPr/>
-        </p:nvPicPr>
-        <p:blipFill>
-          <a:blip r:embed="rId1"/>
-          <a:stretch>
-            <a:fillRect/>
-          </a:stretch>
-        </p:blipFill>
-        <p:spPr>
-          <a:xfrm>
-            <a:off x="640080" y="365760"/>
-            <a:ext cx="457200" cy="457200"/>
-          </a:xfrm>
-          <a:prstGeom prst="rect">
-            <a:avLst/>
-          </a:prstGeom>
-        </p:spPr>
-      </p:pic>
-      <p:sp>
-        <p:nvSpPr>
-          <p:cNvPr id="4" name="Text 1"/>
-          <p:cNvSpPr/>
-          <p:nvPr/>
-        </p:nvSpPr>
-        <p:spPr>
-          <a:xfrm>
-            <a:off x="1234440" y="320040"/>
-            <a:ext cx="7315200" cy="548640"/>
-          </a:xfrm>
-          <a:prstGeom prst="rect">
-            <a:avLst/>
-          </a:prstGeom>
-          <a:noFill/>
-          <a:ln/>
-        </p:spPr>
-        <p:txBody>
-          <a:bodyPr wrap="square" lIns="0" tIns="0" rIns="0" bIns="0" rtlCol="0" anchor="ctr"/>
-          <a:lstStyle/>
-          <a:p>
-            <a:pPr indent="0" marL="0">
-              <a:buNone/>
-            </a:pPr>
-            <a:r>
-              <a:rPr lang="en-US" sz="2800" b="1" dirty="0">
-                <a:solidFill>
-                  <a:srgbClr val="FFFFFF"/>
-                </a:solidFill>
-                <a:latin typeface="Georgia" pitchFamily="34" charset="0"/>
-                <a:ea typeface="Georgia" pitchFamily="34" charset="-122"/>
-                <a:cs typeface="Georgia" pitchFamily="34" charset="-120"/>
-              </a:rPr>
-              <a:t>Cómo pedir ayuda</a:t>
-            </a:r>
-            <a:endParaRPr lang="en-US" sz="2800" dirty="0"/>
-          </a:p>
-        </p:txBody>
-      </p:sp>
-      <p:sp>
-        <p:nvSpPr>
-          <p:cNvPr id="5" name="Shape 2"/>
-          <p:cNvSpPr/>
-          <p:nvPr/>
-        </p:nvSpPr>
-        <p:spPr>
-          <a:xfrm>
-            <a:off x="640080" y="1097280"/>
-            <a:ext cx="7863840" cy="1051560"/>
-          </a:xfrm>
-          <a:prstGeom prst="rect">
-            <a:avLst/>
-          </a:prstGeom>
-          <a:solidFill>
-            <a:srgbClr val="0F1B33"/>
-          </a:solidFill>
-          <a:ln/>
-        </p:spPr>
-      </p:sp>
-      <p:sp>
-        <p:nvSpPr>
-          <p:cNvPr id="6" name="Shape 3"/>
-          <p:cNvSpPr/>
-          <p:nvPr/>
-        </p:nvSpPr>
-        <p:spPr>
-          <a:xfrm>
-            <a:off x="640080" y="1097280"/>
-            <a:ext cx="54864" cy="1051560"/>
-          </a:xfrm>
-          <a:prstGeom prst="rect">
-            <a:avLst/>
-          </a:prstGeom>
-          <a:solidFill>
-            <a:srgbClr val="0891B2"/>
-          </a:solidFill>
-          <a:ln/>
-        </p:spPr>
-      </p:sp>
-      <p:pic>
-        <p:nvPicPr>
-          <p:cNvPr id="7" name="Image 1" descr="preencoded.png">    </p:cNvPr>
-          <p:cNvPicPr>
-            <a:picLocks noChangeAspect="1"/>
-          </p:cNvPicPr>
-          <p:nvPr/>
-        </p:nvPicPr>
-        <p:blipFill>
-          <a:blip r:embed="rId2"/>
-          <a:stretch>
-            <a:fillRect/>
-          </a:stretch>
-        </p:blipFill>
-        <p:spPr>
-          <a:xfrm>
-            <a:off x="914400" y="1188720"/>
-            <a:ext cx="274320" cy="274320"/>
-          </a:xfrm>
-          <a:prstGeom prst="rect">
-            <a:avLst/>
-          </a:prstGeom>
-        </p:spPr>
-      </p:pic>
-      <p:sp>
-        <p:nvSpPr>
-          <p:cNvPr id="8" name="Text 4"/>
-          <p:cNvSpPr/>
-          <p:nvPr/>
-        </p:nvSpPr>
-        <p:spPr>
-          <a:xfrm>
-            <a:off x="1325880" y="1143000"/>
-            <a:ext cx="6858000" cy="320040"/>
-          </a:xfrm>
-          <a:prstGeom prst="rect">
-            <a:avLst/>
-          </a:prstGeom>
-          <a:noFill/>
-          <a:ln/>
-        </p:spPr>
-        <p:txBody>
-          <a:bodyPr wrap="square" lIns="0" tIns="0" rIns="0" bIns="0" rtlCol="0" anchor="ctr"/>
-          <a:lstStyle/>
-          <a:p>
-            <a:pPr indent="0" marL="0">
-              <a:buNone/>
-            </a:pPr>
-            <a:r>
-              <a:rPr lang="en-US" sz="1400" b="1" dirty="0">
-                <a:solidFill>
-                  <a:srgbClr val="06B6D4"/>
-                </a:solidFill>
-                <a:latin typeface="Arial" pitchFamily="34" charset="0"/>
-                <a:ea typeface="Arial" pitchFamily="34" charset="-122"/>
-                <a:cs typeface="Arial" pitchFamily="34" charset="-120"/>
-              </a:rPr>
-              <a:t>Desde R / RStudio</a:t>
-            </a:r>
-            <a:endParaRPr lang="en-US" sz="1400" dirty="0"/>
-          </a:p>
-        </p:txBody>
-      </p:sp>
-      <p:sp>
-        <p:nvSpPr>
-          <p:cNvPr id="9" name="Text 5"/>
-          <p:cNvSpPr/>
-          <p:nvPr/>
-        </p:nvSpPr>
-        <p:spPr>
-          <a:xfrm>
-            <a:off x="1325880" y="1481328"/>
-            <a:ext cx="6858000" cy="201168"/>
-          </a:xfrm>
-          <a:prstGeom prst="rect">
-            <a:avLst/>
-          </a:prstGeom>
-          <a:noFill/>
-          <a:ln/>
-        </p:spPr>
-        <p:txBody>
-          <a:bodyPr wrap="square" lIns="0" tIns="0" rIns="0" bIns="0" rtlCol="0" anchor="ctr"/>
-          <a:lstStyle/>
-          <a:p>
-            <a:pPr indent="0" marL="0">
-              <a:buNone/>
-            </a:pPr>
-            <a:r>
-              <a:rPr lang="en-US" sz="1100" dirty="0">
-                <a:solidFill>
-                  <a:srgbClr val="CBD5E1"/>
-                </a:solidFill>
-                <a:latin typeface="Arial" pitchFamily="34" charset="0"/>
-                <a:ea typeface="Arial" pitchFamily="34" charset="-122"/>
-                <a:cs typeface="Arial" pitchFamily="34" charset="-120"/>
-              </a:rPr>
-              <a:t>?mean  o  help(mean)  — Documentación de una función</a:t>
-            </a:r>
-            <a:endParaRPr lang="en-US" sz="1100" dirty="0"/>
-          </a:p>
-        </p:txBody>
-      </p:sp>
-      <p:sp>
-        <p:nvSpPr>
-          <p:cNvPr id="10" name="Text 6"/>
-          <p:cNvSpPr/>
-          <p:nvPr/>
-        </p:nvSpPr>
-        <p:spPr>
-          <a:xfrm>
-            <a:off x="1325880" y="1700784"/>
-            <a:ext cx="6858000" cy="201168"/>
-          </a:xfrm>
-          <a:prstGeom prst="rect">
-            <a:avLst/>
-          </a:prstGeom>
-          <a:noFill/>
-          <a:ln/>
-        </p:spPr>
-        <p:txBody>
-          <a:bodyPr wrap="square" lIns="0" tIns="0" rIns="0" bIns="0" rtlCol="0" anchor="ctr"/>
-          <a:lstStyle/>
-          <a:p>
-            <a:pPr indent="0" marL="0">
-              <a:buNone/>
-            </a:pPr>
-            <a:r>
-              <a:rPr lang="en-US" sz="1100" dirty="0">
-                <a:solidFill>
-                  <a:srgbClr val="CBD5E1"/>
-                </a:solidFill>
-                <a:latin typeface="Arial" pitchFamily="34" charset="0"/>
-                <a:ea typeface="Arial" pitchFamily="34" charset="-122"/>
-                <a:cs typeface="Arial" pitchFamily="34" charset="-120"/>
-              </a:rPr>
-              <a:t>??regression  — Buscar en toda la ayuda</a:t>
-            </a:r>
-            <a:endParaRPr lang="en-US" sz="1100" dirty="0"/>
-          </a:p>
-        </p:txBody>
-      </p:sp>
-      <p:sp>
-        <p:nvSpPr>
-          <p:cNvPr id="11" name="Text 7"/>
-          <p:cNvSpPr/>
-          <p:nvPr/>
-        </p:nvSpPr>
-        <p:spPr>
-          <a:xfrm>
-            <a:off x="1325880" y="1920240"/>
-            <a:ext cx="6858000" cy="201168"/>
-          </a:xfrm>
-          <a:prstGeom prst="rect">
-            <a:avLst/>
-          </a:prstGeom>
-          <a:noFill/>
-          <a:ln/>
-        </p:spPr>
-        <p:txBody>
-          <a:bodyPr wrap="square" lIns="0" tIns="0" rIns="0" bIns="0" rtlCol="0" anchor="ctr"/>
-          <a:lstStyle/>
-          <a:p>
-            <a:pPr indent="0" marL="0">
-              <a:buNone/>
-            </a:pPr>
-            <a:r>
-              <a:rPr lang="en-US" sz="1100" dirty="0">
-                <a:solidFill>
-                  <a:srgbClr val="CBD5E1"/>
-                </a:solidFill>
-                <a:latin typeface="Arial" pitchFamily="34" charset="0"/>
-                <a:ea typeface="Arial" pitchFamily="34" charset="-122"/>
-                <a:cs typeface="Arial" pitchFamily="34" charset="-120"/>
-              </a:rPr>
-              <a:t>example(mean)  — Ver ejemplos de uso</a:t>
-            </a:r>
-            <a:endParaRPr lang="en-US" sz="1100" dirty="0"/>
-          </a:p>
-        </p:txBody>
-      </p:sp>
-      <p:sp>
-        <p:nvSpPr>
-          <p:cNvPr id="12" name="Shape 8"/>
-          <p:cNvSpPr/>
-          <p:nvPr/>
-        </p:nvSpPr>
-        <p:spPr>
-          <a:xfrm>
-            <a:off x="640080" y="2377440"/>
-            <a:ext cx="7863840" cy="1051560"/>
-          </a:xfrm>
-          <a:prstGeom prst="rect">
-            <a:avLst/>
-          </a:prstGeom>
-          <a:solidFill>
-            <a:srgbClr val="0F1B33"/>
-          </a:solidFill>
-          <a:ln/>
-        </p:spPr>
-      </p:sp>
-      <p:sp>
-        <p:nvSpPr>
-          <p:cNvPr id="13" name="Shape 9"/>
-          <p:cNvSpPr/>
-          <p:nvPr/>
-        </p:nvSpPr>
-        <p:spPr>
-          <a:xfrm>
-            <a:off x="640080" y="2377440"/>
-            <a:ext cx="54864" cy="1051560"/>
-          </a:xfrm>
-          <a:prstGeom prst="rect">
-            <a:avLst/>
-          </a:prstGeom>
-          <a:solidFill>
-            <a:srgbClr val="0891B2"/>
-          </a:solidFill>
-          <a:ln/>
-        </p:spPr>
-      </p:sp>
-      <p:pic>
-        <p:nvPicPr>
-          <p:cNvPr id="14" name="Image 2" descr="preencoded.png">    </p:cNvPr>
+          <p:cNvPr id="3" name="Image 0" descr="preencoded.png"/>
           <p:cNvPicPr>
             <a:picLocks noChangeAspect="1"/>
           </p:cNvPicPr>
@@ -7107,8 +6898,8 @@
         </p:blipFill>
         <p:spPr>
           <a:xfrm>
-            <a:off x="914400" y="2468880"/>
-            <a:ext cx="274320" cy="274320"/>
+            <a:off x="640080" y="365760"/>
+            <a:ext cx="457200" cy="457200"/>
           </a:xfrm>
           <a:prstGeom prst="rect">
             <a:avLst/>
@@ -7117,169 +6908,52 @@
       </p:pic>
       <p:sp>
         <p:nvSpPr>
-          <p:cNvPr id="15" name="Text 10"/>
-          <p:cNvSpPr/>
-          <p:nvPr/>
-        </p:nvSpPr>
-        <p:spPr>
-          <a:xfrm>
-            <a:off x="1325880" y="2423160"/>
-            <a:ext cx="6858000" cy="320040"/>
-          </a:xfrm>
-          <a:prstGeom prst="rect">
-            <a:avLst/>
-          </a:prstGeom>
-          <a:noFill/>
-          <a:ln/>
-        </p:spPr>
-        <p:txBody>
-          <a:bodyPr wrap="square" lIns="0" tIns="0" rIns="0" bIns="0" rtlCol="0" anchor="ctr"/>
-          <a:lstStyle/>
-          <a:p>
-            <a:pPr indent="0" marL="0">
-              <a:buNone/>
-            </a:pPr>
-            <a:r>
-              <a:rPr lang="en-US" sz="1400" b="1" dirty="0">
-                <a:solidFill>
-                  <a:srgbClr val="06B6D4"/>
-                </a:solidFill>
-                <a:latin typeface="Arial" pitchFamily="34" charset="0"/>
-                <a:ea typeface="Arial" pitchFamily="34" charset="-122"/>
-                <a:cs typeface="Arial" pitchFamily="34" charset="-120"/>
-              </a:rPr>
-              <a:t>Recursos online</a:t>
-            </a:r>
-            <a:endParaRPr lang="en-US" sz="1400" dirty="0"/>
-          </a:p>
-        </p:txBody>
-      </p:sp>
-      <p:sp>
-        <p:nvSpPr>
-          <p:cNvPr id="16" name="Text 11"/>
-          <p:cNvSpPr/>
-          <p:nvPr/>
-        </p:nvSpPr>
-        <p:spPr>
-          <a:xfrm>
-            <a:off x="1325880" y="2761488"/>
-            <a:ext cx="6858000" cy="201168"/>
-          </a:xfrm>
-          <a:prstGeom prst="rect">
-            <a:avLst/>
-          </a:prstGeom>
-          <a:noFill/>
-          <a:ln/>
-        </p:spPr>
-        <p:txBody>
-          <a:bodyPr wrap="square" lIns="0" tIns="0" rIns="0" bIns="0" rtlCol="0" anchor="ctr"/>
-          <a:lstStyle/>
-          <a:p>
-            <a:pPr indent="0" marL="0">
-              <a:buNone/>
-            </a:pPr>
-            <a:r>
-              <a:rPr lang="en-US" sz="1100" dirty="0">
-                <a:solidFill>
-                  <a:srgbClr val="CBD5E1"/>
-                </a:solidFill>
-                <a:latin typeface="Arial" pitchFamily="34" charset="0"/>
-                <a:ea typeface="Arial" pitchFamily="34" charset="-122"/>
-                <a:cs typeface="Arial" pitchFamily="34" charset="-120"/>
-              </a:rPr>
-              <a:t>Stack Overflow (tag [r]) — Preguntas y respuestas</a:t>
-            </a:r>
-            <a:endParaRPr lang="en-US" sz="1100" dirty="0"/>
-          </a:p>
-        </p:txBody>
-      </p:sp>
-      <p:sp>
-        <p:nvSpPr>
-          <p:cNvPr id="17" name="Text 12"/>
-          <p:cNvSpPr/>
-          <p:nvPr/>
-        </p:nvSpPr>
-        <p:spPr>
-          <a:xfrm>
-            <a:off x="1325880" y="2980944"/>
-            <a:ext cx="6858000" cy="201168"/>
-          </a:xfrm>
-          <a:prstGeom prst="rect">
-            <a:avLst/>
-          </a:prstGeom>
-          <a:noFill/>
-          <a:ln/>
-        </p:spPr>
-        <p:txBody>
-          <a:bodyPr wrap="square" lIns="0" tIns="0" rIns="0" bIns="0" rtlCol="0" anchor="ctr"/>
-          <a:lstStyle/>
-          <a:p>
-            <a:pPr indent="0" marL="0">
-              <a:buNone/>
-            </a:pPr>
-            <a:r>
-              <a:rPr lang="en-US" sz="1100" dirty="0">
-                <a:solidFill>
-                  <a:srgbClr val="CBD5E1"/>
-                </a:solidFill>
-                <a:latin typeface="Arial" pitchFamily="34" charset="0"/>
-                <a:ea typeface="Arial" pitchFamily="34" charset="-122"/>
-                <a:cs typeface="Arial" pitchFamily="34" charset="-120"/>
-              </a:rPr>
-              <a:t>R for Data Science (r4ds.hadley.nz) — Libro gratuito</a:t>
-            </a:r>
-            <a:endParaRPr lang="en-US" sz="1100" dirty="0"/>
-          </a:p>
-        </p:txBody>
-      </p:sp>
-      <p:sp>
-        <p:nvSpPr>
-          <p:cNvPr id="18" name="Text 13"/>
-          <p:cNvSpPr/>
-          <p:nvPr/>
-        </p:nvSpPr>
-        <p:spPr>
-          <a:xfrm>
-            <a:off x="1325880" y="3200400"/>
-            <a:ext cx="6858000" cy="201168"/>
-          </a:xfrm>
-          <a:prstGeom prst="rect">
-            <a:avLst/>
-          </a:prstGeom>
-          <a:noFill/>
-          <a:ln/>
-        </p:spPr>
-        <p:txBody>
-          <a:bodyPr wrap="square" lIns="0" tIns="0" rIns="0" bIns="0" rtlCol="0" anchor="ctr"/>
-          <a:lstStyle/>
-          <a:p>
-            <a:pPr indent="0" marL="0">
-              <a:buNone/>
-            </a:pPr>
-            <a:r>
-              <a:rPr lang="en-US" sz="1100" dirty="0">
-                <a:solidFill>
-                  <a:srgbClr val="CBD5E1"/>
-                </a:solidFill>
-                <a:latin typeface="Arial" pitchFamily="34" charset="0"/>
-                <a:ea typeface="Arial" pitchFamily="34" charset="-122"/>
-                <a:cs typeface="Arial" pitchFamily="34" charset="-120"/>
-              </a:rPr>
-              <a:t>RStudio Cheatsheets (posit.co/resources) — Resúmenes visuales</a:t>
-            </a:r>
-            <a:endParaRPr lang="en-US" sz="1100" dirty="0"/>
-          </a:p>
-        </p:txBody>
-      </p:sp>
-      <p:sp>
-        <p:nvSpPr>
-          <p:cNvPr id="19" name="Shape 14"/>
-          <p:cNvSpPr/>
-          <p:nvPr/>
-        </p:nvSpPr>
-        <p:spPr>
-          <a:xfrm>
-            <a:off x="640080" y="3657600"/>
+          <p:cNvPr id="4" name="Text 1"/>
+          <p:cNvSpPr/>
+          <p:nvPr/>
+        </p:nvSpPr>
+        <p:spPr>
+          <a:xfrm>
+            <a:off x="1234440" y="320040"/>
+            <a:ext cx="7315200" cy="548640"/>
+          </a:xfrm>
+          <a:prstGeom prst="rect">
+            <a:avLst/>
+          </a:prstGeom>
+          <a:noFill/>
+          <a:ln/>
+        </p:spPr>
+        <p:txBody>
+          <a:bodyPr wrap="square" lIns="0" tIns="0" rIns="0" bIns="0" rtlCol="0" anchor="ctr"/>
+          <a:lstStyle/>
+          <a:p>
+            <a:pPr marL="0" indent="0">
+              <a:buNone/>
+            </a:pPr>
+            <a:r>
+              <a:rPr lang="en-US" sz="2800" b="1" dirty="0">
+                <a:solidFill>
+                  <a:srgbClr val="FFFFFF"/>
+                </a:solidFill>
+                <a:latin typeface="Georgia" pitchFamily="34" charset="0"/>
+                <a:ea typeface="Georgia" pitchFamily="34" charset="-122"/>
+                <a:cs typeface="Georgia" pitchFamily="34" charset="-120"/>
+              </a:rPr>
+              <a:t>Cómo pedir ayuda</a:t>
+            </a:r>
+            <a:endParaRPr lang="en-US" sz="2800" dirty="0"/>
+          </a:p>
+        </p:txBody>
+      </p:sp>
+      <p:sp>
+        <p:nvSpPr>
+          <p:cNvPr id="5" name="Shape 2"/>
+          <p:cNvSpPr/>
+          <p:nvPr/>
+        </p:nvSpPr>
+        <p:spPr>
+          <a:xfrm>
+            <a:off x="640080" y="1097280"/>
             <a:ext cx="7863840" cy="1051560"/>
           </a:xfrm>
           <a:prstGeom prst="rect">
@@ -7290,16 +6964,23 @@
           </a:solidFill>
           <a:ln/>
         </p:spPr>
-      </p:sp>
-      <p:sp>
-        <p:nvSpPr>
-          <p:cNvPr id="20" name="Shape 15"/>
-          <p:cNvSpPr/>
-          <p:nvPr/>
-        </p:nvSpPr>
-        <p:spPr>
-          <a:xfrm>
-            <a:off x="640080" y="3657600"/>
+        <p:txBody>
+          <a:bodyPr/>
+          <a:lstStyle/>
+          <a:p>
+            <a:endParaRPr lang="es-AR"/>
+          </a:p>
+        </p:txBody>
+      </p:sp>
+      <p:sp>
+        <p:nvSpPr>
+          <p:cNvPr id="6" name="Shape 3"/>
+          <p:cNvSpPr/>
+          <p:nvPr/>
+        </p:nvSpPr>
+        <p:spPr>
+          <a:xfrm>
+            <a:off x="640080" y="1097280"/>
             <a:ext cx="54864" cy="1051560"/>
           </a:xfrm>
           <a:prstGeom prst="rect">
@@ -7310,10 +6991,17 @@
           </a:solidFill>
           <a:ln/>
         </p:spPr>
+        <p:txBody>
+          <a:bodyPr/>
+          <a:lstStyle/>
+          <a:p>
+            <a:endParaRPr lang="es-AR"/>
+          </a:p>
+        </p:txBody>
       </p:sp>
       <p:pic>
         <p:nvPicPr>
-          <p:cNvPr id="21" name="Image 3" descr="preencoded.png">    </p:cNvPr>
+          <p:cNvPr id="7" name="Image 1" descr="preencoded.png"/>
           <p:cNvPicPr>
             <a:picLocks noChangeAspect="1"/>
           </p:cNvPicPr>
@@ -7327,6 +7015,474 @@
         </p:blipFill>
         <p:spPr>
           <a:xfrm>
+            <a:off x="914400" y="1188720"/>
+            <a:ext cx="274320" cy="274320"/>
+          </a:xfrm>
+          <a:prstGeom prst="rect">
+            <a:avLst/>
+          </a:prstGeom>
+        </p:spPr>
+      </p:pic>
+      <p:sp>
+        <p:nvSpPr>
+          <p:cNvPr id="8" name="Text 4"/>
+          <p:cNvSpPr/>
+          <p:nvPr/>
+        </p:nvSpPr>
+        <p:spPr>
+          <a:xfrm>
+            <a:off x="1325880" y="1143000"/>
+            <a:ext cx="6858000" cy="320040"/>
+          </a:xfrm>
+          <a:prstGeom prst="rect">
+            <a:avLst/>
+          </a:prstGeom>
+          <a:noFill/>
+          <a:ln/>
+        </p:spPr>
+        <p:txBody>
+          <a:bodyPr wrap="square" lIns="0" tIns="0" rIns="0" bIns="0" rtlCol="0" anchor="ctr"/>
+          <a:lstStyle/>
+          <a:p>
+            <a:pPr marL="0" indent="0">
+              <a:buNone/>
+            </a:pPr>
+            <a:r>
+              <a:rPr lang="en-US" sz="1400" b="1" dirty="0">
+                <a:solidFill>
+                  <a:srgbClr val="06B6D4"/>
+                </a:solidFill>
+                <a:latin typeface="Arial" pitchFamily="34" charset="0"/>
+                <a:ea typeface="Arial" pitchFamily="34" charset="-122"/>
+                <a:cs typeface="Arial" pitchFamily="34" charset="-120"/>
+              </a:rPr>
+              <a:t>Desde R / RStudio</a:t>
+            </a:r>
+            <a:endParaRPr lang="en-US" sz="1400" dirty="0"/>
+          </a:p>
+        </p:txBody>
+      </p:sp>
+      <p:sp>
+        <p:nvSpPr>
+          <p:cNvPr id="9" name="Text 5"/>
+          <p:cNvSpPr/>
+          <p:nvPr/>
+        </p:nvSpPr>
+        <p:spPr>
+          <a:xfrm>
+            <a:off x="1325880" y="1481328"/>
+            <a:ext cx="6858000" cy="201168"/>
+          </a:xfrm>
+          <a:prstGeom prst="rect">
+            <a:avLst/>
+          </a:prstGeom>
+          <a:noFill/>
+          <a:ln/>
+        </p:spPr>
+        <p:txBody>
+          <a:bodyPr wrap="square" lIns="0" tIns="0" rIns="0" bIns="0" rtlCol="0" anchor="ctr"/>
+          <a:lstStyle/>
+          <a:p>
+            <a:pPr marL="0" indent="0">
+              <a:buNone/>
+            </a:pPr>
+            <a:r>
+              <a:rPr lang="en-US" sz="1100" dirty="0">
+                <a:solidFill>
+                  <a:srgbClr val="CBD5E1"/>
+                </a:solidFill>
+                <a:latin typeface="Arial" pitchFamily="34" charset="0"/>
+                <a:ea typeface="Arial" pitchFamily="34" charset="-122"/>
+                <a:cs typeface="Arial" pitchFamily="34" charset="-120"/>
+              </a:rPr>
+              <a:t>?mean  o  help(mean)  — Documentación de una función</a:t>
+            </a:r>
+            <a:endParaRPr lang="en-US" sz="1100" dirty="0"/>
+          </a:p>
+        </p:txBody>
+      </p:sp>
+      <p:sp>
+        <p:nvSpPr>
+          <p:cNvPr id="10" name="Text 6"/>
+          <p:cNvSpPr/>
+          <p:nvPr/>
+        </p:nvSpPr>
+        <p:spPr>
+          <a:xfrm>
+            <a:off x="1325880" y="1700784"/>
+            <a:ext cx="6858000" cy="201168"/>
+          </a:xfrm>
+          <a:prstGeom prst="rect">
+            <a:avLst/>
+          </a:prstGeom>
+          <a:noFill/>
+          <a:ln/>
+        </p:spPr>
+        <p:txBody>
+          <a:bodyPr wrap="square" lIns="0" tIns="0" rIns="0" bIns="0" rtlCol="0" anchor="ctr"/>
+          <a:lstStyle/>
+          <a:p>
+            <a:pPr marL="0" indent="0">
+              <a:buNone/>
+            </a:pPr>
+            <a:r>
+              <a:rPr lang="en-US" sz="1100" dirty="0">
+                <a:solidFill>
+                  <a:srgbClr val="CBD5E1"/>
+                </a:solidFill>
+                <a:latin typeface="Arial" pitchFamily="34" charset="0"/>
+                <a:ea typeface="Arial" pitchFamily="34" charset="-122"/>
+                <a:cs typeface="Arial" pitchFamily="34" charset="-120"/>
+              </a:rPr>
+              <a:t>??regression  — Buscar en toda la ayuda</a:t>
+            </a:r>
+            <a:endParaRPr lang="en-US" sz="1100" dirty="0"/>
+          </a:p>
+        </p:txBody>
+      </p:sp>
+      <p:sp>
+        <p:nvSpPr>
+          <p:cNvPr id="11" name="Text 7"/>
+          <p:cNvSpPr/>
+          <p:nvPr/>
+        </p:nvSpPr>
+        <p:spPr>
+          <a:xfrm>
+            <a:off x="1325880" y="1920240"/>
+            <a:ext cx="6858000" cy="201168"/>
+          </a:xfrm>
+          <a:prstGeom prst="rect">
+            <a:avLst/>
+          </a:prstGeom>
+          <a:noFill/>
+          <a:ln/>
+        </p:spPr>
+        <p:txBody>
+          <a:bodyPr wrap="square" lIns="0" tIns="0" rIns="0" bIns="0" rtlCol="0" anchor="ctr"/>
+          <a:lstStyle/>
+          <a:p>
+            <a:pPr marL="0" indent="0">
+              <a:buNone/>
+            </a:pPr>
+            <a:r>
+              <a:rPr lang="en-US" sz="1100" dirty="0">
+                <a:solidFill>
+                  <a:srgbClr val="CBD5E1"/>
+                </a:solidFill>
+                <a:latin typeface="Arial" pitchFamily="34" charset="0"/>
+                <a:ea typeface="Arial" pitchFamily="34" charset="-122"/>
+                <a:cs typeface="Arial" pitchFamily="34" charset="-120"/>
+              </a:rPr>
+              <a:t>example(mean)  — Ver ejemplos de uso</a:t>
+            </a:r>
+            <a:endParaRPr lang="en-US" sz="1100" dirty="0"/>
+          </a:p>
+        </p:txBody>
+      </p:sp>
+      <p:sp>
+        <p:nvSpPr>
+          <p:cNvPr id="12" name="Shape 8"/>
+          <p:cNvSpPr/>
+          <p:nvPr/>
+        </p:nvSpPr>
+        <p:spPr>
+          <a:xfrm>
+            <a:off x="640080" y="2377440"/>
+            <a:ext cx="7863840" cy="1051560"/>
+          </a:xfrm>
+          <a:prstGeom prst="rect">
+            <a:avLst/>
+          </a:prstGeom>
+          <a:solidFill>
+            <a:srgbClr val="0F1B33"/>
+          </a:solidFill>
+          <a:ln/>
+        </p:spPr>
+        <p:txBody>
+          <a:bodyPr/>
+          <a:lstStyle/>
+          <a:p>
+            <a:endParaRPr lang="es-AR"/>
+          </a:p>
+        </p:txBody>
+      </p:sp>
+      <p:sp>
+        <p:nvSpPr>
+          <p:cNvPr id="13" name="Shape 9"/>
+          <p:cNvSpPr/>
+          <p:nvPr/>
+        </p:nvSpPr>
+        <p:spPr>
+          <a:xfrm>
+            <a:off x="640080" y="2377440"/>
+            <a:ext cx="54864" cy="1051560"/>
+          </a:xfrm>
+          <a:prstGeom prst="rect">
+            <a:avLst/>
+          </a:prstGeom>
+          <a:solidFill>
+            <a:srgbClr val="0891B2"/>
+          </a:solidFill>
+          <a:ln/>
+        </p:spPr>
+        <p:txBody>
+          <a:bodyPr/>
+          <a:lstStyle/>
+          <a:p>
+            <a:endParaRPr lang="es-AR"/>
+          </a:p>
+        </p:txBody>
+      </p:sp>
+      <p:pic>
+        <p:nvPicPr>
+          <p:cNvPr id="14" name="Image 2" descr="preencoded.png"/>
+          <p:cNvPicPr>
+            <a:picLocks noChangeAspect="1"/>
+          </p:cNvPicPr>
+          <p:nvPr/>
+        </p:nvPicPr>
+        <p:blipFill>
+          <a:blip r:embed="rId3"/>
+          <a:stretch>
+            <a:fillRect/>
+          </a:stretch>
+        </p:blipFill>
+        <p:spPr>
+          <a:xfrm>
+            <a:off x="914400" y="2468880"/>
+            <a:ext cx="274320" cy="274320"/>
+          </a:xfrm>
+          <a:prstGeom prst="rect">
+            <a:avLst/>
+          </a:prstGeom>
+        </p:spPr>
+      </p:pic>
+      <p:sp>
+        <p:nvSpPr>
+          <p:cNvPr id="15" name="Text 10"/>
+          <p:cNvSpPr/>
+          <p:nvPr/>
+        </p:nvSpPr>
+        <p:spPr>
+          <a:xfrm>
+            <a:off x="1325880" y="2423160"/>
+            <a:ext cx="6858000" cy="320040"/>
+          </a:xfrm>
+          <a:prstGeom prst="rect">
+            <a:avLst/>
+          </a:prstGeom>
+          <a:noFill/>
+          <a:ln/>
+        </p:spPr>
+        <p:txBody>
+          <a:bodyPr wrap="square" lIns="0" tIns="0" rIns="0" bIns="0" rtlCol="0" anchor="ctr"/>
+          <a:lstStyle/>
+          <a:p>
+            <a:pPr marL="0" indent="0">
+              <a:buNone/>
+            </a:pPr>
+            <a:r>
+              <a:rPr lang="en-US" sz="1400" b="1" dirty="0">
+                <a:solidFill>
+                  <a:srgbClr val="06B6D4"/>
+                </a:solidFill>
+                <a:latin typeface="Arial" pitchFamily="34" charset="0"/>
+                <a:ea typeface="Arial" pitchFamily="34" charset="-122"/>
+                <a:cs typeface="Arial" pitchFamily="34" charset="-120"/>
+              </a:rPr>
+              <a:t>Recursos online</a:t>
+            </a:r>
+            <a:endParaRPr lang="en-US" sz="1400" dirty="0"/>
+          </a:p>
+        </p:txBody>
+      </p:sp>
+      <p:sp>
+        <p:nvSpPr>
+          <p:cNvPr id="16" name="Text 11"/>
+          <p:cNvSpPr/>
+          <p:nvPr/>
+        </p:nvSpPr>
+        <p:spPr>
+          <a:xfrm>
+            <a:off x="1325880" y="2761488"/>
+            <a:ext cx="6858000" cy="201168"/>
+          </a:xfrm>
+          <a:prstGeom prst="rect">
+            <a:avLst/>
+          </a:prstGeom>
+          <a:noFill/>
+          <a:ln/>
+        </p:spPr>
+        <p:txBody>
+          <a:bodyPr wrap="square" lIns="0" tIns="0" rIns="0" bIns="0" rtlCol="0" anchor="ctr"/>
+          <a:lstStyle/>
+          <a:p>
+            <a:pPr marL="0" indent="0">
+              <a:buNone/>
+            </a:pPr>
+            <a:r>
+              <a:rPr lang="en-US" sz="1100" dirty="0">
+                <a:solidFill>
+                  <a:srgbClr val="CBD5E1"/>
+                </a:solidFill>
+                <a:latin typeface="Arial" pitchFamily="34" charset="0"/>
+                <a:ea typeface="Arial" pitchFamily="34" charset="-122"/>
+                <a:cs typeface="Arial" pitchFamily="34" charset="-120"/>
+              </a:rPr>
+              <a:t>Stack Overflow (tag [r]) — Preguntas y respuestas</a:t>
+            </a:r>
+            <a:endParaRPr lang="en-US" sz="1100" dirty="0"/>
+          </a:p>
+        </p:txBody>
+      </p:sp>
+      <p:sp>
+        <p:nvSpPr>
+          <p:cNvPr id="17" name="Text 12"/>
+          <p:cNvSpPr/>
+          <p:nvPr/>
+        </p:nvSpPr>
+        <p:spPr>
+          <a:xfrm>
+            <a:off x="1325880" y="2980944"/>
+            <a:ext cx="6858000" cy="201168"/>
+          </a:xfrm>
+          <a:prstGeom prst="rect">
+            <a:avLst/>
+          </a:prstGeom>
+          <a:noFill/>
+          <a:ln/>
+        </p:spPr>
+        <p:txBody>
+          <a:bodyPr wrap="square" lIns="0" tIns="0" rIns="0" bIns="0" rtlCol="0" anchor="ctr"/>
+          <a:lstStyle/>
+          <a:p>
+            <a:pPr marL="0" indent="0">
+              <a:buNone/>
+            </a:pPr>
+            <a:r>
+              <a:rPr lang="en-US" sz="1100" dirty="0">
+                <a:solidFill>
+                  <a:srgbClr val="CBD5E1"/>
+                </a:solidFill>
+                <a:latin typeface="Arial" pitchFamily="34" charset="0"/>
+                <a:ea typeface="Arial" pitchFamily="34" charset="-122"/>
+                <a:cs typeface="Arial" pitchFamily="34" charset="-120"/>
+              </a:rPr>
+              <a:t>R for Data Science (r4ds.hadley.nz) — Libro gratuito</a:t>
+            </a:r>
+            <a:endParaRPr lang="en-US" sz="1100" dirty="0"/>
+          </a:p>
+        </p:txBody>
+      </p:sp>
+      <p:sp>
+        <p:nvSpPr>
+          <p:cNvPr id="18" name="Text 13"/>
+          <p:cNvSpPr/>
+          <p:nvPr/>
+        </p:nvSpPr>
+        <p:spPr>
+          <a:xfrm>
+            <a:off x="1325880" y="3200400"/>
+            <a:ext cx="6858000" cy="201168"/>
+          </a:xfrm>
+          <a:prstGeom prst="rect">
+            <a:avLst/>
+          </a:prstGeom>
+          <a:noFill/>
+          <a:ln/>
+        </p:spPr>
+        <p:txBody>
+          <a:bodyPr wrap="square" lIns="0" tIns="0" rIns="0" bIns="0" rtlCol="0" anchor="ctr"/>
+          <a:lstStyle/>
+          <a:p>
+            <a:pPr marL="0" indent="0">
+              <a:buNone/>
+            </a:pPr>
+            <a:r>
+              <a:rPr lang="en-US" sz="1100" dirty="0">
+                <a:solidFill>
+                  <a:srgbClr val="CBD5E1"/>
+                </a:solidFill>
+                <a:latin typeface="Arial" pitchFamily="34" charset="0"/>
+                <a:ea typeface="Arial" pitchFamily="34" charset="-122"/>
+                <a:cs typeface="Arial" pitchFamily="34" charset="-120"/>
+              </a:rPr>
+              <a:t>RStudio Cheatsheets (posit.co/resources) — Resúmenes visuales</a:t>
+            </a:r>
+            <a:endParaRPr lang="en-US" sz="1100" dirty="0"/>
+          </a:p>
+        </p:txBody>
+      </p:sp>
+      <p:sp>
+        <p:nvSpPr>
+          <p:cNvPr id="19" name="Shape 14"/>
+          <p:cNvSpPr/>
+          <p:nvPr/>
+        </p:nvSpPr>
+        <p:spPr>
+          <a:xfrm>
+            <a:off x="640080" y="3657600"/>
+            <a:ext cx="7863840" cy="1051560"/>
+          </a:xfrm>
+          <a:prstGeom prst="rect">
+            <a:avLst/>
+          </a:prstGeom>
+          <a:solidFill>
+            <a:srgbClr val="0F1B33"/>
+          </a:solidFill>
+          <a:ln/>
+        </p:spPr>
+        <p:txBody>
+          <a:bodyPr/>
+          <a:lstStyle/>
+          <a:p>
+            <a:endParaRPr lang="es-AR"/>
+          </a:p>
+        </p:txBody>
+      </p:sp>
+      <p:sp>
+        <p:nvSpPr>
+          <p:cNvPr id="20" name="Shape 15"/>
+          <p:cNvSpPr/>
+          <p:nvPr/>
+        </p:nvSpPr>
+        <p:spPr>
+          <a:xfrm>
+            <a:off x="640080" y="3657600"/>
+            <a:ext cx="54864" cy="1051560"/>
+          </a:xfrm>
+          <a:prstGeom prst="rect">
+            <a:avLst/>
+          </a:prstGeom>
+          <a:solidFill>
+            <a:srgbClr val="0891B2"/>
+          </a:solidFill>
+          <a:ln/>
+        </p:spPr>
+        <p:txBody>
+          <a:bodyPr/>
+          <a:lstStyle/>
+          <a:p>
+            <a:endParaRPr lang="es-AR"/>
+          </a:p>
+        </p:txBody>
+      </p:sp>
+      <p:pic>
+        <p:nvPicPr>
+          <p:cNvPr id="21" name="Image 3" descr="preencoded.png"/>
+          <p:cNvPicPr>
+            <a:picLocks noChangeAspect="1"/>
+          </p:cNvPicPr>
+          <p:nvPr/>
+        </p:nvPicPr>
+        <p:blipFill>
+          <a:blip r:embed="rId5"/>
+          <a:stretch>
+            <a:fillRect/>
+          </a:stretch>
+        </p:blipFill>
+        <p:spPr>
+          <a:xfrm>
             <a:off x="914400" y="3749040"/>
             <a:ext cx="274320" cy="274320"/>
           </a:xfrm>
@@ -7356,7 +7512,7 @@
           <a:bodyPr wrap="square" lIns="0" tIns="0" rIns="0" bIns="0" rtlCol="0" anchor="ctr"/>
           <a:lstStyle/>
           <a:p>
-            <a:pPr indent="0" marL="0">
+            <a:pPr marL="0" indent="0">
               <a:buNone/>
             </a:pPr>
             <a:r>
@@ -7395,7 +7551,7 @@
           <a:bodyPr wrap="square" lIns="0" tIns="0" rIns="0" bIns="0" rtlCol="0" anchor="ctr"/>
           <a:lstStyle/>
           <a:p>
-            <a:pPr indent="0" marL="0">
+            <a:pPr marL="0" indent="0">
               <a:buNone/>
             </a:pPr>
             <a:r>
@@ -7434,7 +7590,7 @@
           <a:bodyPr wrap="square" lIns="0" tIns="0" rIns="0" bIns="0" rtlCol="0" anchor="ctr"/>
           <a:lstStyle/>
           <a:p>
-            <a:pPr indent="0" marL="0">
+            <a:pPr marL="0" indent="0">
               <a:buNone/>
             </a:pPr>
             <a:r>
@@ -7473,7 +7629,7 @@
           <a:bodyPr wrap="square" lIns="0" tIns="0" rIns="0" bIns="0" rtlCol="0" anchor="ctr"/>
           <a:lstStyle/>
           <a:p>
-            <a:pPr indent="0" marL="0">
+            <a:pPr marL="0" indent="0">
               <a:buNone/>
             </a:pPr>
             <a:r>
@@ -7510,6 +7666,13 @@
           </a:solidFill>
           <a:ln/>
         </p:spPr>
+        <p:txBody>
+          <a:bodyPr/>
+          <a:lstStyle/>
+          <a:p>
+            <a:endParaRPr lang="es-AR"/>
+          </a:p>
+        </p:txBody>
       </p:sp>
       <p:sp>
         <p:nvSpPr>
@@ -7532,7 +7695,7 @@
           <a:bodyPr wrap="square" lIns="0" tIns="0" rIns="0" bIns="0" rtlCol="0" anchor="ctr"/>
           <a:lstStyle/>
           <a:p>
-            <a:pPr indent="0" marL="0">
+            <a:pPr marL="0" indent="0">
               <a:buNone/>
             </a:pPr>
             <a:r>
@@ -7571,7 +7734,7 @@
           <a:bodyPr wrap="square" lIns="0" tIns="0" rIns="0" bIns="0" rtlCol="0" anchor="ctr"/>
           <a:lstStyle/>
           <a:p>
-            <a:pPr algn="r" indent="0" marL="0">
+            <a:pPr marL="0" indent="0" algn="r">
               <a:buNone/>
             </a:pPr>
             <a:r>
@@ -7605,6 +7768,7 @@
         <a:solidFill>
           <a:srgbClr val="F0F9FF"/>
         </a:solidFill>
+        <a:effectLst/>
       </p:bgPr>
     </p:bg>
     <p:spTree>
@@ -7640,6 +7804,13 @@
           </a:solidFill>
           <a:ln/>
         </p:spPr>
+        <p:txBody>
+          <a:bodyPr/>
+          <a:lstStyle/>
+          <a:p>
+            <a:endParaRPr lang="es-AR"/>
+          </a:p>
+        </p:txBody>
       </p:sp>
       <p:sp>
         <p:nvSpPr>
@@ -7662,7 +7833,7 @@
           <a:bodyPr wrap="square" lIns="0" tIns="0" rIns="0" bIns="0" rtlCol="0" anchor="ctr"/>
           <a:lstStyle/>
           <a:p>
-            <a:pPr indent="0" marL="0">
+            <a:pPr marL="0" indent="0">
               <a:buNone/>
             </a:pPr>
             <a:r>
@@ -7699,13 +7870,20 @@
           </a:solidFill>
           <a:ln/>
           <a:effectLst>
-            <a:outerShdw sx="100000" sy="100000" kx="0" ky="0" algn="bl" rotWithShape="0" blurRad="101600" dist="38100" dir="8100000">
+            <a:outerShdw blurRad="101600" dist="38100" dir="8100000" algn="bl" rotWithShape="0">
               <a:srgbClr val="000000">
                 <a:alpha val="10000"/>
               </a:srgbClr>
             </a:outerShdw>
           </a:effectLst>
         </p:spPr>
+        <p:txBody>
+          <a:bodyPr/>
+          <a:lstStyle/>
+          <a:p>
+            <a:endParaRPr lang="es-AR"/>
+          </a:p>
+        </p:txBody>
       </p:sp>
       <p:sp>
         <p:nvSpPr>
@@ -7726,6 +7904,13 @@
           </a:solidFill>
           <a:ln/>
         </p:spPr>
+        <p:txBody>
+          <a:bodyPr/>
+          <a:lstStyle/>
+          <a:p>
+            <a:endParaRPr lang="es-AR"/>
+          </a:p>
+        </p:txBody>
       </p:sp>
       <p:sp>
         <p:nvSpPr>
@@ -7748,7 +7933,7 @@
           <a:bodyPr wrap="square" lIns="0" tIns="0" rIns="0" bIns="0" rtlCol="0" anchor="ctr"/>
           <a:lstStyle/>
           <a:p>
-            <a:pPr indent="0" marL="0">
+            <a:pPr marL="0" indent="0">
               <a:buNone/>
             </a:pPr>
             <a:r>
@@ -7768,305 +7953,7 @@
       </p:sp>
       <p:pic>
         <p:nvPicPr>
-          <p:cNvPr id="7" name="Image 0" descr="preencoded.png">    </p:cNvPr>
-          <p:cNvPicPr>
-            <a:picLocks noChangeAspect="1"/>
-          </p:cNvPicPr>
-          <p:nvPr/>
-        </p:nvPicPr>
-        <p:blipFill>
-          <a:blip r:embed="rId1"/>
-          <a:stretch>
-            <a:fillRect/>
-          </a:stretch>
-        </p:blipFill>
-        <p:spPr>
-          <a:xfrm>
-            <a:off x="1234440" y="1124712"/>
-            <a:ext cx="256032" cy="256032"/>
-          </a:xfrm>
-          <a:prstGeom prst="rect">
-            <a:avLst/>
-          </a:prstGeom>
-        </p:spPr>
-      </p:pic>
-      <p:sp>
-        <p:nvSpPr>
-          <p:cNvPr id="8" name="Text 5"/>
-          <p:cNvSpPr/>
-          <p:nvPr/>
-        </p:nvSpPr>
-        <p:spPr>
-          <a:xfrm>
-            <a:off x="1645920" y="1051560"/>
-            <a:ext cx="6675120" cy="420624"/>
-          </a:xfrm>
-          <a:prstGeom prst="rect">
-            <a:avLst/>
-          </a:prstGeom>
-          <a:noFill/>
-          <a:ln/>
-        </p:spPr>
-        <p:txBody>
-          <a:bodyPr wrap="square" lIns="0" tIns="0" rIns="0" bIns="0" rtlCol="0" anchor="ctr"/>
-          <a:lstStyle/>
-          <a:p>
-            <a:pPr indent="0" marL="0">
-              <a:buNone/>
-            </a:pPr>
-            <a:r>
-              <a:rPr lang="en-US" sz="1250" dirty="0">
-                <a:solidFill>
-                  <a:srgbClr val="334155"/>
-                </a:solidFill>
-                <a:latin typeface="Arial" pitchFamily="34" charset="0"/>
-                <a:ea typeface="Arial" pitchFamily="34" charset="-122"/>
-                <a:cs typeface="Arial" pitchFamily="34" charset="-120"/>
-              </a:rPr>
-              <a:t>¿Por qué R? Comparación con Excel, Stata y Python</a:t>
-            </a:r>
-            <a:endParaRPr lang="en-US" sz="1250" dirty="0"/>
-          </a:p>
-        </p:txBody>
-      </p:sp>
-      <p:sp>
-        <p:nvSpPr>
-          <p:cNvPr id="9" name="Shape 6"/>
-          <p:cNvSpPr/>
-          <p:nvPr/>
-        </p:nvSpPr>
-        <p:spPr>
-          <a:xfrm>
-            <a:off x="640080" y="1545336"/>
-            <a:ext cx="7863840" cy="420624"/>
-          </a:xfrm>
-          <a:prstGeom prst="rect">
-            <a:avLst/>
-          </a:prstGeom>
-          <a:solidFill>
-            <a:srgbClr val="FFFFFF"/>
-          </a:solidFill>
-          <a:ln/>
-          <a:effectLst>
-            <a:outerShdw sx="100000" sy="100000" kx="0" ky="0" algn="bl" rotWithShape="0" blurRad="101600" dist="38100" dir="8100000">
-              <a:srgbClr val="000000">
-                <a:alpha val="10000"/>
-              </a:srgbClr>
-            </a:outerShdw>
-          </a:effectLst>
-        </p:spPr>
-      </p:sp>
-      <p:sp>
-        <p:nvSpPr>
-          <p:cNvPr id="10" name="Shape 7"/>
-          <p:cNvSpPr/>
-          <p:nvPr/>
-        </p:nvSpPr>
-        <p:spPr>
-          <a:xfrm>
-            <a:off x="640080" y="1545336"/>
-            <a:ext cx="54864" cy="420624"/>
-          </a:xfrm>
-          <a:prstGeom prst="rect">
-            <a:avLst/>
-          </a:prstGeom>
-          <a:solidFill>
-            <a:srgbClr val="0891B2"/>
-          </a:solidFill>
-          <a:ln/>
-        </p:spPr>
-      </p:sp>
-      <p:sp>
-        <p:nvSpPr>
-          <p:cNvPr id="11" name="Text 8"/>
-          <p:cNvSpPr/>
-          <p:nvPr/>
-        </p:nvSpPr>
-        <p:spPr>
-          <a:xfrm>
-            <a:off x="868680" y="1545336"/>
-            <a:ext cx="365760" cy="420624"/>
-          </a:xfrm>
-          <a:prstGeom prst="rect">
-            <a:avLst/>
-          </a:prstGeom>
-          <a:noFill/>
-          <a:ln/>
-        </p:spPr>
-        <p:txBody>
-          <a:bodyPr wrap="square" lIns="0" tIns="0" rIns="0" bIns="0" rtlCol="0" anchor="ctr"/>
-          <a:lstStyle/>
-          <a:p>
-            <a:pPr indent="0" marL="0">
-              <a:buNone/>
-            </a:pPr>
-            <a:r>
-              <a:rPr lang="en-US" sz="1300" b="1" dirty="0">
-                <a:solidFill>
-                  <a:srgbClr val="0891B2"/>
-                </a:solidFill>
-                <a:latin typeface="Arial" pitchFamily="34" charset="0"/>
-                <a:ea typeface="Arial" pitchFamily="34" charset="-122"/>
-                <a:cs typeface="Arial" pitchFamily="34" charset="-120"/>
-              </a:rPr>
-              <a:t>2</a:t>
-            </a:r>
-            <a:endParaRPr lang="en-US" sz="1300" dirty="0"/>
-          </a:p>
-        </p:txBody>
-      </p:sp>
-      <p:pic>
-        <p:nvPicPr>
-          <p:cNvPr id="12" name="Image 1" descr="preencoded.png">    </p:cNvPr>
-          <p:cNvPicPr>
-            <a:picLocks noChangeAspect="1"/>
-          </p:cNvPicPr>
-          <p:nvPr/>
-        </p:nvPicPr>
-        <p:blipFill>
-          <a:blip r:embed="rId2"/>
-          <a:stretch>
-            <a:fillRect/>
-          </a:stretch>
-        </p:blipFill>
-        <p:spPr>
-          <a:xfrm>
-            <a:off x="1234440" y="1618488"/>
-            <a:ext cx="256032" cy="256032"/>
-          </a:xfrm>
-          <a:prstGeom prst="rect">
-            <a:avLst/>
-          </a:prstGeom>
-        </p:spPr>
-      </p:pic>
-      <p:sp>
-        <p:nvSpPr>
-          <p:cNvPr id="13" name="Text 9"/>
-          <p:cNvSpPr/>
-          <p:nvPr/>
-        </p:nvSpPr>
-        <p:spPr>
-          <a:xfrm>
-            <a:off x="1645920" y="1545336"/>
-            <a:ext cx="6675120" cy="420624"/>
-          </a:xfrm>
-          <a:prstGeom prst="rect">
-            <a:avLst/>
-          </a:prstGeom>
-          <a:noFill/>
-          <a:ln/>
-        </p:spPr>
-        <p:txBody>
-          <a:bodyPr wrap="square" lIns="0" tIns="0" rIns="0" bIns="0" rtlCol="0" anchor="ctr"/>
-          <a:lstStyle/>
-          <a:p>
-            <a:pPr indent="0" marL="0">
-              <a:buNone/>
-            </a:pPr>
-            <a:r>
-              <a:rPr lang="en-US" sz="1250" dirty="0">
-                <a:solidFill>
-                  <a:srgbClr val="334155"/>
-                </a:solidFill>
-                <a:latin typeface="Arial" pitchFamily="34" charset="0"/>
-                <a:ea typeface="Arial" pitchFamily="34" charset="-122"/>
-                <a:cs typeface="Arial" pitchFamily="34" charset="-120"/>
-              </a:rPr>
-              <a:t>Instalación de R + RStudio / Google Colab</a:t>
-            </a:r>
-            <a:endParaRPr lang="en-US" sz="1250" dirty="0"/>
-          </a:p>
-        </p:txBody>
-      </p:sp>
-      <p:sp>
-        <p:nvSpPr>
-          <p:cNvPr id="14" name="Shape 10"/>
-          <p:cNvSpPr/>
-          <p:nvPr/>
-        </p:nvSpPr>
-        <p:spPr>
-          <a:xfrm>
-            <a:off x="640080" y="2039112"/>
-            <a:ext cx="7863840" cy="420624"/>
-          </a:xfrm>
-          <a:prstGeom prst="rect">
-            <a:avLst/>
-          </a:prstGeom>
-          <a:solidFill>
-            <a:srgbClr val="FFFFFF"/>
-          </a:solidFill>
-          <a:ln/>
-          <a:effectLst>
-            <a:outerShdw sx="100000" sy="100000" kx="0" ky="0" algn="bl" rotWithShape="0" blurRad="101600" dist="38100" dir="8100000">
-              <a:srgbClr val="000000">
-                <a:alpha val="10000"/>
-              </a:srgbClr>
-            </a:outerShdw>
-          </a:effectLst>
-        </p:spPr>
-      </p:sp>
-      <p:sp>
-        <p:nvSpPr>
-          <p:cNvPr id="15" name="Shape 11"/>
-          <p:cNvSpPr/>
-          <p:nvPr/>
-        </p:nvSpPr>
-        <p:spPr>
-          <a:xfrm>
-            <a:off x="640080" y="2039112"/>
-            <a:ext cx="54864" cy="420624"/>
-          </a:xfrm>
-          <a:prstGeom prst="rect">
-            <a:avLst/>
-          </a:prstGeom>
-          <a:solidFill>
-            <a:srgbClr val="0891B2"/>
-          </a:solidFill>
-          <a:ln/>
-        </p:spPr>
-      </p:sp>
-      <p:sp>
-        <p:nvSpPr>
-          <p:cNvPr id="16" name="Text 12"/>
-          <p:cNvSpPr/>
-          <p:nvPr/>
-        </p:nvSpPr>
-        <p:spPr>
-          <a:xfrm>
-            <a:off x="868680" y="2039112"/>
-            <a:ext cx="365760" cy="420624"/>
-          </a:xfrm>
-          <a:prstGeom prst="rect">
-            <a:avLst/>
-          </a:prstGeom>
-          <a:noFill/>
-          <a:ln/>
-        </p:spPr>
-        <p:txBody>
-          <a:bodyPr wrap="square" lIns="0" tIns="0" rIns="0" bIns="0" rtlCol="0" anchor="ctr"/>
-          <a:lstStyle/>
-          <a:p>
-            <a:pPr indent="0" marL="0">
-              <a:buNone/>
-            </a:pPr>
-            <a:r>
-              <a:rPr lang="en-US" sz="1300" b="1" dirty="0">
-                <a:solidFill>
-                  <a:srgbClr val="0891B2"/>
-                </a:solidFill>
-                <a:latin typeface="Arial" pitchFamily="34" charset="0"/>
-                <a:ea typeface="Arial" pitchFamily="34" charset="-122"/>
-                <a:cs typeface="Arial" pitchFamily="34" charset="-120"/>
-              </a:rPr>
-              <a:t>3</a:t>
-            </a:r>
-            <a:endParaRPr lang="en-US" sz="1300" dirty="0"/>
-          </a:p>
-        </p:txBody>
-      </p:sp>
-      <p:pic>
-        <p:nvPicPr>
-          <p:cNvPr id="17" name="Image 2" descr="preencoded.png">    </p:cNvPr>
+          <p:cNvPr id="7" name="Image 0" descr="preencoded.png"/>
           <p:cNvPicPr>
             <a:picLocks noChangeAspect="1"/>
           </p:cNvPicPr>
@@ -8080,7 +7967,7 @@
         </p:blipFill>
         <p:spPr>
           <a:xfrm>
-            <a:off x="1234440" y="2112264"/>
+            <a:off x="1234440" y="1124712"/>
             <a:ext cx="256032" cy="256032"/>
           </a:xfrm>
           <a:prstGeom prst="rect">
@@ -8090,13 +7977,13 @@
       </p:pic>
       <p:sp>
         <p:nvSpPr>
-          <p:cNvPr id="18" name="Text 13"/>
-          <p:cNvSpPr/>
-          <p:nvPr/>
-        </p:nvSpPr>
-        <p:spPr>
-          <a:xfrm>
-            <a:off x="1645920" y="2039112"/>
+          <p:cNvPr id="8" name="Text 5"/>
+          <p:cNvSpPr/>
+          <p:nvPr/>
+        </p:nvSpPr>
+        <p:spPr>
+          <a:xfrm>
+            <a:off x="1645920" y="1051560"/>
             <a:ext cx="6675120" cy="420624"/>
           </a:xfrm>
           <a:prstGeom prst="rect">
@@ -8109,7 +7996,7 @@
           <a:bodyPr wrap="square" lIns="0" tIns="0" rIns="0" bIns="0" rtlCol="0" anchor="ctr"/>
           <a:lstStyle/>
           <a:p>
-            <a:pPr indent="0" marL="0">
+            <a:pPr marL="0" indent="0">
               <a:buNone/>
             </a:pPr>
             <a:r>
@@ -8121,7 +8008,7 @@
                 <a:ea typeface="Arial" pitchFamily="34" charset="-122"/>
                 <a:cs typeface="Arial" pitchFamily="34" charset="-120"/>
               </a:rPr>
-              <a:t>Variables, vectores, listas y data frames</a:t>
+              <a:t>¿Por qué R? Comparación con Excel, Stata y Python</a:t>
             </a:r>
             <a:endParaRPr lang="en-US" sz="1250" dirty="0"/>
           </a:p>
@@ -8129,13 +8016,13 @@
       </p:sp>
       <p:sp>
         <p:nvSpPr>
-          <p:cNvPr id="19" name="Shape 14"/>
-          <p:cNvSpPr/>
-          <p:nvPr/>
-        </p:nvSpPr>
-        <p:spPr>
-          <a:xfrm>
-            <a:off x="640080" y="2532888"/>
+          <p:cNvPr id="9" name="Shape 6"/>
+          <p:cNvSpPr/>
+          <p:nvPr/>
+        </p:nvSpPr>
+        <p:spPr>
+          <a:xfrm>
+            <a:off x="640080" y="1545336"/>
             <a:ext cx="7863840" cy="420624"/>
           </a:xfrm>
           <a:prstGeom prst="rect">
@@ -8146,23 +8033,30 @@
           </a:solidFill>
           <a:ln/>
           <a:effectLst>
-            <a:outerShdw sx="100000" sy="100000" kx="0" ky="0" algn="bl" rotWithShape="0" blurRad="101600" dist="38100" dir="8100000">
+            <a:outerShdw blurRad="101600" dist="38100" dir="8100000" algn="bl" rotWithShape="0">
               <a:srgbClr val="000000">
                 <a:alpha val="10000"/>
               </a:srgbClr>
             </a:outerShdw>
           </a:effectLst>
         </p:spPr>
-      </p:sp>
-      <p:sp>
-        <p:nvSpPr>
-          <p:cNvPr id="20" name="Shape 15"/>
-          <p:cNvSpPr/>
-          <p:nvPr/>
-        </p:nvSpPr>
-        <p:spPr>
-          <a:xfrm>
-            <a:off x="640080" y="2532888"/>
+        <p:txBody>
+          <a:bodyPr/>
+          <a:lstStyle/>
+          <a:p>
+            <a:endParaRPr lang="es-AR"/>
+          </a:p>
+        </p:txBody>
+      </p:sp>
+      <p:sp>
+        <p:nvSpPr>
+          <p:cNvPr id="10" name="Shape 7"/>
+          <p:cNvSpPr/>
+          <p:nvPr/>
+        </p:nvSpPr>
+        <p:spPr>
+          <a:xfrm>
+            <a:off x="640080" y="1545336"/>
             <a:ext cx="54864" cy="420624"/>
           </a:xfrm>
           <a:prstGeom prst="rect">
@@ -8173,16 +8067,23 @@
           </a:solidFill>
           <a:ln/>
         </p:spPr>
-      </p:sp>
-      <p:sp>
-        <p:nvSpPr>
-          <p:cNvPr id="21" name="Text 16"/>
-          <p:cNvSpPr/>
-          <p:nvPr/>
-        </p:nvSpPr>
-        <p:spPr>
-          <a:xfrm>
-            <a:off x="868680" y="2532888"/>
+        <p:txBody>
+          <a:bodyPr/>
+          <a:lstStyle/>
+          <a:p>
+            <a:endParaRPr lang="es-AR"/>
+          </a:p>
+        </p:txBody>
+      </p:sp>
+      <p:sp>
+        <p:nvSpPr>
+          <p:cNvPr id="11" name="Text 8"/>
+          <p:cNvSpPr/>
+          <p:nvPr/>
+        </p:nvSpPr>
+        <p:spPr>
+          <a:xfrm>
+            <a:off x="868680" y="1545336"/>
             <a:ext cx="365760" cy="420624"/>
           </a:xfrm>
           <a:prstGeom prst="rect">
@@ -8195,7 +8096,7 @@
           <a:bodyPr wrap="square" lIns="0" tIns="0" rIns="0" bIns="0" rtlCol="0" anchor="ctr"/>
           <a:lstStyle/>
           <a:p>
-            <a:pPr indent="0" marL="0">
+            <a:pPr marL="0" indent="0">
               <a:buNone/>
             </a:pPr>
             <a:r>
@@ -8207,7 +8108,7 @@
                 <a:ea typeface="Arial" pitchFamily="34" charset="-122"/>
                 <a:cs typeface="Arial" pitchFamily="34" charset="-120"/>
               </a:rPr>
-              <a:t>4</a:t>
+              <a:t>2</a:t>
             </a:r>
             <a:endParaRPr lang="en-US" sz="1300" dirty="0"/>
           </a:p>
@@ -8215,7 +8116,7 @@
       </p:sp>
       <p:pic>
         <p:nvPicPr>
-          <p:cNvPr id="22" name="Image 3" descr="preencoded.png">    </p:cNvPr>
+          <p:cNvPr id="12" name="Image 1" descr="preencoded.png"/>
           <p:cNvPicPr>
             <a:picLocks noChangeAspect="1"/>
           </p:cNvPicPr>
@@ -8229,7 +8130,7 @@
         </p:blipFill>
         <p:spPr>
           <a:xfrm>
-            <a:off x="1234440" y="2606040"/>
+            <a:off x="1234440" y="1618488"/>
             <a:ext cx="256032" cy="256032"/>
           </a:xfrm>
           <a:prstGeom prst="rect">
@@ -8239,13 +8140,13 @@
       </p:pic>
       <p:sp>
         <p:nvSpPr>
-          <p:cNvPr id="23" name="Text 17"/>
-          <p:cNvSpPr/>
-          <p:nvPr/>
-        </p:nvSpPr>
-        <p:spPr>
-          <a:xfrm>
-            <a:off x="1645920" y="2532888"/>
+          <p:cNvPr id="13" name="Text 9"/>
+          <p:cNvSpPr/>
+          <p:nvPr/>
+        </p:nvSpPr>
+        <p:spPr>
+          <a:xfrm>
+            <a:off x="1645920" y="1545336"/>
             <a:ext cx="6675120" cy="420624"/>
           </a:xfrm>
           <a:prstGeom prst="rect">
@@ -8258,7 +8159,7 @@
           <a:bodyPr wrap="square" lIns="0" tIns="0" rIns="0" bIns="0" rtlCol="0" anchor="ctr"/>
           <a:lstStyle/>
           <a:p>
-            <a:pPr indent="0" marL="0">
+            <a:pPr marL="0" indent="0">
               <a:buNone/>
             </a:pPr>
             <a:r>
@@ -8270,7 +8171,7 @@
                 <a:ea typeface="Arial" pitchFamily="34" charset="-122"/>
                 <a:cs typeface="Arial" pitchFamily="34" charset="-120"/>
               </a:rPr>
-              <a:t>Operadores aritméticos, lógicos y de asignación</a:t>
+              <a:t>Instalación de R + RStudio / Google Colab</a:t>
             </a:r>
             <a:endParaRPr lang="en-US" sz="1250" dirty="0"/>
           </a:p>
@@ -8278,13 +8179,13 @@
       </p:sp>
       <p:sp>
         <p:nvSpPr>
-          <p:cNvPr id="24" name="Shape 18"/>
-          <p:cNvSpPr/>
-          <p:nvPr/>
-        </p:nvSpPr>
-        <p:spPr>
-          <a:xfrm>
-            <a:off x="640080" y="3026664"/>
+          <p:cNvPr id="14" name="Shape 10"/>
+          <p:cNvSpPr/>
+          <p:nvPr/>
+        </p:nvSpPr>
+        <p:spPr>
+          <a:xfrm>
+            <a:off x="640080" y="2039112"/>
             <a:ext cx="7863840" cy="420624"/>
           </a:xfrm>
           <a:prstGeom prst="rect">
@@ -8295,23 +8196,30 @@
           </a:solidFill>
           <a:ln/>
           <a:effectLst>
-            <a:outerShdw sx="100000" sy="100000" kx="0" ky="0" algn="bl" rotWithShape="0" blurRad="101600" dist="38100" dir="8100000">
+            <a:outerShdw blurRad="101600" dist="38100" dir="8100000" algn="bl" rotWithShape="0">
               <a:srgbClr val="000000">
                 <a:alpha val="10000"/>
               </a:srgbClr>
             </a:outerShdw>
           </a:effectLst>
         </p:spPr>
-      </p:sp>
-      <p:sp>
-        <p:nvSpPr>
-          <p:cNvPr id="25" name="Shape 19"/>
-          <p:cNvSpPr/>
-          <p:nvPr/>
-        </p:nvSpPr>
-        <p:spPr>
-          <a:xfrm>
-            <a:off x="640080" y="3026664"/>
+        <p:txBody>
+          <a:bodyPr/>
+          <a:lstStyle/>
+          <a:p>
+            <a:endParaRPr lang="es-AR"/>
+          </a:p>
+        </p:txBody>
+      </p:sp>
+      <p:sp>
+        <p:nvSpPr>
+          <p:cNvPr id="15" name="Shape 11"/>
+          <p:cNvSpPr/>
+          <p:nvPr/>
+        </p:nvSpPr>
+        <p:spPr>
+          <a:xfrm>
+            <a:off x="640080" y="2039112"/>
             <a:ext cx="54864" cy="420624"/>
           </a:xfrm>
           <a:prstGeom prst="rect">
@@ -8322,16 +8230,23 @@
           </a:solidFill>
           <a:ln/>
         </p:spPr>
-      </p:sp>
-      <p:sp>
-        <p:nvSpPr>
-          <p:cNvPr id="26" name="Text 20"/>
-          <p:cNvSpPr/>
-          <p:nvPr/>
-        </p:nvSpPr>
-        <p:spPr>
-          <a:xfrm>
-            <a:off x="868680" y="3026664"/>
+        <p:txBody>
+          <a:bodyPr/>
+          <a:lstStyle/>
+          <a:p>
+            <a:endParaRPr lang="es-AR"/>
+          </a:p>
+        </p:txBody>
+      </p:sp>
+      <p:sp>
+        <p:nvSpPr>
+          <p:cNvPr id="16" name="Text 12"/>
+          <p:cNvSpPr/>
+          <p:nvPr/>
+        </p:nvSpPr>
+        <p:spPr>
+          <a:xfrm>
+            <a:off x="868680" y="2039112"/>
             <a:ext cx="365760" cy="420624"/>
           </a:xfrm>
           <a:prstGeom prst="rect">
@@ -8344,7 +8259,7 @@
           <a:bodyPr wrap="square" lIns="0" tIns="0" rIns="0" bIns="0" rtlCol="0" anchor="ctr"/>
           <a:lstStyle/>
           <a:p>
-            <a:pPr indent="0" marL="0">
+            <a:pPr marL="0" indent="0">
               <a:buNone/>
             </a:pPr>
             <a:r>
@@ -8356,7 +8271,7 @@
                 <a:ea typeface="Arial" pitchFamily="34" charset="-122"/>
                 <a:cs typeface="Arial" pitchFamily="34" charset="-120"/>
               </a:rPr>
-              <a:t>5</a:t>
+              <a:t>3</a:t>
             </a:r>
             <a:endParaRPr lang="en-US" sz="1300" dirty="0"/>
           </a:p>
@@ -8364,7 +8279,7 @@
       </p:sp>
       <p:pic>
         <p:nvPicPr>
-          <p:cNvPr id="27" name="Image 4" descr="preencoded.png">    </p:cNvPr>
+          <p:cNvPr id="17" name="Image 2" descr="preencoded.png"/>
           <p:cNvPicPr>
             <a:picLocks noChangeAspect="1"/>
           </p:cNvPicPr>
@@ -8378,7 +8293,7 @@
         </p:blipFill>
         <p:spPr>
           <a:xfrm>
-            <a:off x="1234440" y="3099816"/>
+            <a:off x="1234440" y="2112264"/>
             <a:ext cx="256032" cy="256032"/>
           </a:xfrm>
           <a:prstGeom prst="rect">
@@ -8388,13 +8303,13 @@
       </p:pic>
       <p:sp>
         <p:nvSpPr>
-          <p:cNvPr id="28" name="Text 21"/>
-          <p:cNvSpPr/>
-          <p:nvPr/>
-        </p:nvSpPr>
-        <p:spPr>
-          <a:xfrm>
-            <a:off x="1645920" y="3026664"/>
+          <p:cNvPr id="18" name="Text 13"/>
+          <p:cNvSpPr/>
+          <p:nvPr/>
+        </p:nvSpPr>
+        <p:spPr>
+          <a:xfrm>
+            <a:off x="1645920" y="2039112"/>
             <a:ext cx="6675120" cy="420624"/>
           </a:xfrm>
           <a:prstGeom prst="rect">
@@ -8407,7 +8322,7 @@
           <a:bodyPr wrap="square" lIns="0" tIns="0" rIns="0" bIns="0" rtlCol="0" anchor="ctr"/>
           <a:lstStyle/>
           <a:p>
-            <a:pPr indent="0" marL="0">
+            <a:pPr marL="0" indent="0">
               <a:buNone/>
             </a:pPr>
             <a:r>
@@ -8419,7 +8334,7 @@
                 <a:ea typeface="Arial" pitchFamily="34" charset="-122"/>
                 <a:cs typeface="Arial" pitchFamily="34" charset="-120"/>
               </a:rPr>
-              <a:t>Funciones básicas: sum(), mean(), length(), class()</a:t>
+              <a:t>Variables, vectores, listas y data frames</a:t>
             </a:r>
             <a:endParaRPr lang="en-US" sz="1250" dirty="0"/>
           </a:p>
@@ -8427,13 +8342,13 @@
       </p:sp>
       <p:sp>
         <p:nvSpPr>
-          <p:cNvPr id="29" name="Shape 22"/>
-          <p:cNvSpPr/>
-          <p:nvPr/>
-        </p:nvSpPr>
-        <p:spPr>
-          <a:xfrm>
-            <a:off x="640080" y="3520440"/>
+          <p:cNvPr id="19" name="Shape 14"/>
+          <p:cNvSpPr/>
+          <p:nvPr/>
+        </p:nvSpPr>
+        <p:spPr>
+          <a:xfrm>
+            <a:off x="640080" y="2532888"/>
             <a:ext cx="7863840" cy="420624"/>
           </a:xfrm>
           <a:prstGeom prst="rect">
@@ -8444,23 +8359,30 @@
           </a:solidFill>
           <a:ln/>
           <a:effectLst>
-            <a:outerShdw sx="100000" sy="100000" kx="0" ky="0" algn="bl" rotWithShape="0" blurRad="101600" dist="38100" dir="8100000">
+            <a:outerShdw blurRad="101600" dist="38100" dir="8100000" algn="bl" rotWithShape="0">
               <a:srgbClr val="000000">
                 <a:alpha val="10000"/>
               </a:srgbClr>
             </a:outerShdw>
           </a:effectLst>
         </p:spPr>
-      </p:sp>
-      <p:sp>
-        <p:nvSpPr>
-          <p:cNvPr id="30" name="Shape 23"/>
-          <p:cNvSpPr/>
-          <p:nvPr/>
-        </p:nvSpPr>
-        <p:spPr>
-          <a:xfrm>
-            <a:off x="640080" y="3520440"/>
+        <p:txBody>
+          <a:bodyPr/>
+          <a:lstStyle/>
+          <a:p>
+            <a:endParaRPr lang="es-AR"/>
+          </a:p>
+        </p:txBody>
+      </p:sp>
+      <p:sp>
+        <p:nvSpPr>
+          <p:cNvPr id="20" name="Shape 15"/>
+          <p:cNvSpPr/>
+          <p:nvPr/>
+        </p:nvSpPr>
+        <p:spPr>
+          <a:xfrm>
+            <a:off x="640080" y="2532888"/>
             <a:ext cx="54864" cy="420624"/>
           </a:xfrm>
           <a:prstGeom prst="rect">
@@ -8471,16 +8393,23 @@
           </a:solidFill>
           <a:ln/>
         </p:spPr>
-      </p:sp>
-      <p:sp>
-        <p:nvSpPr>
-          <p:cNvPr id="31" name="Text 24"/>
-          <p:cNvSpPr/>
-          <p:nvPr/>
-        </p:nvSpPr>
-        <p:spPr>
-          <a:xfrm>
-            <a:off x="868680" y="3520440"/>
+        <p:txBody>
+          <a:bodyPr/>
+          <a:lstStyle/>
+          <a:p>
+            <a:endParaRPr lang="es-AR"/>
+          </a:p>
+        </p:txBody>
+      </p:sp>
+      <p:sp>
+        <p:nvSpPr>
+          <p:cNvPr id="21" name="Text 16"/>
+          <p:cNvSpPr/>
+          <p:nvPr/>
+        </p:nvSpPr>
+        <p:spPr>
+          <a:xfrm>
+            <a:off x="868680" y="2532888"/>
             <a:ext cx="365760" cy="420624"/>
           </a:xfrm>
           <a:prstGeom prst="rect">
@@ -8493,7 +8422,7 @@
           <a:bodyPr wrap="square" lIns="0" tIns="0" rIns="0" bIns="0" rtlCol="0" anchor="ctr"/>
           <a:lstStyle/>
           <a:p>
-            <a:pPr indent="0" marL="0">
+            <a:pPr marL="0" indent="0">
               <a:buNone/>
             </a:pPr>
             <a:r>
@@ -8505,7 +8434,7 @@
                 <a:ea typeface="Arial" pitchFamily="34" charset="-122"/>
                 <a:cs typeface="Arial" pitchFamily="34" charset="-120"/>
               </a:rPr>
-              <a:t>6</a:t>
+              <a:t>4</a:t>
             </a:r>
             <a:endParaRPr lang="en-US" sz="1300" dirty="0"/>
           </a:p>
@@ -8513,7 +8442,7 @@
       </p:sp>
       <p:pic>
         <p:nvPicPr>
-          <p:cNvPr id="32" name="Image 5" descr="preencoded.png">    </p:cNvPr>
+          <p:cNvPr id="22" name="Image 3" descr="preencoded.png"/>
           <p:cNvPicPr>
             <a:picLocks noChangeAspect="1"/>
           </p:cNvPicPr>
@@ -8527,7 +8456,7 @@
         </p:blipFill>
         <p:spPr>
           <a:xfrm>
-            <a:off x="1234440" y="3593592"/>
+            <a:off x="1234440" y="2606040"/>
             <a:ext cx="256032" cy="256032"/>
           </a:xfrm>
           <a:prstGeom prst="rect">
@@ -8537,13 +8466,13 @@
       </p:pic>
       <p:sp>
         <p:nvSpPr>
-          <p:cNvPr id="33" name="Text 25"/>
-          <p:cNvSpPr/>
-          <p:nvPr/>
-        </p:nvSpPr>
-        <p:spPr>
-          <a:xfrm>
-            <a:off x="1645920" y="3520440"/>
+          <p:cNvPr id="23" name="Text 17"/>
+          <p:cNvSpPr/>
+          <p:nvPr/>
+        </p:nvSpPr>
+        <p:spPr>
+          <a:xfrm>
+            <a:off x="1645920" y="2532888"/>
             <a:ext cx="6675120" cy="420624"/>
           </a:xfrm>
           <a:prstGeom prst="rect">
@@ -8556,7 +8485,7 @@
           <a:bodyPr wrap="square" lIns="0" tIns="0" rIns="0" bIns="0" rtlCol="0" anchor="ctr"/>
           <a:lstStyle/>
           <a:p>
-            <a:pPr indent="0" marL="0">
+            <a:pPr marL="0" indent="0">
               <a:buNone/>
             </a:pPr>
             <a:r>
@@ -8568,7 +8497,7 @@
                 <a:ea typeface="Arial" pitchFamily="34" charset="-122"/>
                 <a:cs typeface="Arial" pitchFamily="34" charset="-120"/>
               </a:rPr>
-              <a:t>Tipos de archivos: .R y .Rmd</a:t>
+              <a:t>Operadores aritméticos, lógicos y de asignación</a:t>
             </a:r>
             <a:endParaRPr lang="en-US" sz="1250" dirty="0"/>
           </a:p>
@@ -8576,13 +8505,13 @@
       </p:sp>
       <p:sp>
         <p:nvSpPr>
-          <p:cNvPr id="34" name="Shape 26"/>
-          <p:cNvSpPr/>
-          <p:nvPr/>
-        </p:nvSpPr>
-        <p:spPr>
-          <a:xfrm>
-            <a:off x="640080" y="4014216"/>
+          <p:cNvPr id="24" name="Shape 18"/>
+          <p:cNvSpPr/>
+          <p:nvPr/>
+        </p:nvSpPr>
+        <p:spPr>
+          <a:xfrm>
+            <a:off x="640080" y="3026664"/>
             <a:ext cx="7863840" cy="420624"/>
           </a:xfrm>
           <a:prstGeom prst="rect">
@@ -8593,23 +8522,30 @@
           </a:solidFill>
           <a:ln/>
           <a:effectLst>
-            <a:outerShdw sx="100000" sy="100000" kx="0" ky="0" algn="bl" rotWithShape="0" blurRad="101600" dist="38100" dir="8100000">
+            <a:outerShdw blurRad="101600" dist="38100" dir="8100000" algn="bl" rotWithShape="0">
               <a:srgbClr val="000000">
                 <a:alpha val="10000"/>
               </a:srgbClr>
             </a:outerShdw>
           </a:effectLst>
         </p:spPr>
-      </p:sp>
-      <p:sp>
-        <p:nvSpPr>
-          <p:cNvPr id="35" name="Shape 27"/>
-          <p:cNvSpPr/>
-          <p:nvPr/>
-        </p:nvSpPr>
-        <p:spPr>
-          <a:xfrm>
-            <a:off x="640080" y="4014216"/>
+        <p:txBody>
+          <a:bodyPr/>
+          <a:lstStyle/>
+          <a:p>
+            <a:endParaRPr lang="es-AR"/>
+          </a:p>
+        </p:txBody>
+      </p:sp>
+      <p:sp>
+        <p:nvSpPr>
+          <p:cNvPr id="25" name="Shape 19"/>
+          <p:cNvSpPr/>
+          <p:nvPr/>
+        </p:nvSpPr>
+        <p:spPr>
+          <a:xfrm>
+            <a:off x="640080" y="3026664"/>
             <a:ext cx="54864" cy="420624"/>
           </a:xfrm>
           <a:prstGeom prst="rect">
@@ -8620,16 +8556,23 @@
           </a:solidFill>
           <a:ln/>
         </p:spPr>
-      </p:sp>
-      <p:sp>
-        <p:nvSpPr>
-          <p:cNvPr id="36" name="Text 28"/>
-          <p:cNvSpPr/>
-          <p:nvPr/>
-        </p:nvSpPr>
-        <p:spPr>
-          <a:xfrm>
-            <a:off x="868680" y="4014216"/>
+        <p:txBody>
+          <a:bodyPr/>
+          <a:lstStyle/>
+          <a:p>
+            <a:endParaRPr lang="es-AR"/>
+          </a:p>
+        </p:txBody>
+      </p:sp>
+      <p:sp>
+        <p:nvSpPr>
+          <p:cNvPr id="26" name="Text 20"/>
+          <p:cNvSpPr/>
+          <p:nvPr/>
+        </p:nvSpPr>
+        <p:spPr>
+          <a:xfrm>
+            <a:off x="868680" y="3026664"/>
             <a:ext cx="365760" cy="420624"/>
           </a:xfrm>
           <a:prstGeom prst="rect">
@@ -8642,7 +8585,7 @@
           <a:bodyPr wrap="square" lIns="0" tIns="0" rIns="0" bIns="0" rtlCol="0" anchor="ctr"/>
           <a:lstStyle/>
           <a:p>
-            <a:pPr indent="0" marL="0">
+            <a:pPr marL="0" indent="0">
               <a:buNone/>
             </a:pPr>
             <a:r>
@@ -8654,7 +8597,7 @@
                 <a:ea typeface="Arial" pitchFamily="34" charset="-122"/>
                 <a:cs typeface="Arial" pitchFamily="34" charset="-120"/>
               </a:rPr>
-              <a:t>7</a:t>
+              <a:t>5</a:t>
             </a:r>
             <a:endParaRPr lang="en-US" sz="1300" dirty="0"/>
           </a:p>
@@ -8662,7 +8605,7 @@
       </p:sp>
       <p:pic>
         <p:nvPicPr>
-          <p:cNvPr id="37" name="Image 6" descr="preencoded.png">    </p:cNvPr>
+          <p:cNvPr id="27" name="Image 4" descr="preencoded.png"/>
           <p:cNvPicPr>
             <a:picLocks noChangeAspect="1"/>
           </p:cNvPicPr>
@@ -8676,6 +8619,332 @@
         </p:blipFill>
         <p:spPr>
           <a:xfrm>
+            <a:off x="1234440" y="3099816"/>
+            <a:ext cx="256032" cy="256032"/>
+          </a:xfrm>
+          <a:prstGeom prst="rect">
+            <a:avLst/>
+          </a:prstGeom>
+        </p:spPr>
+      </p:pic>
+      <p:sp>
+        <p:nvSpPr>
+          <p:cNvPr id="28" name="Text 21"/>
+          <p:cNvSpPr/>
+          <p:nvPr/>
+        </p:nvSpPr>
+        <p:spPr>
+          <a:xfrm>
+            <a:off x="1645920" y="3026664"/>
+            <a:ext cx="6675120" cy="420624"/>
+          </a:xfrm>
+          <a:prstGeom prst="rect">
+            <a:avLst/>
+          </a:prstGeom>
+          <a:noFill/>
+          <a:ln/>
+        </p:spPr>
+        <p:txBody>
+          <a:bodyPr wrap="square" lIns="0" tIns="0" rIns="0" bIns="0" rtlCol="0" anchor="ctr"/>
+          <a:lstStyle/>
+          <a:p>
+            <a:pPr marL="0" indent="0">
+              <a:buNone/>
+            </a:pPr>
+            <a:r>
+              <a:rPr lang="en-US" sz="1250" dirty="0">
+                <a:solidFill>
+                  <a:srgbClr val="334155"/>
+                </a:solidFill>
+                <a:latin typeface="Arial" pitchFamily="34" charset="0"/>
+                <a:ea typeface="Arial" pitchFamily="34" charset="-122"/>
+                <a:cs typeface="Arial" pitchFamily="34" charset="-120"/>
+              </a:rPr>
+              <a:t>Funciones básicas: sum(), mean(), length(), class()</a:t>
+            </a:r>
+            <a:endParaRPr lang="en-US" sz="1250" dirty="0"/>
+          </a:p>
+        </p:txBody>
+      </p:sp>
+      <p:sp>
+        <p:nvSpPr>
+          <p:cNvPr id="29" name="Shape 22"/>
+          <p:cNvSpPr/>
+          <p:nvPr/>
+        </p:nvSpPr>
+        <p:spPr>
+          <a:xfrm>
+            <a:off x="640080" y="3520440"/>
+            <a:ext cx="7863840" cy="420624"/>
+          </a:xfrm>
+          <a:prstGeom prst="rect">
+            <a:avLst/>
+          </a:prstGeom>
+          <a:solidFill>
+            <a:srgbClr val="FFFFFF"/>
+          </a:solidFill>
+          <a:ln/>
+          <a:effectLst>
+            <a:outerShdw blurRad="101600" dist="38100" dir="8100000" algn="bl" rotWithShape="0">
+              <a:srgbClr val="000000">
+                <a:alpha val="10000"/>
+              </a:srgbClr>
+            </a:outerShdw>
+          </a:effectLst>
+        </p:spPr>
+        <p:txBody>
+          <a:bodyPr/>
+          <a:lstStyle/>
+          <a:p>
+            <a:endParaRPr lang="es-AR"/>
+          </a:p>
+        </p:txBody>
+      </p:sp>
+      <p:sp>
+        <p:nvSpPr>
+          <p:cNvPr id="30" name="Shape 23"/>
+          <p:cNvSpPr/>
+          <p:nvPr/>
+        </p:nvSpPr>
+        <p:spPr>
+          <a:xfrm>
+            <a:off x="640080" y="3520440"/>
+            <a:ext cx="54864" cy="420624"/>
+          </a:xfrm>
+          <a:prstGeom prst="rect">
+            <a:avLst/>
+          </a:prstGeom>
+          <a:solidFill>
+            <a:srgbClr val="0891B2"/>
+          </a:solidFill>
+          <a:ln/>
+        </p:spPr>
+        <p:txBody>
+          <a:bodyPr/>
+          <a:lstStyle/>
+          <a:p>
+            <a:endParaRPr lang="es-AR"/>
+          </a:p>
+        </p:txBody>
+      </p:sp>
+      <p:sp>
+        <p:nvSpPr>
+          <p:cNvPr id="31" name="Text 24"/>
+          <p:cNvSpPr/>
+          <p:nvPr/>
+        </p:nvSpPr>
+        <p:spPr>
+          <a:xfrm>
+            <a:off x="868680" y="3520440"/>
+            <a:ext cx="365760" cy="420624"/>
+          </a:xfrm>
+          <a:prstGeom prst="rect">
+            <a:avLst/>
+          </a:prstGeom>
+          <a:noFill/>
+          <a:ln/>
+        </p:spPr>
+        <p:txBody>
+          <a:bodyPr wrap="square" lIns="0" tIns="0" rIns="0" bIns="0" rtlCol="0" anchor="ctr"/>
+          <a:lstStyle/>
+          <a:p>
+            <a:pPr marL="0" indent="0">
+              <a:buNone/>
+            </a:pPr>
+            <a:r>
+              <a:rPr lang="en-US" sz="1300" b="1" dirty="0">
+                <a:solidFill>
+                  <a:srgbClr val="0891B2"/>
+                </a:solidFill>
+                <a:latin typeface="Arial" pitchFamily="34" charset="0"/>
+                <a:ea typeface="Arial" pitchFamily="34" charset="-122"/>
+                <a:cs typeface="Arial" pitchFamily="34" charset="-120"/>
+              </a:rPr>
+              <a:t>6</a:t>
+            </a:r>
+            <a:endParaRPr lang="en-US" sz="1300" dirty="0"/>
+          </a:p>
+        </p:txBody>
+      </p:sp>
+      <p:pic>
+        <p:nvPicPr>
+          <p:cNvPr id="32" name="Image 5" descr="preencoded.png"/>
+          <p:cNvPicPr>
+            <a:picLocks noChangeAspect="1"/>
+          </p:cNvPicPr>
+          <p:nvPr/>
+        </p:nvPicPr>
+        <p:blipFill>
+          <a:blip r:embed="rId8"/>
+          <a:stretch>
+            <a:fillRect/>
+          </a:stretch>
+        </p:blipFill>
+        <p:spPr>
+          <a:xfrm>
+            <a:off x="1234440" y="3593592"/>
+            <a:ext cx="256032" cy="256032"/>
+          </a:xfrm>
+          <a:prstGeom prst="rect">
+            <a:avLst/>
+          </a:prstGeom>
+        </p:spPr>
+      </p:pic>
+      <p:sp>
+        <p:nvSpPr>
+          <p:cNvPr id="33" name="Text 25"/>
+          <p:cNvSpPr/>
+          <p:nvPr/>
+        </p:nvSpPr>
+        <p:spPr>
+          <a:xfrm>
+            <a:off x="1645920" y="3520440"/>
+            <a:ext cx="6675120" cy="420624"/>
+          </a:xfrm>
+          <a:prstGeom prst="rect">
+            <a:avLst/>
+          </a:prstGeom>
+          <a:noFill/>
+          <a:ln/>
+        </p:spPr>
+        <p:txBody>
+          <a:bodyPr wrap="square" lIns="0" tIns="0" rIns="0" bIns="0" rtlCol="0" anchor="ctr"/>
+          <a:lstStyle/>
+          <a:p>
+            <a:pPr marL="0" indent="0">
+              <a:buNone/>
+            </a:pPr>
+            <a:r>
+              <a:rPr lang="en-US" sz="1250" dirty="0">
+                <a:solidFill>
+                  <a:srgbClr val="334155"/>
+                </a:solidFill>
+                <a:latin typeface="Arial" pitchFamily="34" charset="0"/>
+                <a:ea typeface="Arial" pitchFamily="34" charset="-122"/>
+                <a:cs typeface="Arial" pitchFamily="34" charset="-120"/>
+              </a:rPr>
+              <a:t>Tipos de archivos: .R y .Rmd</a:t>
+            </a:r>
+            <a:endParaRPr lang="en-US" sz="1250" dirty="0"/>
+          </a:p>
+        </p:txBody>
+      </p:sp>
+      <p:sp>
+        <p:nvSpPr>
+          <p:cNvPr id="34" name="Shape 26"/>
+          <p:cNvSpPr/>
+          <p:nvPr/>
+        </p:nvSpPr>
+        <p:spPr>
+          <a:xfrm>
+            <a:off x="640080" y="4014216"/>
+            <a:ext cx="7863840" cy="420624"/>
+          </a:xfrm>
+          <a:prstGeom prst="rect">
+            <a:avLst/>
+          </a:prstGeom>
+          <a:solidFill>
+            <a:srgbClr val="FFFFFF"/>
+          </a:solidFill>
+          <a:ln/>
+          <a:effectLst>
+            <a:outerShdw blurRad="101600" dist="38100" dir="8100000" algn="bl" rotWithShape="0">
+              <a:srgbClr val="000000">
+                <a:alpha val="10000"/>
+              </a:srgbClr>
+            </a:outerShdw>
+          </a:effectLst>
+        </p:spPr>
+        <p:txBody>
+          <a:bodyPr/>
+          <a:lstStyle/>
+          <a:p>
+            <a:endParaRPr lang="es-AR"/>
+          </a:p>
+        </p:txBody>
+      </p:sp>
+      <p:sp>
+        <p:nvSpPr>
+          <p:cNvPr id="35" name="Shape 27"/>
+          <p:cNvSpPr/>
+          <p:nvPr/>
+        </p:nvSpPr>
+        <p:spPr>
+          <a:xfrm>
+            <a:off x="640080" y="4014216"/>
+            <a:ext cx="54864" cy="420624"/>
+          </a:xfrm>
+          <a:prstGeom prst="rect">
+            <a:avLst/>
+          </a:prstGeom>
+          <a:solidFill>
+            <a:srgbClr val="0891B2"/>
+          </a:solidFill>
+          <a:ln/>
+        </p:spPr>
+        <p:txBody>
+          <a:bodyPr/>
+          <a:lstStyle/>
+          <a:p>
+            <a:endParaRPr lang="es-AR"/>
+          </a:p>
+        </p:txBody>
+      </p:sp>
+      <p:sp>
+        <p:nvSpPr>
+          <p:cNvPr id="36" name="Text 28"/>
+          <p:cNvSpPr/>
+          <p:nvPr/>
+        </p:nvSpPr>
+        <p:spPr>
+          <a:xfrm>
+            <a:off x="868680" y="4014216"/>
+            <a:ext cx="365760" cy="420624"/>
+          </a:xfrm>
+          <a:prstGeom prst="rect">
+            <a:avLst/>
+          </a:prstGeom>
+          <a:noFill/>
+          <a:ln/>
+        </p:spPr>
+        <p:txBody>
+          <a:bodyPr wrap="square" lIns="0" tIns="0" rIns="0" bIns="0" rtlCol="0" anchor="ctr"/>
+          <a:lstStyle/>
+          <a:p>
+            <a:pPr marL="0" indent="0">
+              <a:buNone/>
+            </a:pPr>
+            <a:r>
+              <a:rPr lang="en-US" sz="1300" b="1" dirty="0">
+                <a:solidFill>
+                  <a:srgbClr val="0891B2"/>
+                </a:solidFill>
+                <a:latin typeface="Arial" pitchFamily="34" charset="0"/>
+                <a:ea typeface="Arial" pitchFamily="34" charset="-122"/>
+                <a:cs typeface="Arial" pitchFamily="34" charset="-120"/>
+              </a:rPr>
+              <a:t>7</a:t>
+            </a:r>
+            <a:endParaRPr lang="en-US" sz="1300" dirty="0"/>
+          </a:p>
+        </p:txBody>
+      </p:sp>
+      <p:pic>
+        <p:nvPicPr>
+          <p:cNvPr id="37" name="Image 6" descr="preencoded.png"/>
+          <p:cNvPicPr>
+            <a:picLocks noChangeAspect="1"/>
+          </p:cNvPicPr>
+          <p:nvPr/>
+        </p:nvPicPr>
+        <p:blipFill>
+          <a:blip r:embed="rId9"/>
+          <a:stretch>
+            <a:fillRect/>
+          </a:stretch>
+        </p:blipFill>
+        <p:spPr>
+          <a:xfrm>
             <a:off x="1234440" y="4087368"/>
             <a:ext cx="256032" cy="256032"/>
           </a:xfrm>
@@ -8705,7 +8974,7 @@
           <a:bodyPr wrap="square" lIns="0" tIns="0" rIns="0" bIns="0" rtlCol="0" anchor="ctr"/>
           <a:lstStyle/>
           <a:p>
-            <a:pPr indent="0" marL="0">
+            <a:pPr marL="0" indent="0">
               <a:buNone/>
             </a:pPr>
             <a:r>
@@ -8742,6 +9011,13 @@
           </a:solidFill>
           <a:ln/>
         </p:spPr>
+        <p:txBody>
+          <a:bodyPr/>
+          <a:lstStyle/>
+          <a:p>
+            <a:endParaRPr lang="es-AR"/>
+          </a:p>
+        </p:txBody>
       </p:sp>
       <p:sp>
         <p:nvSpPr>
@@ -8764,7 +9040,7 @@
           <a:bodyPr wrap="square" lIns="0" tIns="0" rIns="0" bIns="0" rtlCol="0" anchor="ctr"/>
           <a:lstStyle/>
           <a:p>
-            <a:pPr indent="0" marL="0">
+            <a:pPr marL="0" indent="0">
               <a:buNone/>
             </a:pPr>
             <a:r>
@@ -8803,7 +9079,7 @@
           <a:bodyPr wrap="square" lIns="0" tIns="0" rIns="0" bIns="0" rtlCol="0" anchor="ctr"/>
           <a:lstStyle/>
           <a:p>
-            <a:pPr algn="r" indent="0" marL="0">
+            <a:pPr marL="0" indent="0" algn="r">
               <a:buNone/>
             </a:pPr>
             <a:r>
@@ -8837,6 +9113,7 @@
         <a:solidFill>
           <a:srgbClr val="F0F9FF"/>
         </a:solidFill>
+        <a:effectLst/>
       </p:bgPr>
     </p:bg>
     <p:spTree>
@@ -8872,6 +9149,13 @@
           </a:solidFill>
           <a:ln/>
         </p:spPr>
+        <p:txBody>
+          <a:bodyPr/>
+          <a:lstStyle/>
+          <a:p>
+            <a:endParaRPr lang="es-AR"/>
+          </a:p>
+        </p:txBody>
       </p:sp>
       <p:sp>
         <p:nvSpPr>
@@ -8894,7 +9178,7 @@
           <a:bodyPr wrap="square" lIns="0" tIns="0" rIns="0" bIns="0" rtlCol="0" anchor="ctr"/>
           <a:lstStyle/>
           <a:p>
-            <a:pPr indent="0" marL="0">
+            <a:pPr marL="0" indent="0">
               <a:buNone/>
             </a:pPr>
             <a:r>
@@ -8933,7 +9217,7 @@
           <a:bodyPr wrap="square" lIns="0" tIns="0" rIns="0" bIns="0" rtlCol="0" anchor="ctr"/>
           <a:lstStyle/>
           <a:p>
-            <a:pPr indent="0" marL="0">
+            <a:pPr marL="0" indent="0">
               <a:buNone/>
             </a:pPr>
             <a:r>
@@ -8970,6 +9254,13 @@
           </a:solidFill>
           <a:ln/>
         </p:spPr>
+        <p:txBody>
+          <a:bodyPr/>
+          <a:lstStyle/>
+          <a:p>
+            <a:endParaRPr lang="es-AR"/>
+          </a:p>
+        </p:txBody>
       </p:sp>
       <p:sp>
         <p:nvSpPr>
@@ -8992,7 +9283,7 @@
           <a:bodyPr wrap="square" lIns="0" tIns="0" rIns="0" bIns="0" rtlCol="0" anchor="ctr"/>
           <a:lstStyle/>
           <a:p>
-            <a:pPr algn="ctr" indent="0" marL="0">
+            <a:pPr marL="0" indent="0" algn="ctr">
               <a:buNone/>
             </a:pPr>
             <a:r>
@@ -9029,6 +9320,13 @@
           </a:solidFill>
           <a:ln/>
         </p:spPr>
+        <p:txBody>
+          <a:bodyPr/>
+          <a:lstStyle/>
+          <a:p>
+            <a:endParaRPr lang="es-AR"/>
+          </a:p>
+        </p:txBody>
       </p:sp>
       <p:sp>
         <p:nvSpPr>
@@ -9051,7 +9349,7 @@
           <a:bodyPr wrap="square" lIns="0" tIns="0" rIns="0" bIns="0" rtlCol="0" anchor="ctr"/>
           <a:lstStyle/>
           <a:p>
-            <a:pPr algn="ctr" indent="0" marL="0">
+            <a:pPr marL="0" indent="0" algn="ctr">
               <a:buNone/>
             </a:pPr>
             <a:r>
@@ -9088,6 +9386,13 @@
           </a:solidFill>
           <a:ln/>
         </p:spPr>
+        <p:txBody>
+          <a:bodyPr/>
+          <a:lstStyle/>
+          <a:p>
+            <a:endParaRPr lang="es-AR"/>
+          </a:p>
+        </p:txBody>
       </p:sp>
       <p:sp>
         <p:nvSpPr>
@@ -9110,7 +9415,7 @@
           <a:bodyPr wrap="square" lIns="0" tIns="0" rIns="0" bIns="0" rtlCol="0" anchor="ctr"/>
           <a:lstStyle/>
           <a:p>
-            <a:pPr algn="ctr" indent="0" marL="0">
+            <a:pPr marL="0" indent="0" algn="ctr">
               <a:buNone/>
             </a:pPr>
             <a:r>
@@ -9147,6 +9452,13 @@
           </a:solidFill>
           <a:ln/>
         </p:spPr>
+        <p:txBody>
+          <a:bodyPr/>
+          <a:lstStyle/>
+          <a:p>
+            <a:endParaRPr lang="es-AR"/>
+          </a:p>
+        </p:txBody>
       </p:sp>
       <p:sp>
         <p:nvSpPr>
@@ -9169,7 +9481,7 @@
           <a:bodyPr wrap="square" lIns="0" tIns="0" rIns="0" bIns="0" rtlCol="0" anchor="ctr"/>
           <a:lstStyle/>
           <a:p>
-            <a:pPr indent="0" marL="0">
+            <a:pPr marL="0" indent="0">
               <a:buNone/>
             </a:pPr>
             <a:r>
@@ -9208,7 +9520,7 @@
           <a:bodyPr wrap="square" lIns="0" tIns="0" rIns="0" bIns="0" rtlCol="0" anchor="ctr"/>
           <a:lstStyle/>
           <a:p>
-            <a:pPr algn="ctr" indent="0" marL="0">
+            <a:pPr marL="0" indent="0" algn="ctr">
               <a:buNone/>
             </a:pPr>
             <a:r>
@@ -9247,7 +9559,7 @@
           <a:bodyPr wrap="square" lIns="0" tIns="0" rIns="0" bIns="0" rtlCol="0" anchor="ctr"/>
           <a:lstStyle/>
           <a:p>
-            <a:pPr algn="ctr" indent="0" marL="0">
+            <a:pPr marL="0" indent="0" algn="ctr">
               <a:buNone/>
             </a:pPr>
             <a:r>
@@ -9286,7 +9598,7 @@
           <a:bodyPr wrap="square" lIns="0" tIns="0" rIns="0" bIns="0" rtlCol="0" anchor="ctr"/>
           <a:lstStyle/>
           <a:p>
-            <a:pPr algn="ctr" indent="0" marL="0">
+            <a:pPr marL="0" indent="0" algn="ctr">
               <a:buNone/>
             </a:pPr>
             <a:r>
@@ -9323,6 +9635,13 @@
           </a:solidFill>
           <a:ln/>
         </p:spPr>
+        <p:txBody>
+          <a:bodyPr/>
+          <a:lstStyle/>
+          <a:p>
+            <a:endParaRPr lang="es-AR"/>
+          </a:p>
+        </p:txBody>
       </p:sp>
       <p:sp>
         <p:nvSpPr>
@@ -9345,7 +9664,7 @@
           <a:bodyPr wrap="square" lIns="0" tIns="0" rIns="0" bIns="0" rtlCol="0" anchor="ctr"/>
           <a:lstStyle/>
           <a:p>
-            <a:pPr indent="0" marL="0">
+            <a:pPr marL="0" indent="0">
               <a:buNone/>
             </a:pPr>
             <a:r>
@@ -9384,7 +9703,7 @@
           <a:bodyPr wrap="square" lIns="0" tIns="0" rIns="0" bIns="0" rtlCol="0" anchor="ctr"/>
           <a:lstStyle/>
           <a:p>
-            <a:pPr algn="ctr" indent="0" marL="0">
+            <a:pPr marL="0" indent="0" algn="ctr">
               <a:buNone/>
             </a:pPr>
             <a:r>
@@ -9423,7 +9742,7 @@
           <a:bodyPr wrap="square" lIns="0" tIns="0" rIns="0" bIns="0" rtlCol="0" anchor="ctr"/>
           <a:lstStyle/>
           <a:p>
-            <a:pPr algn="ctr" indent="0" marL="0">
+            <a:pPr marL="0" indent="0" algn="ctr">
               <a:buNone/>
             </a:pPr>
             <a:r>
@@ -9462,7 +9781,7 @@
           <a:bodyPr wrap="square" lIns="0" tIns="0" rIns="0" bIns="0" rtlCol="0" anchor="ctr"/>
           <a:lstStyle/>
           <a:p>
-            <a:pPr algn="ctr" indent="0" marL="0">
+            <a:pPr marL="0" indent="0" algn="ctr">
               <a:buNone/>
             </a:pPr>
             <a:r>
@@ -9499,6 +9818,13 @@
           </a:solidFill>
           <a:ln/>
         </p:spPr>
+        <p:txBody>
+          <a:bodyPr/>
+          <a:lstStyle/>
+          <a:p>
+            <a:endParaRPr lang="es-AR"/>
+          </a:p>
+        </p:txBody>
       </p:sp>
       <p:sp>
         <p:nvSpPr>
@@ -9521,7 +9847,7 @@
           <a:bodyPr wrap="square" lIns="0" tIns="0" rIns="0" bIns="0" rtlCol="0" anchor="ctr"/>
           <a:lstStyle/>
           <a:p>
-            <a:pPr indent="0" marL="0">
+            <a:pPr marL="0" indent="0">
               <a:buNone/>
             </a:pPr>
             <a:r>
@@ -9560,7 +9886,7 @@
           <a:bodyPr wrap="square" lIns="0" tIns="0" rIns="0" bIns="0" rtlCol="0" anchor="ctr"/>
           <a:lstStyle/>
           <a:p>
-            <a:pPr algn="ctr" indent="0" marL="0">
+            <a:pPr marL="0" indent="0" algn="ctr">
               <a:buNone/>
             </a:pPr>
             <a:r>
@@ -9599,7 +9925,7 @@
           <a:bodyPr wrap="square" lIns="0" tIns="0" rIns="0" bIns="0" rtlCol="0" anchor="ctr"/>
           <a:lstStyle/>
           <a:p>
-            <a:pPr algn="ctr" indent="0" marL="0">
+            <a:pPr marL="0" indent="0" algn="ctr">
               <a:buNone/>
             </a:pPr>
             <a:r>
@@ -9638,7 +9964,7 @@
           <a:bodyPr wrap="square" lIns="0" tIns="0" rIns="0" bIns="0" rtlCol="0" anchor="ctr"/>
           <a:lstStyle/>
           <a:p>
-            <a:pPr algn="ctr" indent="0" marL="0">
+            <a:pPr marL="0" indent="0" algn="ctr">
               <a:buNone/>
             </a:pPr>
             <a:r>
@@ -9675,6 +10001,13 @@
           </a:solidFill>
           <a:ln/>
         </p:spPr>
+        <p:txBody>
+          <a:bodyPr/>
+          <a:lstStyle/>
+          <a:p>
+            <a:endParaRPr lang="es-AR"/>
+          </a:p>
+        </p:txBody>
       </p:sp>
       <p:sp>
         <p:nvSpPr>
@@ -9697,7 +10030,7 @@
           <a:bodyPr wrap="square" lIns="0" tIns="0" rIns="0" bIns="0" rtlCol="0" anchor="ctr"/>
           <a:lstStyle/>
           <a:p>
-            <a:pPr indent="0" marL="0">
+            <a:pPr marL="0" indent="0">
               <a:buNone/>
             </a:pPr>
             <a:r>
@@ -9736,7 +10069,7 @@
           <a:bodyPr wrap="square" lIns="0" tIns="0" rIns="0" bIns="0" rtlCol="0" anchor="ctr"/>
           <a:lstStyle/>
           <a:p>
-            <a:pPr algn="ctr" indent="0" marL="0">
+            <a:pPr marL="0" indent="0" algn="ctr">
               <a:buNone/>
             </a:pPr>
             <a:r>
@@ -9775,7 +10108,7 @@
           <a:bodyPr wrap="square" lIns="0" tIns="0" rIns="0" bIns="0" rtlCol="0" anchor="ctr"/>
           <a:lstStyle/>
           <a:p>
-            <a:pPr algn="ctr" indent="0" marL="0">
+            <a:pPr marL="0" indent="0" algn="ctr">
               <a:buNone/>
             </a:pPr>
             <a:r>
@@ -9814,7 +10147,7 @@
           <a:bodyPr wrap="square" lIns="0" tIns="0" rIns="0" bIns="0" rtlCol="0" anchor="ctr"/>
           <a:lstStyle/>
           <a:p>
-            <a:pPr algn="ctr" indent="0" marL="0">
+            <a:pPr marL="0" indent="0" algn="ctr">
               <a:buNone/>
             </a:pPr>
             <a:r>
@@ -9851,6 +10184,13 @@
           </a:solidFill>
           <a:ln/>
         </p:spPr>
+        <p:txBody>
+          <a:bodyPr/>
+          <a:lstStyle/>
+          <a:p>
+            <a:endParaRPr lang="es-AR"/>
+          </a:p>
+        </p:txBody>
       </p:sp>
       <p:sp>
         <p:nvSpPr>
@@ -9873,7 +10213,7 @@
           <a:bodyPr wrap="square" lIns="0" tIns="0" rIns="0" bIns="0" rtlCol="0" anchor="ctr"/>
           <a:lstStyle/>
           <a:p>
-            <a:pPr indent="0" marL="0">
+            <a:pPr marL="0" indent="0">
               <a:buNone/>
             </a:pPr>
             <a:r>
@@ -9912,7 +10252,7 @@
           <a:bodyPr wrap="square" lIns="0" tIns="0" rIns="0" bIns="0" rtlCol="0" anchor="ctr"/>
           <a:lstStyle/>
           <a:p>
-            <a:pPr algn="ctr" indent="0" marL="0">
+            <a:pPr marL="0" indent="0" algn="ctr">
               <a:buNone/>
             </a:pPr>
             <a:r>
@@ -9951,7 +10291,7 @@
           <a:bodyPr wrap="square" lIns="0" tIns="0" rIns="0" bIns="0" rtlCol="0" anchor="ctr"/>
           <a:lstStyle/>
           <a:p>
-            <a:pPr algn="ctr" indent="0" marL="0">
+            <a:pPr marL="0" indent="0" algn="ctr">
               <a:buNone/>
             </a:pPr>
             <a:r>
@@ -9990,7 +10330,7 @@
           <a:bodyPr wrap="square" lIns="0" tIns="0" rIns="0" bIns="0" rtlCol="0" anchor="ctr"/>
           <a:lstStyle/>
           <a:p>
-            <a:pPr algn="ctr" indent="0" marL="0">
+            <a:pPr marL="0" indent="0" algn="ctr">
               <a:buNone/>
             </a:pPr>
             <a:r>
@@ -10027,6 +10367,13 @@
           </a:solidFill>
           <a:ln/>
         </p:spPr>
+        <p:txBody>
+          <a:bodyPr/>
+          <a:lstStyle/>
+          <a:p>
+            <a:endParaRPr lang="es-AR"/>
+          </a:p>
+        </p:txBody>
       </p:sp>
       <p:sp>
         <p:nvSpPr>
@@ -10049,7 +10396,7 @@
           <a:bodyPr wrap="square" lIns="0" tIns="0" rIns="0" bIns="0" rtlCol="0" anchor="ctr"/>
           <a:lstStyle/>
           <a:p>
-            <a:pPr indent="0" marL="0">
+            <a:pPr marL="0" indent="0">
               <a:buNone/>
             </a:pPr>
             <a:r>
@@ -10088,7 +10435,7 @@
           <a:bodyPr wrap="square" lIns="0" tIns="0" rIns="0" bIns="0" rtlCol="0" anchor="ctr"/>
           <a:lstStyle/>
           <a:p>
-            <a:pPr algn="ctr" indent="0" marL="0">
+            <a:pPr marL="0" indent="0" algn="ctr">
               <a:buNone/>
             </a:pPr>
             <a:r>
@@ -10127,7 +10474,7 @@
           <a:bodyPr wrap="square" lIns="0" tIns="0" rIns="0" bIns="0" rtlCol="0" anchor="ctr"/>
           <a:lstStyle/>
           <a:p>
-            <a:pPr algn="ctr" indent="0" marL="0">
+            <a:pPr marL="0" indent="0" algn="ctr">
               <a:buNone/>
             </a:pPr>
             <a:r>
@@ -10166,7 +10513,7 @@
           <a:bodyPr wrap="square" lIns="0" tIns="0" rIns="0" bIns="0" rtlCol="0" anchor="ctr"/>
           <a:lstStyle/>
           <a:p>
-            <a:pPr algn="ctr" indent="0" marL="0">
+            <a:pPr marL="0" indent="0" algn="ctr">
               <a:buNone/>
             </a:pPr>
             <a:r>
@@ -10203,6 +10550,13 @@
           </a:solidFill>
           <a:ln/>
         </p:spPr>
+        <p:txBody>
+          <a:bodyPr/>
+          <a:lstStyle/>
+          <a:p>
+            <a:endParaRPr lang="es-AR"/>
+          </a:p>
+        </p:txBody>
       </p:sp>
       <p:sp>
         <p:nvSpPr>
@@ -10225,7 +10579,7 @@
           <a:bodyPr wrap="square" lIns="0" tIns="0" rIns="0" bIns="0" rtlCol="0" anchor="ctr"/>
           <a:lstStyle/>
           <a:p>
-            <a:pPr indent="0" marL="0">
+            <a:pPr marL="0" indent="0">
               <a:buNone/>
             </a:pPr>
             <a:r>
@@ -10264,7 +10618,7 @@
           <a:bodyPr wrap="square" lIns="0" tIns="0" rIns="0" bIns="0" rtlCol="0" anchor="ctr"/>
           <a:lstStyle/>
           <a:p>
-            <a:pPr indent="0" marL="0">
+            <a:pPr marL="0" indent="0">
               <a:buNone/>
             </a:pPr>
             <a:r>
@@ -10301,6 +10655,13 @@
           </a:solidFill>
           <a:ln/>
         </p:spPr>
+        <p:txBody>
+          <a:bodyPr/>
+          <a:lstStyle/>
+          <a:p>
+            <a:endParaRPr lang="es-AR"/>
+          </a:p>
+        </p:txBody>
       </p:sp>
       <p:sp>
         <p:nvSpPr>
@@ -10323,7 +10684,7 @@
           <a:bodyPr wrap="square" lIns="0" tIns="0" rIns="0" bIns="0" rtlCol="0" anchor="ctr"/>
           <a:lstStyle/>
           <a:p>
-            <a:pPr indent="0" marL="0">
+            <a:pPr marL="0" indent="0">
               <a:buNone/>
             </a:pPr>
             <a:r>
@@ -10362,7 +10723,7 @@
           <a:bodyPr wrap="square" lIns="0" tIns="0" rIns="0" bIns="0" rtlCol="0" anchor="ctr"/>
           <a:lstStyle/>
           <a:p>
-            <a:pPr algn="r" indent="0" marL="0">
+            <a:pPr marL="0" indent="0" algn="r">
               <a:buNone/>
             </a:pPr>
             <a:r>
@@ -10396,6 +10757,7 @@
         <a:solidFill>
           <a:srgbClr val="F0F9FF"/>
         </a:solidFill>
+        <a:effectLst/>
       </p:bgPr>
     </p:bg>
     <p:spTree>
@@ -10431,6 +10793,13 @@
           </a:solidFill>
           <a:ln/>
         </p:spPr>
+        <p:txBody>
+          <a:bodyPr/>
+          <a:lstStyle/>
+          <a:p>
+            <a:endParaRPr lang="es-AR"/>
+          </a:p>
+        </p:txBody>
       </p:sp>
       <p:sp>
         <p:nvSpPr>
@@ -10453,7 +10822,7 @@
           <a:bodyPr wrap="square" lIns="0" tIns="0" rIns="0" bIns="0" rtlCol="0" anchor="ctr"/>
           <a:lstStyle/>
           <a:p>
-            <a:pPr indent="0" marL="0">
+            <a:pPr marL="0" indent="0">
               <a:buNone/>
             </a:pPr>
             <a:r>
@@ -10490,17 +10859,24 @@
           </a:solidFill>
           <a:ln/>
         </p:spPr>
+        <p:txBody>
+          <a:bodyPr/>
+          <a:lstStyle/>
+          <a:p>
+            <a:endParaRPr lang="es-AR"/>
+          </a:p>
+        </p:txBody>
       </p:sp>
       <p:pic>
         <p:nvPicPr>
-          <p:cNvPr id="5" name="Image 0" descr="preencoded.png">    </p:cNvPr>
+          <p:cNvPr id="5" name="Image 0" descr="preencoded.png"/>
           <p:cNvPicPr>
             <a:picLocks noChangeAspect="1"/>
           </p:cNvPicPr>
           <p:nvPr/>
         </p:nvPicPr>
         <p:blipFill>
-          <a:blip r:embed="rId1"/>
+          <a:blip r:embed="rId3"/>
           <a:stretch>
             <a:fillRect/>
           </a:stretch>
@@ -10536,7 +10912,7 @@
           <a:bodyPr wrap="square" lIns="0" tIns="0" rIns="0" bIns="0" rtlCol="0" anchor="ctr"/>
           <a:lstStyle/>
           <a:p>
-            <a:pPr indent="0" marL="0">
+            <a:pPr marL="0" indent="0">
               <a:buNone/>
             </a:pPr>
             <a:r>
@@ -10575,7 +10951,7 @@
           <a:bodyPr wrap="square" lIns="0" tIns="0" rIns="0" bIns="0" rtlCol="0" anchor="ctr"/>
           <a:lstStyle/>
           <a:p>
-            <a:pPr indent="0" marL="0">
+            <a:pPr marL="0" indent="0">
               <a:buNone/>
             </a:pPr>
             <a:r>
@@ -10614,7 +10990,7 @@
           <a:bodyPr wrap="square" lIns="0" tIns="0" rIns="0" bIns="0" rtlCol="0" anchor="ctr"/>
           <a:lstStyle/>
           <a:p>
-            <a:pPr indent="0" marL="0">
+            <a:pPr marL="0" indent="0">
               <a:buNone/>
             </a:pPr>
             <a:r>
@@ -10653,7 +11029,7 @@
           <a:bodyPr wrap="square" lIns="0" tIns="0" rIns="0" bIns="0" rtlCol="0" anchor="ctr"/>
           <a:lstStyle/>
           <a:p>
-            <a:pPr indent="0" marL="0">
+            <a:pPr marL="0" indent="0">
               <a:buNone/>
             </a:pPr>
             <a:r>
@@ -10692,7 +11068,7 @@
           <a:bodyPr wrap="square" lIns="0" tIns="0" rIns="0" bIns="0" rtlCol="0" anchor="ctr"/>
           <a:lstStyle/>
           <a:p>
-            <a:pPr indent="0" marL="0">
+            <a:pPr marL="0" indent="0">
               <a:buNone/>
             </a:pPr>
             <a:r>
@@ -10729,13 +11105,20 @@
           </a:solidFill>
           <a:ln/>
           <a:effectLst>
-            <a:outerShdw sx="100000" sy="100000" kx="0" ky="0" algn="bl" rotWithShape="0" blurRad="101600" dist="38100" dir="8100000">
+            <a:outerShdw blurRad="101600" dist="38100" dir="8100000" algn="bl" rotWithShape="0">
               <a:srgbClr val="000000">
                 <a:alpha val="10000"/>
               </a:srgbClr>
             </a:outerShdw>
           </a:effectLst>
         </p:spPr>
+        <p:txBody>
+          <a:bodyPr/>
+          <a:lstStyle/>
+          <a:p>
+            <a:endParaRPr lang="es-AR"/>
+          </a:p>
+        </p:txBody>
       </p:sp>
       <p:sp>
         <p:nvSpPr>
@@ -10756,17 +11139,24 @@
           </a:solidFill>
           <a:ln/>
         </p:spPr>
+        <p:txBody>
+          <a:bodyPr/>
+          <a:lstStyle/>
+          <a:p>
+            <a:endParaRPr lang="es-AR"/>
+          </a:p>
+        </p:txBody>
       </p:sp>
       <p:pic>
         <p:nvPicPr>
-          <p:cNvPr id="13" name="Image 1" descr="preencoded.png">    </p:cNvPr>
+          <p:cNvPr id="13" name="Image 1" descr="preencoded.png"/>
           <p:cNvPicPr>
             <a:picLocks noChangeAspect="1"/>
           </p:cNvPicPr>
           <p:nvPr/>
         </p:nvPicPr>
         <p:blipFill>
-          <a:blip r:embed="rId2"/>
+          <a:blip r:embed="rId4"/>
           <a:stretch>
             <a:fillRect/>
           </a:stretch>
@@ -10802,7 +11192,7 @@
           <a:bodyPr wrap="square" lIns="0" tIns="0" rIns="0" bIns="0" rtlCol="0" anchor="ctr"/>
           <a:lstStyle/>
           <a:p>
-            <a:pPr indent="0" marL="0">
+            <a:pPr marL="0" indent="0">
               <a:buNone/>
             </a:pPr>
             <a:r>
@@ -10841,7 +11231,7 @@
           <a:bodyPr wrap="square" lIns="0" tIns="0" rIns="0" bIns="0" rtlCol="0" anchor="ctr"/>
           <a:lstStyle/>
           <a:p>
-            <a:pPr indent="0" marL="0">
+            <a:pPr marL="0" indent="0">
               <a:buNone/>
             </a:pPr>
             <a:r>
@@ -10880,7 +11270,7 @@
           <a:bodyPr wrap="square" lIns="0" tIns="0" rIns="0" bIns="0" rtlCol="0" anchor="ctr"/>
           <a:lstStyle/>
           <a:p>
-            <a:pPr indent="0" marL="0">
+            <a:pPr marL="0" indent="0">
               <a:buNone/>
             </a:pPr>
             <a:r>
@@ -10919,7 +11309,7 @@
           <a:bodyPr wrap="square" lIns="0" tIns="0" rIns="0" bIns="0" rtlCol="0" anchor="ctr"/>
           <a:lstStyle/>
           <a:p>
-            <a:pPr indent="0" marL="0">
+            <a:pPr marL="0" indent="0">
               <a:buNone/>
             </a:pPr>
             <a:r>
@@ -10958,7 +11348,7 @@
           <a:bodyPr wrap="square" lIns="0" tIns="0" rIns="0" bIns="0" rtlCol="0" anchor="ctr"/>
           <a:lstStyle/>
           <a:p>
-            <a:pPr indent="0" marL="0">
+            <a:pPr marL="0" indent="0">
               <a:buNone/>
             </a:pPr>
             <a:r>
@@ -10995,13 +11385,20 @@
           </a:solidFill>
           <a:ln/>
           <a:effectLst>
-            <a:outerShdw sx="100000" sy="100000" kx="0" ky="0" algn="bl" rotWithShape="0" blurRad="101600" dist="38100" dir="8100000">
+            <a:outerShdw blurRad="101600" dist="38100" dir="8100000" algn="bl" rotWithShape="0">
               <a:srgbClr val="000000">
                 <a:alpha val="10000"/>
               </a:srgbClr>
             </a:outerShdw>
           </a:effectLst>
         </p:spPr>
+        <p:txBody>
+          <a:bodyPr/>
+          <a:lstStyle/>
+          <a:p>
+            <a:endParaRPr lang="es-AR"/>
+          </a:p>
+        </p:txBody>
       </p:sp>
       <p:sp>
         <p:nvSpPr>
@@ -11022,6 +11419,13 @@
           </a:solidFill>
           <a:ln/>
         </p:spPr>
+        <p:txBody>
+          <a:bodyPr/>
+          <a:lstStyle/>
+          <a:p>
+            <a:endParaRPr lang="es-AR"/>
+          </a:p>
+        </p:txBody>
       </p:sp>
       <p:sp>
         <p:nvSpPr>
@@ -11044,7 +11448,7 @@
           <a:bodyPr wrap="square" lIns="0" tIns="0" rIns="0" bIns="0" rtlCol="0" anchor="ctr"/>
           <a:lstStyle/>
           <a:p>
-            <a:pPr indent="0" marL="0">
+            <a:pPr marL="0" indent="0">
               <a:buNone/>
             </a:pPr>
             <a:r>
@@ -11083,7 +11487,7 @@
           <a:bodyPr wrap="square" lIns="0" tIns="0" rIns="0" bIns="0" rtlCol="0" anchor="ctr"/>
           <a:lstStyle/>
           <a:p>
-            <a:pPr indent="0" marL="0">
+            <a:pPr marL="0" indent="0">
               <a:buNone/>
             </a:pPr>
             <a:r>
@@ -11122,7 +11526,7 @@
           <a:bodyPr wrap="square" lIns="0" tIns="0" rIns="0" bIns="0" rtlCol="0" anchor="ctr"/>
           <a:lstStyle/>
           <a:p>
-            <a:pPr indent="0" marL="0">
+            <a:pPr marL="0" indent="0">
               <a:buNone/>
             </a:pPr>
             <a:r>
@@ -11161,7 +11565,7 @@
           <a:bodyPr wrap="square" lIns="0" tIns="0" rIns="0" bIns="0" rtlCol="0" anchor="ctr"/>
           <a:lstStyle/>
           <a:p>
-            <a:pPr indent="0" marL="0">
+            <a:pPr marL="0" indent="0">
               <a:buNone/>
             </a:pPr>
             <a:r>
@@ -11200,7 +11604,7 @@
           <a:bodyPr wrap="square" lIns="0" tIns="0" rIns="0" bIns="0" rtlCol="0" anchor="ctr"/>
           <a:lstStyle/>
           <a:p>
-            <a:pPr indent="0" marL="0">
+            <a:pPr marL="0" indent="0">
               <a:buNone/>
             </a:pPr>
             <a:r>
@@ -11237,6 +11641,13 @@
           </a:solidFill>
           <a:ln/>
         </p:spPr>
+        <p:txBody>
+          <a:bodyPr/>
+          <a:lstStyle/>
+          <a:p>
+            <a:endParaRPr lang="es-AR"/>
+          </a:p>
+        </p:txBody>
       </p:sp>
       <p:sp>
         <p:nvSpPr>
@@ -11257,6 +11668,13 @@
           </a:solidFill>
           <a:ln/>
         </p:spPr>
+        <p:txBody>
+          <a:bodyPr/>
+          <a:lstStyle/>
+          <a:p>
+            <a:endParaRPr lang="es-AR"/>
+          </a:p>
+        </p:txBody>
       </p:sp>
       <p:sp>
         <p:nvSpPr>
@@ -11279,7 +11697,7 @@
           <a:bodyPr wrap="square" lIns="0" tIns="0" rIns="0" bIns="0" rtlCol="0" anchor="ctr"/>
           <a:lstStyle/>
           <a:p>
-            <a:pPr indent="0" marL="0">
+            <a:pPr marL="0" indent="0">
               <a:buNone/>
             </a:pPr>
             <a:r>
@@ -11318,7 +11736,7 @@
           <a:bodyPr wrap="square" lIns="0" tIns="0" rIns="0" bIns="0" rtlCol="0" anchor="ctr"/>
           <a:lstStyle/>
           <a:p>
-            <a:pPr algn="r" indent="0" marL="0">
+            <a:pPr marL="0" indent="0" algn="r">
               <a:buNone/>
             </a:pPr>
             <a:r>
@@ -11352,6 +11770,7 @@
         <a:solidFill>
           <a:srgbClr val="F0F9FF"/>
         </a:solidFill>
+        <a:effectLst/>
       </p:bgPr>
     </p:bg>
     <p:spTree>
@@ -11387,6 +11806,13 @@
           </a:solidFill>
           <a:ln/>
         </p:spPr>
+        <p:txBody>
+          <a:bodyPr/>
+          <a:lstStyle/>
+          <a:p>
+            <a:endParaRPr lang="es-AR"/>
+          </a:p>
+        </p:txBody>
       </p:sp>
       <p:sp>
         <p:nvSpPr>
@@ -11409,7 +11835,7 @@
           <a:bodyPr wrap="square" lIns="0" tIns="0" rIns="0" bIns="0" rtlCol="0" anchor="ctr"/>
           <a:lstStyle/>
           <a:p>
-            <a:pPr indent="0" marL="0">
+            <a:pPr marL="0" indent="0">
               <a:buNone/>
             </a:pPr>
             <a:r>
@@ -11446,13 +11872,20 @@
           </a:solidFill>
           <a:ln/>
           <a:effectLst>
-            <a:outerShdw sx="100000" sy="100000" kx="0" ky="0" algn="bl" rotWithShape="0" blurRad="101600" dist="38100" dir="8100000">
+            <a:outerShdw blurRad="101600" dist="38100" dir="8100000" algn="bl" rotWithShape="0">
               <a:srgbClr val="000000">
                 <a:alpha val="10000"/>
               </a:srgbClr>
             </a:outerShdw>
           </a:effectLst>
         </p:spPr>
+        <p:txBody>
+          <a:bodyPr/>
+          <a:lstStyle/>
+          <a:p>
+            <a:endParaRPr lang="es-AR"/>
+          </a:p>
+        </p:txBody>
       </p:sp>
       <p:sp>
         <p:nvSpPr>
@@ -11473,17 +11906,24 @@
           </a:solidFill>
           <a:ln/>
         </p:spPr>
+        <p:txBody>
+          <a:bodyPr/>
+          <a:lstStyle/>
+          <a:p>
+            <a:endParaRPr lang="es-AR"/>
+          </a:p>
+        </p:txBody>
       </p:sp>
       <p:pic>
         <p:nvPicPr>
-          <p:cNvPr id="6" name="Image 0" descr="preencoded.png">    </p:cNvPr>
+          <p:cNvPr id="6" name="Image 0" descr="preencoded.png"/>
           <p:cNvPicPr>
             <a:picLocks noChangeAspect="1"/>
           </p:cNvPicPr>
           <p:nvPr/>
         </p:nvPicPr>
         <p:blipFill>
-          <a:blip r:embed="rId1"/>
+          <a:blip r:embed="rId3"/>
           <a:stretch>
             <a:fillRect/>
           </a:stretch>
@@ -11519,7 +11959,7 @@
           <a:bodyPr wrap="square" lIns="0" tIns="0" rIns="0" bIns="0" rtlCol="0" anchor="ctr"/>
           <a:lstStyle/>
           <a:p>
-            <a:pPr indent="0" marL="0">
+            <a:pPr marL="0" indent="0">
               <a:buNone/>
             </a:pPr>
             <a:r>
@@ -11556,6 +11996,13 @@
           </a:solidFill>
           <a:ln/>
         </p:spPr>
+        <p:txBody>
+          <a:bodyPr/>
+          <a:lstStyle/>
+          <a:p>
+            <a:endParaRPr lang="es-AR"/>
+          </a:p>
+        </p:txBody>
       </p:sp>
       <p:sp>
         <p:nvSpPr>
@@ -11578,7 +12025,7 @@
           <a:bodyPr wrap="square" lIns="0" tIns="0" rIns="0" bIns="0" rtlCol="0" anchor="ctr"/>
           <a:lstStyle/>
           <a:p>
-            <a:pPr algn="ctr" indent="0" marL="0">
+            <a:pPr marL="0" indent="0" algn="ctr">
               <a:buNone/>
             </a:pPr>
             <a:r>
@@ -11617,7 +12064,7 @@
           <a:bodyPr wrap="square" lIns="0" tIns="0" rIns="0" bIns="0" rtlCol="0" anchor="ctr"/>
           <a:lstStyle/>
           <a:p>
-            <a:pPr indent="0" marL="0">
+            <a:pPr marL="0" indent="0">
               <a:buNone/>
             </a:pPr>
             <a:r>
@@ -11654,6 +12101,13 @@
           </a:solidFill>
           <a:ln/>
         </p:spPr>
+        <p:txBody>
+          <a:bodyPr/>
+          <a:lstStyle/>
+          <a:p>
+            <a:endParaRPr lang="es-AR"/>
+          </a:p>
+        </p:txBody>
       </p:sp>
       <p:sp>
         <p:nvSpPr>
@@ -11676,7 +12130,7 @@
           <a:bodyPr wrap="square" lIns="0" tIns="0" rIns="0" bIns="0" rtlCol="0" anchor="ctr"/>
           <a:lstStyle/>
           <a:p>
-            <a:pPr algn="ctr" indent="0" marL="0">
+            <a:pPr marL="0" indent="0" algn="ctr">
               <a:buNone/>
             </a:pPr>
             <a:r>
@@ -11715,7 +12169,7 @@
           <a:bodyPr wrap="square" lIns="0" tIns="0" rIns="0" bIns="0" rtlCol="0" anchor="ctr"/>
           <a:lstStyle/>
           <a:p>
-            <a:pPr indent="0" marL="0">
+            <a:pPr marL="0" indent="0">
               <a:buNone/>
             </a:pPr>
             <a:r>
@@ -11752,6 +12206,13 @@
           </a:solidFill>
           <a:ln/>
         </p:spPr>
+        <p:txBody>
+          <a:bodyPr/>
+          <a:lstStyle/>
+          <a:p>
+            <a:endParaRPr lang="es-AR"/>
+          </a:p>
+        </p:txBody>
       </p:sp>
       <p:sp>
         <p:nvSpPr>
@@ -11774,7 +12235,7 @@
           <a:bodyPr wrap="square" lIns="0" tIns="0" rIns="0" bIns="0" rtlCol="0" anchor="ctr"/>
           <a:lstStyle/>
           <a:p>
-            <a:pPr algn="ctr" indent="0" marL="0">
+            <a:pPr marL="0" indent="0" algn="ctr">
               <a:buNone/>
             </a:pPr>
             <a:r>
@@ -11813,7 +12274,7 @@
           <a:bodyPr wrap="square" lIns="0" tIns="0" rIns="0" bIns="0" rtlCol="0" anchor="ctr"/>
           <a:lstStyle/>
           <a:p>
-            <a:pPr indent="0" marL="0">
+            <a:pPr marL="0" indent="0">
               <a:buNone/>
             </a:pPr>
             <a:r>
@@ -11850,6 +12311,13 @@
           </a:solidFill>
           <a:ln/>
         </p:spPr>
+        <p:txBody>
+          <a:bodyPr/>
+          <a:lstStyle/>
+          <a:p>
+            <a:endParaRPr lang="es-AR"/>
+          </a:p>
+        </p:txBody>
       </p:sp>
       <p:sp>
         <p:nvSpPr>
@@ -11872,7 +12340,7 @@
           <a:bodyPr wrap="square" lIns="0" tIns="0" rIns="0" bIns="0" rtlCol="0" anchor="ctr"/>
           <a:lstStyle/>
           <a:p>
-            <a:pPr algn="ctr" indent="0" marL="0">
+            <a:pPr marL="0" indent="0" algn="ctr">
               <a:buNone/>
             </a:pPr>
             <a:r>
@@ -11911,7 +12379,7 @@
           <a:bodyPr wrap="square" lIns="0" tIns="0" rIns="0" bIns="0" rtlCol="0" anchor="ctr"/>
           <a:lstStyle/>
           <a:p>
-            <a:pPr indent="0" marL="0">
+            <a:pPr marL="0" indent="0">
               <a:buNone/>
             </a:pPr>
             <a:r>
@@ -11948,13 +12416,20 @@
           </a:solidFill>
           <a:ln/>
           <a:effectLst>
-            <a:outerShdw sx="100000" sy="100000" kx="0" ky="0" algn="bl" rotWithShape="0" blurRad="101600" dist="38100" dir="8100000">
+            <a:outerShdw blurRad="101600" dist="38100" dir="8100000" algn="bl" rotWithShape="0">
               <a:srgbClr val="000000">
                 <a:alpha val="10000"/>
               </a:srgbClr>
             </a:outerShdw>
           </a:effectLst>
         </p:spPr>
+        <p:txBody>
+          <a:bodyPr/>
+          <a:lstStyle/>
+          <a:p>
+            <a:endParaRPr lang="es-AR"/>
+          </a:p>
+        </p:txBody>
       </p:sp>
       <p:sp>
         <p:nvSpPr>
@@ -11975,17 +12450,24 @@
           </a:solidFill>
           <a:ln/>
         </p:spPr>
+        <p:txBody>
+          <a:bodyPr/>
+          <a:lstStyle/>
+          <a:p>
+            <a:endParaRPr lang="es-AR"/>
+          </a:p>
+        </p:txBody>
       </p:sp>
       <p:pic>
         <p:nvPicPr>
-          <p:cNvPr id="22" name="Image 1" descr="preencoded.png">    </p:cNvPr>
+          <p:cNvPr id="22" name="Image 1" descr="preencoded.png"/>
           <p:cNvPicPr>
             <a:picLocks noChangeAspect="1"/>
           </p:cNvPicPr>
           <p:nvPr/>
         </p:nvPicPr>
         <p:blipFill>
-          <a:blip r:embed="rId2"/>
+          <a:blip r:embed="rId4"/>
           <a:stretch>
             <a:fillRect/>
           </a:stretch>
@@ -12021,7 +12503,7 @@
           <a:bodyPr wrap="square" lIns="0" tIns="0" rIns="0" bIns="0" rtlCol="0" anchor="ctr"/>
           <a:lstStyle/>
           <a:p>
-            <a:pPr indent="0" marL="0">
+            <a:pPr marL="0" indent="0">
               <a:buNone/>
             </a:pPr>
             <a:r>
@@ -12058,6 +12540,13 @@
           </a:solidFill>
           <a:ln/>
         </p:spPr>
+        <p:txBody>
+          <a:bodyPr/>
+          <a:lstStyle/>
+          <a:p>
+            <a:endParaRPr lang="es-AR"/>
+          </a:p>
+        </p:txBody>
       </p:sp>
       <p:sp>
         <p:nvSpPr>
@@ -12080,7 +12569,7 @@
           <a:bodyPr wrap="square" lIns="0" tIns="0" rIns="0" bIns="0" rtlCol="0" anchor="ctr"/>
           <a:lstStyle/>
           <a:p>
-            <a:pPr algn="ctr" indent="0" marL="0">
+            <a:pPr marL="0" indent="0" algn="ctr">
               <a:buNone/>
             </a:pPr>
             <a:r>
@@ -12119,7 +12608,7 @@
           <a:bodyPr wrap="square" lIns="0" tIns="0" rIns="0" bIns="0" rtlCol="0" anchor="ctr"/>
           <a:lstStyle/>
           <a:p>
-            <a:pPr indent="0" marL="0">
+            <a:pPr marL="0" indent="0">
               <a:buNone/>
             </a:pPr>
             <a:r>
@@ -12156,6 +12645,13 @@
           </a:solidFill>
           <a:ln/>
         </p:spPr>
+        <p:txBody>
+          <a:bodyPr/>
+          <a:lstStyle/>
+          <a:p>
+            <a:endParaRPr lang="es-AR"/>
+          </a:p>
+        </p:txBody>
       </p:sp>
       <p:sp>
         <p:nvSpPr>
@@ -12178,7 +12674,7 @@
           <a:bodyPr wrap="square" lIns="0" tIns="0" rIns="0" bIns="0" rtlCol="0" anchor="ctr"/>
           <a:lstStyle/>
           <a:p>
-            <a:pPr algn="ctr" indent="0" marL="0">
+            <a:pPr marL="0" indent="0" algn="ctr">
               <a:buNone/>
             </a:pPr>
             <a:r>
@@ -12217,7 +12713,7 @@
           <a:bodyPr wrap="square" lIns="0" tIns="0" rIns="0" bIns="0" rtlCol="0" anchor="ctr"/>
           <a:lstStyle/>
           <a:p>
-            <a:pPr indent="0" marL="0">
+            <a:pPr marL="0" indent="0">
               <a:buNone/>
             </a:pPr>
             <a:r>
@@ -12254,6 +12750,13 @@
           </a:solidFill>
           <a:ln/>
         </p:spPr>
+        <p:txBody>
+          <a:bodyPr/>
+          <a:lstStyle/>
+          <a:p>
+            <a:endParaRPr lang="es-AR"/>
+          </a:p>
+        </p:txBody>
       </p:sp>
       <p:sp>
         <p:nvSpPr>
@@ -12276,7 +12779,7 @@
           <a:bodyPr wrap="square" lIns="0" tIns="0" rIns="0" bIns="0" rtlCol="0" anchor="ctr"/>
           <a:lstStyle/>
           <a:p>
-            <a:pPr algn="ctr" indent="0" marL="0">
+            <a:pPr marL="0" indent="0" algn="ctr">
               <a:buNone/>
             </a:pPr>
             <a:r>
@@ -12315,7 +12818,7 @@
           <a:bodyPr wrap="square" lIns="0" tIns="0" rIns="0" bIns="0" rtlCol="0" anchor="ctr"/>
           <a:lstStyle/>
           <a:p>
-            <a:pPr indent="0" marL="0">
+            <a:pPr marL="0" indent="0">
               <a:buNone/>
             </a:pPr>
             <a:r>
@@ -12352,6 +12855,13 @@
           </a:solidFill>
           <a:ln/>
         </p:spPr>
+        <p:txBody>
+          <a:bodyPr/>
+          <a:lstStyle/>
+          <a:p>
+            <a:endParaRPr lang="es-AR"/>
+          </a:p>
+        </p:txBody>
       </p:sp>
       <p:sp>
         <p:nvSpPr>
@@ -12374,7 +12884,7 @@
           <a:bodyPr wrap="square" lIns="0" tIns="0" rIns="0" bIns="0" rtlCol="0" anchor="ctr"/>
           <a:lstStyle/>
           <a:p>
-            <a:pPr algn="ctr" indent="0" marL="0">
+            <a:pPr marL="0" indent="0" algn="ctr">
               <a:buNone/>
             </a:pPr>
             <a:r>
@@ -12413,7 +12923,7 @@
           <a:bodyPr wrap="square" lIns="0" tIns="0" rIns="0" bIns="0" rtlCol="0" anchor="ctr"/>
           <a:lstStyle/>
           <a:p>
-            <a:pPr indent="0" marL="0">
+            <a:pPr marL="0" indent="0">
               <a:buNone/>
             </a:pPr>
             <a:r>
@@ -12450,6 +12960,13 @@
           </a:solidFill>
           <a:ln/>
         </p:spPr>
+        <p:txBody>
+          <a:bodyPr/>
+          <a:lstStyle/>
+          <a:p>
+            <a:endParaRPr lang="es-AR"/>
+          </a:p>
+        </p:txBody>
       </p:sp>
       <p:sp>
         <p:nvSpPr>
@@ -12472,7 +12989,7 @@
           <a:bodyPr wrap="square" lIns="0" tIns="0" rIns="0" bIns="0" rtlCol="0" anchor="ctr"/>
           <a:lstStyle/>
           <a:p>
-            <a:pPr indent="0" marL="0">
+            <a:pPr marL="0" indent="0">
               <a:buNone/>
             </a:pPr>
             <a:r>
@@ -12511,7 +13028,7 @@
           <a:bodyPr wrap="square" lIns="0" tIns="0" rIns="0" bIns="0" rtlCol="0" anchor="ctr"/>
           <a:lstStyle/>
           <a:p>
-            <a:pPr algn="r" indent="0" marL="0">
+            <a:pPr marL="0" indent="0" algn="r">
               <a:buNone/>
             </a:pPr>
             <a:r>
@@ -12545,6 +13062,7 @@
         <a:solidFill>
           <a:srgbClr val="F0F9FF"/>
         </a:solidFill>
+        <a:effectLst/>
       </p:bgPr>
     </p:bg>
     <p:spTree>
@@ -12580,6 +13098,13 @@
           </a:solidFill>
           <a:ln/>
         </p:spPr>
+        <p:txBody>
+          <a:bodyPr/>
+          <a:lstStyle/>
+          <a:p>
+            <a:endParaRPr lang="es-AR"/>
+          </a:p>
+        </p:txBody>
       </p:sp>
       <p:sp>
         <p:nvSpPr>
@@ -12602,7 +13127,7 @@
           <a:bodyPr wrap="square" lIns="0" tIns="0" rIns="0" bIns="0" rtlCol="0" anchor="ctr"/>
           <a:lstStyle/>
           <a:p>
-            <a:pPr indent="0" marL="0">
+            <a:pPr marL="0" indent="0">
               <a:buNone/>
             </a:pPr>
             <a:r>
@@ -12641,7 +13166,7 @@
           <a:bodyPr wrap="square" lIns="0" tIns="0" rIns="0" bIns="0" rtlCol="0" anchor="ctr"/>
           <a:lstStyle/>
           <a:p>
-            <a:pPr indent="0" marL="0">
+            <a:pPr marL="0" indent="0">
               <a:buNone/>
             </a:pPr>
             <a:r>
@@ -12678,13 +13203,20 @@
           </a:solidFill>
           <a:ln/>
           <a:effectLst>
-            <a:outerShdw sx="100000" sy="100000" kx="0" ky="0" algn="bl" rotWithShape="0" blurRad="101600" dist="38100" dir="8100000">
+            <a:outerShdw blurRad="101600" dist="38100" dir="8100000" algn="bl" rotWithShape="0">
               <a:srgbClr val="000000">
                 <a:alpha val="10000"/>
               </a:srgbClr>
             </a:outerShdw>
           </a:effectLst>
         </p:spPr>
+        <p:txBody>
+          <a:bodyPr/>
+          <a:lstStyle/>
+          <a:p>
+            <a:endParaRPr lang="es-AR"/>
+          </a:p>
+        </p:txBody>
       </p:sp>
       <p:sp>
         <p:nvSpPr>
@@ -12705,360 +13237,17 @@
           </a:solidFill>
           <a:ln/>
         </p:spPr>
+        <p:txBody>
+          <a:bodyPr/>
+          <a:lstStyle/>
+          <a:p>
+            <a:endParaRPr lang="es-AR"/>
+          </a:p>
+        </p:txBody>
       </p:sp>
       <p:pic>
         <p:nvPicPr>
-          <p:cNvPr id="7" name="Image 0" descr="preencoded.png">    </p:cNvPr>
-          <p:cNvPicPr>
-            <a:picLocks noChangeAspect="1"/>
-          </p:cNvPicPr>
-          <p:nvPr/>
-        </p:nvPicPr>
-        <p:blipFill>
-          <a:blip r:embed="rId1"/>
-          <a:stretch>
-            <a:fillRect/>
-          </a:stretch>
-        </p:blipFill>
-        <p:spPr>
-          <a:xfrm>
-            <a:off x="960120" y="1572768"/>
-            <a:ext cx="365760" cy="365760"/>
-          </a:xfrm>
-          <a:prstGeom prst="rect">
-            <a:avLst/>
-          </a:prstGeom>
-        </p:spPr>
-      </p:pic>
-      <p:sp>
-        <p:nvSpPr>
-          <p:cNvPr id="8" name="Text 5"/>
-          <p:cNvSpPr/>
-          <p:nvPr/>
-        </p:nvSpPr>
-        <p:spPr>
-          <a:xfrm>
-            <a:off x="1463040" y="1508760"/>
-            <a:ext cx="2743200" cy="320040"/>
-          </a:xfrm>
-          <a:prstGeom prst="rect">
-            <a:avLst/>
-          </a:prstGeom>
-          <a:noFill/>
-          <a:ln/>
-        </p:spPr>
-        <p:txBody>
-          <a:bodyPr wrap="square" lIns="0" tIns="0" rIns="0" bIns="0" rtlCol="0" anchor="ctr"/>
-          <a:lstStyle/>
-          <a:p>
-            <a:pPr indent="0" marL="0">
-              <a:buNone/>
-            </a:pPr>
-            <a:r>
-              <a:rPr lang="en-US" sz="1500" b="1" dirty="0">
-                <a:solidFill>
-                  <a:srgbClr val="1B2A4A"/>
-                </a:solidFill>
-                <a:latin typeface="Arial" pitchFamily="34" charset="0"/>
-                <a:ea typeface="Arial" pitchFamily="34" charset="-122"/>
-                <a:cs typeface="Arial" pitchFamily="34" charset="-120"/>
-              </a:rPr>
-              <a:t>Google Colab con R</a:t>
-            </a:r>
-            <a:endParaRPr lang="en-US" sz="1500" dirty="0"/>
-          </a:p>
-        </p:txBody>
-      </p:sp>
-      <p:sp>
-        <p:nvSpPr>
-          <p:cNvPr id="9" name="Text 6"/>
-          <p:cNvSpPr/>
-          <p:nvPr/>
-        </p:nvSpPr>
-        <p:spPr>
-          <a:xfrm>
-            <a:off x="1463040" y="1874520"/>
-            <a:ext cx="6766560" cy="914400"/>
-          </a:xfrm>
-          <a:prstGeom prst="rect">
-            <a:avLst/>
-          </a:prstGeom>
-          <a:noFill/>
-          <a:ln/>
-        </p:spPr>
-        <p:txBody>
-          <a:bodyPr wrap="square" lIns="0" tIns="0" rIns="0" bIns="0" rtlCol="0" anchor="t"/>
-          <a:lstStyle/>
-          <a:p>
-            <a:pPr indent="0" marL="0">
-              <a:lnSpc>
-                <a:spcPct val="135000"/>
-              </a:lnSpc>
-              <a:buNone/>
-            </a:pPr>
-            <a:r>
-              <a:rPr lang="en-US" sz="1100" dirty="0">
-                <a:solidFill>
-                  <a:srgbClr val="334155"/>
-                </a:solidFill>
-                <a:latin typeface="Arial" pitchFamily="34" charset="0"/>
-                <a:ea typeface="Arial" pitchFamily="34" charset="-122"/>
-                <a:cs typeface="Arial" pitchFamily="34" charset="-120"/>
-              </a:rPr>
-              <a:t>1.  Ir a  colab.research.google.com</a:t>
-            </a:r>
-            <a:endParaRPr lang="en-US" sz="1100" dirty="0"/>
-          </a:p>
-          <a:p>
-            <a:pPr indent="0" marL="0">
-              <a:lnSpc>
-                <a:spcPct val="135000"/>
-              </a:lnSpc>
-              <a:buNone/>
-            </a:pPr>
-            <a:r>
-              <a:rPr lang="en-US" sz="1100" dirty="0">
-                <a:solidFill>
-                  <a:srgbClr val="334155"/>
-                </a:solidFill>
-                <a:latin typeface="Arial" pitchFamily="34" charset="0"/>
-                <a:ea typeface="Arial" pitchFamily="34" charset="-122"/>
-                <a:cs typeface="Arial" pitchFamily="34" charset="-120"/>
-              </a:rPr>
-              <a:t>2.  Crear un nuevo notebook</a:t>
-            </a:r>
-            <a:endParaRPr lang="en-US" sz="1100" dirty="0"/>
-          </a:p>
-          <a:p>
-            <a:pPr indent="0" marL="0">
-              <a:lnSpc>
-                <a:spcPct val="135000"/>
-              </a:lnSpc>
-              <a:buNone/>
-            </a:pPr>
-            <a:r>
-              <a:rPr lang="en-US" sz="1100" dirty="0">
-                <a:solidFill>
-                  <a:srgbClr val="334155"/>
-                </a:solidFill>
-                <a:latin typeface="Arial" pitchFamily="34" charset="0"/>
-                <a:ea typeface="Arial" pitchFamily="34" charset="-122"/>
-                <a:cs typeface="Arial" pitchFamily="34" charset="-120"/>
-              </a:rPr>
-              <a:t>3.  Cambiar el runtime a R:  Runtime &gt; Change runtime type &gt; R</a:t>
-            </a:r>
-            <a:endParaRPr lang="en-US" sz="1100" dirty="0"/>
-          </a:p>
-          <a:p>
-            <a:pPr indent="0" marL="0">
-              <a:lnSpc>
-                <a:spcPct val="135000"/>
-              </a:lnSpc>
-              <a:buNone/>
-            </a:pPr>
-            <a:r>
-              <a:rPr lang="en-US" sz="1100" dirty="0">
-                <a:solidFill>
-                  <a:srgbClr val="334155"/>
-                </a:solidFill>
-                <a:latin typeface="Arial" pitchFamily="34" charset="0"/>
-                <a:ea typeface="Arial" pitchFamily="34" charset="-122"/>
-                <a:cs typeface="Arial" pitchFamily="34" charset="-120"/>
-              </a:rPr>
-              <a:t>4.  Escribir código en las celdas y ejecutar con Shift + Enter</a:t>
-            </a:r>
-            <a:endParaRPr lang="en-US" sz="1100" dirty="0"/>
-          </a:p>
-        </p:txBody>
-      </p:sp>
-      <p:sp>
-        <p:nvSpPr>
-          <p:cNvPr id="10" name="Shape 7"/>
-          <p:cNvSpPr/>
-          <p:nvPr/>
-        </p:nvSpPr>
-        <p:spPr>
-          <a:xfrm>
-            <a:off x="640080" y="3154680"/>
-            <a:ext cx="3749040" cy="1097280"/>
-          </a:xfrm>
-          <a:prstGeom prst="rect">
-            <a:avLst/>
-          </a:prstGeom>
-          <a:solidFill>
-            <a:srgbClr val="D1FAE5"/>
-          </a:solidFill>
-          <a:ln/>
-        </p:spPr>
-      </p:sp>
-      <p:pic>
-        <p:nvPicPr>
-          <p:cNvPr id="11" name="Image 1" descr="preencoded.png">    </p:cNvPr>
-          <p:cNvPicPr>
-            <a:picLocks noChangeAspect="1"/>
-          </p:cNvPicPr>
-          <p:nvPr/>
-        </p:nvPicPr>
-        <p:blipFill>
-          <a:blip r:embed="rId2"/>
-          <a:stretch>
-            <a:fillRect/>
-          </a:stretch>
-        </p:blipFill>
-        <p:spPr>
-          <a:xfrm>
-            <a:off x="914400" y="3291840"/>
-            <a:ext cx="274320" cy="274320"/>
-          </a:xfrm>
-          <a:prstGeom prst="rect">
-            <a:avLst/>
-          </a:prstGeom>
-        </p:spPr>
-      </p:pic>
-      <p:sp>
-        <p:nvSpPr>
-          <p:cNvPr id="12" name="Text 8"/>
-          <p:cNvSpPr/>
-          <p:nvPr/>
-        </p:nvSpPr>
-        <p:spPr>
-          <a:xfrm>
-            <a:off x="1280160" y="3246120"/>
-            <a:ext cx="1828800" cy="320040"/>
-          </a:xfrm>
-          <a:prstGeom prst="rect">
-            <a:avLst/>
-          </a:prstGeom>
-          <a:noFill/>
-          <a:ln/>
-        </p:spPr>
-        <p:txBody>
-          <a:bodyPr wrap="square" lIns="0" tIns="0" rIns="0" bIns="0" rtlCol="0" anchor="ctr"/>
-          <a:lstStyle/>
-          <a:p>
-            <a:pPr indent="0" marL="0">
-              <a:buNone/>
-            </a:pPr>
-            <a:r>
-              <a:rPr lang="en-US" sz="1300" b="1" dirty="0">
-                <a:solidFill>
-                  <a:srgbClr val="065F46"/>
-                </a:solidFill>
-                <a:latin typeface="Arial" pitchFamily="34" charset="0"/>
-                <a:ea typeface="Arial" pitchFamily="34" charset="-122"/>
-                <a:cs typeface="Arial" pitchFamily="34" charset="-120"/>
-              </a:rPr>
-              <a:t>Ventajas</a:t>
-            </a:r>
-            <a:endParaRPr lang="en-US" sz="1300" dirty="0"/>
-          </a:p>
-        </p:txBody>
-      </p:sp>
-      <p:sp>
-        <p:nvSpPr>
-          <p:cNvPr id="13" name="Text 9"/>
-          <p:cNvSpPr/>
-          <p:nvPr/>
-        </p:nvSpPr>
-        <p:spPr>
-          <a:xfrm>
-            <a:off x="914400" y="3611880"/>
-            <a:ext cx="3200400" cy="594360"/>
-          </a:xfrm>
-          <a:prstGeom prst="rect">
-            <a:avLst/>
-          </a:prstGeom>
-          <a:noFill/>
-          <a:ln/>
-        </p:spPr>
-        <p:txBody>
-          <a:bodyPr wrap="square" lIns="0" tIns="0" rIns="0" bIns="0" rtlCol="0" anchor="t"/>
-          <a:lstStyle/>
-          <a:p>
-            <a:pPr indent="0" marL="0">
-              <a:lnSpc>
-                <a:spcPct val="130000"/>
-              </a:lnSpc>
-              <a:buNone/>
-            </a:pPr>
-            <a:r>
-              <a:rPr lang="en-US" sz="1050" dirty="0">
-                <a:solidFill>
-                  <a:srgbClr val="065F46"/>
-                </a:solidFill>
-                <a:latin typeface="Arial" pitchFamily="34" charset="0"/>
-                <a:ea typeface="Arial" pitchFamily="34" charset="-122"/>
-                <a:cs typeface="Arial" pitchFamily="34" charset="-120"/>
-              </a:rPr>
-              <a:t>No requiere instalación</a:t>
-            </a:r>
-            <a:endParaRPr lang="en-US" sz="1050" dirty="0"/>
-          </a:p>
-          <a:p>
-            <a:pPr indent="0" marL="0">
-              <a:lnSpc>
-                <a:spcPct val="130000"/>
-              </a:lnSpc>
-              <a:buNone/>
-            </a:pPr>
-            <a:r>
-              <a:rPr lang="en-US" sz="1050" dirty="0">
-                <a:solidFill>
-                  <a:srgbClr val="065F46"/>
-                </a:solidFill>
-                <a:latin typeface="Arial" pitchFamily="34" charset="0"/>
-                <a:ea typeface="Arial" pitchFamily="34" charset="-122"/>
-                <a:cs typeface="Arial" pitchFamily="34" charset="-120"/>
-              </a:rPr>
-              <a:t>Funciona desde cualquier navegador</a:t>
-            </a:r>
-            <a:endParaRPr lang="en-US" sz="1050" dirty="0"/>
-          </a:p>
-          <a:p>
-            <a:pPr indent="0" marL="0">
-              <a:lnSpc>
-                <a:spcPct val="130000"/>
-              </a:lnSpc>
-              <a:buNone/>
-            </a:pPr>
-            <a:r>
-              <a:rPr lang="en-US" sz="1050" dirty="0">
-                <a:solidFill>
-                  <a:srgbClr val="065F46"/>
-                </a:solidFill>
-                <a:latin typeface="Arial" pitchFamily="34" charset="0"/>
-                <a:ea typeface="Arial" pitchFamily="34" charset="-122"/>
-                <a:cs typeface="Arial" pitchFamily="34" charset="-120"/>
-              </a:rPr>
-              <a:t>Acceso desde cualquier dispositivo</a:t>
-            </a:r>
-            <a:endParaRPr lang="en-US" sz="1050" dirty="0"/>
-          </a:p>
-        </p:txBody>
-      </p:sp>
-      <p:sp>
-        <p:nvSpPr>
-          <p:cNvPr id="14" name="Shape 10"/>
-          <p:cNvSpPr/>
-          <p:nvPr/>
-        </p:nvSpPr>
-        <p:spPr>
-          <a:xfrm>
-            <a:off x="4754880" y="3154680"/>
-            <a:ext cx="3749040" cy="1097280"/>
-          </a:xfrm>
-          <a:prstGeom prst="rect">
-            <a:avLst/>
-          </a:prstGeom>
-          <a:solidFill>
-            <a:srgbClr val="FEE2E2"/>
-          </a:solidFill>
-          <a:ln/>
-        </p:spPr>
-      </p:sp>
-      <p:pic>
-        <p:nvPicPr>
-          <p:cNvPr id="15" name="Image 2" descr="preencoded.png">    </p:cNvPr>
+          <p:cNvPr id="7" name="Image 0" descr="preencoded.png"/>
           <p:cNvPicPr>
             <a:picLocks noChangeAspect="1"/>
           </p:cNvPicPr>
@@ -13072,7 +13261,199 @@
         </p:blipFill>
         <p:spPr>
           <a:xfrm>
-            <a:off x="5029200" y="3291840"/>
+            <a:off x="960120" y="1572768"/>
+            <a:ext cx="365760" cy="365760"/>
+          </a:xfrm>
+          <a:prstGeom prst="rect">
+            <a:avLst/>
+          </a:prstGeom>
+        </p:spPr>
+      </p:pic>
+      <p:sp>
+        <p:nvSpPr>
+          <p:cNvPr id="8" name="Text 5"/>
+          <p:cNvSpPr/>
+          <p:nvPr/>
+        </p:nvSpPr>
+        <p:spPr>
+          <a:xfrm>
+            <a:off x="1463040" y="1508760"/>
+            <a:ext cx="2743200" cy="320040"/>
+          </a:xfrm>
+          <a:prstGeom prst="rect">
+            <a:avLst/>
+          </a:prstGeom>
+          <a:noFill/>
+          <a:ln/>
+        </p:spPr>
+        <p:txBody>
+          <a:bodyPr wrap="square" lIns="0" tIns="0" rIns="0" bIns="0" rtlCol="0" anchor="ctr"/>
+          <a:lstStyle/>
+          <a:p>
+            <a:pPr marL="0" indent="0">
+              <a:buNone/>
+            </a:pPr>
+            <a:r>
+              <a:rPr lang="en-US" sz="1500" b="1" dirty="0">
+                <a:solidFill>
+                  <a:srgbClr val="1B2A4A"/>
+                </a:solidFill>
+                <a:latin typeface="Arial" pitchFamily="34" charset="0"/>
+                <a:ea typeface="Arial" pitchFamily="34" charset="-122"/>
+                <a:cs typeface="Arial" pitchFamily="34" charset="-120"/>
+              </a:rPr>
+              <a:t>Google Colab con R</a:t>
+            </a:r>
+            <a:endParaRPr lang="en-US" sz="1500" dirty="0"/>
+          </a:p>
+        </p:txBody>
+      </p:sp>
+      <p:sp>
+        <p:nvSpPr>
+          <p:cNvPr id="9" name="Text 6"/>
+          <p:cNvSpPr/>
+          <p:nvPr/>
+        </p:nvSpPr>
+        <p:spPr>
+          <a:xfrm>
+            <a:off x="1463040" y="1874520"/>
+            <a:ext cx="6766560" cy="914400"/>
+          </a:xfrm>
+          <a:prstGeom prst="rect">
+            <a:avLst/>
+          </a:prstGeom>
+          <a:noFill/>
+          <a:ln/>
+        </p:spPr>
+        <p:txBody>
+          <a:bodyPr wrap="square" lIns="0" tIns="0" rIns="0" bIns="0" rtlCol="0" anchor="t"/>
+          <a:lstStyle/>
+          <a:p>
+            <a:pPr marL="0" indent="0">
+              <a:lnSpc>
+                <a:spcPct val="135000"/>
+              </a:lnSpc>
+              <a:buNone/>
+            </a:pPr>
+            <a:r>
+              <a:rPr lang="en-US" sz="1100" dirty="0">
+                <a:solidFill>
+                  <a:srgbClr val="334155"/>
+                </a:solidFill>
+                <a:latin typeface="Arial" pitchFamily="34" charset="0"/>
+                <a:ea typeface="Arial" pitchFamily="34" charset="-122"/>
+                <a:cs typeface="Arial" pitchFamily="34" charset="-120"/>
+              </a:rPr>
+              <a:t>1.  Ir a  colab.research.google.com</a:t>
+            </a:r>
+            <a:endParaRPr lang="en-US" sz="1100" dirty="0"/>
+          </a:p>
+          <a:p>
+            <a:pPr marL="0" indent="0">
+              <a:lnSpc>
+                <a:spcPct val="135000"/>
+              </a:lnSpc>
+              <a:buNone/>
+            </a:pPr>
+            <a:r>
+              <a:rPr lang="en-US" sz="1100" dirty="0">
+                <a:solidFill>
+                  <a:srgbClr val="334155"/>
+                </a:solidFill>
+                <a:latin typeface="Arial" pitchFamily="34" charset="0"/>
+                <a:ea typeface="Arial" pitchFamily="34" charset="-122"/>
+                <a:cs typeface="Arial" pitchFamily="34" charset="-120"/>
+              </a:rPr>
+              <a:t>2.  Crear un nuevo notebook</a:t>
+            </a:r>
+            <a:endParaRPr lang="en-US" sz="1100" dirty="0"/>
+          </a:p>
+          <a:p>
+            <a:pPr marL="0" indent="0">
+              <a:lnSpc>
+                <a:spcPct val="135000"/>
+              </a:lnSpc>
+              <a:buNone/>
+            </a:pPr>
+            <a:r>
+              <a:rPr lang="en-US" sz="1100" dirty="0">
+                <a:solidFill>
+                  <a:srgbClr val="334155"/>
+                </a:solidFill>
+                <a:latin typeface="Arial" pitchFamily="34" charset="0"/>
+                <a:ea typeface="Arial" pitchFamily="34" charset="-122"/>
+                <a:cs typeface="Arial" pitchFamily="34" charset="-120"/>
+              </a:rPr>
+              <a:t>3.  Cambiar el runtime a R:  Runtime &gt; Change runtime type &gt; R</a:t>
+            </a:r>
+            <a:endParaRPr lang="en-US" sz="1100" dirty="0"/>
+          </a:p>
+          <a:p>
+            <a:pPr marL="0" indent="0">
+              <a:lnSpc>
+                <a:spcPct val="135000"/>
+              </a:lnSpc>
+              <a:buNone/>
+            </a:pPr>
+            <a:r>
+              <a:rPr lang="en-US" sz="1100" dirty="0">
+                <a:solidFill>
+                  <a:srgbClr val="334155"/>
+                </a:solidFill>
+                <a:latin typeface="Arial" pitchFamily="34" charset="0"/>
+                <a:ea typeface="Arial" pitchFamily="34" charset="-122"/>
+                <a:cs typeface="Arial" pitchFamily="34" charset="-120"/>
+              </a:rPr>
+              <a:t>4.  Escribir código en las celdas y ejecutar con Shift + Enter</a:t>
+            </a:r>
+            <a:endParaRPr lang="en-US" sz="1100" dirty="0"/>
+          </a:p>
+        </p:txBody>
+      </p:sp>
+      <p:sp>
+        <p:nvSpPr>
+          <p:cNvPr id="10" name="Shape 7"/>
+          <p:cNvSpPr/>
+          <p:nvPr/>
+        </p:nvSpPr>
+        <p:spPr>
+          <a:xfrm>
+            <a:off x="640080" y="3154680"/>
+            <a:ext cx="3749040" cy="1097280"/>
+          </a:xfrm>
+          <a:prstGeom prst="rect">
+            <a:avLst/>
+          </a:prstGeom>
+          <a:solidFill>
+            <a:srgbClr val="D1FAE5"/>
+          </a:solidFill>
+          <a:ln/>
+        </p:spPr>
+        <p:txBody>
+          <a:bodyPr/>
+          <a:lstStyle/>
+          <a:p>
+            <a:endParaRPr lang="es-AR"/>
+          </a:p>
+        </p:txBody>
+      </p:sp>
+      <p:pic>
+        <p:nvPicPr>
+          <p:cNvPr id="11" name="Image 1" descr="preencoded.png"/>
+          <p:cNvPicPr>
+            <a:picLocks noChangeAspect="1"/>
+          </p:cNvPicPr>
+          <p:nvPr/>
+        </p:nvPicPr>
+        <p:blipFill>
+          <a:blip r:embed="rId4"/>
+          <a:stretch>
+            <a:fillRect/>
+          </a:stretch>
+        </p:blipFill>
+        <p:spPr>
+          <a:xfrm>
+            <a:off x="914400" y="3291840"/>
             <a:ext cx="274320" cy="274320"/>
           </a:xfrm>
           <a:prstGeom prst="rect">
@@ -13082,13 +13463,13 @@
       </p:pic>
       <p:sp>
         <p:nvSpPr>
-          <p:cNvPr id="16" name="Text 11"/>
-          <p:cNvSpPr/>
-          <p:nvPr/>
-        </p:nvSpPr>
-        <p:spPr>
-          <a:xfrm>
-            <a:off x="5394960" y="3246120"/>
+          <p:cNvPr id="12" name="Text 8"/>
+          <p:cNvSpPr/>
+          <p:nvPr/>
+        </p:nvSpPr>
+        <p:spPr>
+          <a:xfrm>
+            <a:off x="1280160" y="3246120"/>
             <a:ext cx="1828800" cy="320040"/>
           </a:xfrm>
           <a:prstGeom prst="rect">
@@ -13101,19 +13482,19 @@
           <a:bodyPr wrap="square" lIns="0" tIns="0" rIns="0" bIns="0" rtlCol="0" anchor="ctr"/>
           <a:lstStyle/>
           <a:p>
-            <a:pPr indent="0" marL="0">
+            <a:pPr marL="0" indent="0">
               <a:buNone/>
             </a:pPr>
             <a:r>
               <a:rPr lang="en-US" sz="1300" b="1" dirty="0">
                 <a:solidFill>
-                  <a:srgbClr val="991B1B"/>
-                </a:solidFill>
-                <a:latin typeface="Arial" pitchFamily="34" charset="0"/>
-                <a:ea typeface="Arial" pitchFamily="34" charset="-122"/>
-                <a:cs typeface="Arial" pitchFamily="34" charset="-120"/>
-              </a:rPr>
-              <a:t>Limitaciones</a:t>
+                  <a:srgbClr val="065F46"/>
+                </a:solidFill>
+                <a:latin typeface="Arial" pitchFamily="34" charset="0"/>
+                <a:ea typeface="Arial" pitchFamily="34" charset="-122"/>
+                <a:cs typeface="Arial" pitchFamily="34" charset="-120"/>
+              </a:rPr>
+              <a:t>Ventajas</a:t>
             </a:r>
             <a:endParaRPr lang="en-US" sz="1300" dirty="0"/>
           </a:p>
@@ -13121,13 +13502,13 @@
       </p:sp>
       <p:sp>
         <p:nvSpPr>
-          <p:cNvPr id="17" name="Text 12"/>
-          <p:cNvSpPr/>
-          <p:nvPr/>
-        </p:nvSpPr>
-        <p:spPr>
-          <a:xfrm>
-            <a:off x="5029200" y="3611880"/>
+          <p:cNvPr id="13" name="Text 9"/>
+          <p:cNvSpPr/>
+          <p:nvPr/>
+        </p:nvSpPr>
+        <p:spPr>
+          <a:xfrm>
+            <a:off x="914400" y="3611880"/>
             <a:ext cx="3200400" cy="594360"/>
           </a:xfrm>
           <a:prstGeom prst="rect">
@@ -13140,7 +13521,7 @@
           <a:bodyPr wrap="square" lIns="0" tIns="0" rIns="0" bIns="0" rtlCol="0" anchor="t"/>
           <a:lstStyle/>
           <a:p>
-            <a:pPr indent="0" marL="0">
+            <a:pPr marL="0" indent="0">
               <a:lnSpc>
                 <a:spcPct val="130000"/>
               </a:lnSpc>
@@ -13149,18 +13530,18 @@
             <a:r>
               <a:rPr lang="en-US" sz="1050" dirty="0">
                 <a:solidFill>
-                  <a:srgbClr val="991B1B"/>
-                </a:solidFill>
-                <a:latin typeface="Arial" pitchFamily="34" charset="0"/>
-                <a:ea typeface="Arial" pitchFamily="34" charset="-122"/>
-                <a:cs typeface="Arial" pitchFamily="34" charset="-120"/>
-              </a:rPr>
-              <a:t>No tiene los paneles de RStudio</a:t>
+                  <a:srgbClr val="065F46"/>
+                </a:solidFill>
+                <a:latin typeface="Arial" pitchFamily="34" charset="0"/>
+                <a:ea typeface="Arial" pitchFamily="34" charset="-122"/>
+                <a:cs typeface="Arial" pitchFamily="34" charset="-120"/>
+              </a:rPr>
+              <a:t>No requiere instalación</a:t>
             </a:r>
             <a:endParaRPr lang="en-US" sz="1050" dirty="0"/>
           </a:p>
           <a:p>
-            <a:pPr indent="0" marL="0">
+            <a:pPr marL="0" indent="0">
               <a:lnSpc>
                 <a:spcPct val="130000"/>
               </a:lnSpc>
@@ -13169,18 +13550,18 @@
             <a:r>
               <a:rPr lang="en-US" sz="1050" dirty="0">
                 <a:solidFill>
-                  <a:srgbClr val="991B1B"/>
-                </a:solidFill>
-                <a:latin typeface="Arial" pitchFamily="34" charset="0"/>
-                <a:ea typeface="Arial" pitchFamily="34" charset="-122"/>
-                <a:cs typeface="Arial" pitchFamily="34" charset="-120"/>
-              </a:rPr>
-              <a:t>Requiere conexión a internet</a:t>
+                  <a:srgbClr val="065F46"/>
+                </a:solidFill>
+                <a:latin typeface="Arial" pitchFamily="34" charset="0"/>
+                <a:ea typeface="Arial" pitchFamily="34" charset="-122"/>
+                <a:cs typeface="Arial" pitchFamily="34" charset="-120"/>
+              </a:rPr>
+              <a:t>Funciona desde cualquier navegador</a:t>
             </a:r>
             <a:endParaRPr lang="en-US" sz="1050" dirty="0"/>
           </a:p>
           <a:p>
-            <a:pPr indent="0" marL="0">
+            <a:pPr marL="0" indent="0">
               <a:lnSpc>
                 <a:spcPct val="130000"/>
               </a:lnSpc>
@@ -13189,6 +13570,178 @@
             <a:r>
               <a:rPr lang="en-US" sz="1050" dirty="0">
                 <a:solidFill>
+                  <a:srgbClr val="065F46"/>
+                </a:solidFill>
+                <a:latin typeface="Arial" pitchFamily="34" charset="0"/>
+                <a:ea typeface="Arial" pitchFamily="34" charset="-122"/>
+                <a:cs typeface="Arial" pitchFamily="34" charset="-120"/>
+              </a:rPr>
+              <a:t>Acceso desde cualquier dispositivo</a:t>
+            </a:r>
+            <a:endParaRPr lang="en-US" sz="1050" dirty="0"/>
+          </a:p>
+        </p:txBody>
+      </p:sp>
+      <p:sp>
+        <p:nvSpPr>
+          <p:cNvPr id="14" name="Shape 10"/>
+          <p:cNvSpPr/>
+          <p:nvPr/>
+        </p:nvSpPr>
+        <p:spPr>
+          <a:xfrm>
+            <a:off x="4754880" y="3154680"/>
+            <a:ext cx="3749040" cy="1097280"/>
+          </a:xfrm>
+          <a:prstGeom prst="rect">
+            <a:avLst/>
+          </a:prstGeom>
+          <a:solidFill>
+            <a:srgbClr val="FEE2E2"/>
+          </a:solidFill>
+          <a:ln/>
+        </p:spPr>
+        <p:txBody>
+          <a:bodyPr/>
+          <a:lstStyle/>
+          <a:p>
+            <a:endParaRPr lang="es-AR"/>
+          </a:p>
+        </p:txBody>
+      </p:sp>
+      <p:pic>
+        <p:nvPicPr>
+          <p:cNvPr id="15" name="Image 2" descr="preencoded.png"/>
+          <p:cNvPicPr>
+            <a:picLocks noChangeAspect="1"/>
+          </p:cNvPicPr>
+          <p:nvPr/>
+        </p:nvPicPr>
+        <p:blipFill>
+          <a:blip r:embed="rId5"/>
+          <a:stretch>
+            <a:fillRect/>
+          </a:stretch>
+        </p:blipFill>
+        <p:spPr>
+          <a:xfrm>
+            <a:off x="5029200" y="3291840"/>
+            <a:ext cx="274320" cy="274320"/>
+          </a:xfrm>
+          <a:prstGeom prst="rect">
+            <a:avLst/>
+          </a:prstGeom>
+        </p:spPr>
+      </p:pic>
+      <p:sp>
+        <p:nvSpPr>
+          <p:cNvPr id="16" name="Text 11"/>
+          <p:cNvSpPr/>
+          <p:nvPr/>
+        </p:nvSpPr>
+        <p:spPr>
+          <a:xfrm>
+            <a:off x="5394960" y="3246120"/>
+            <a:ext cx="1828800" cy="320040"/>
+          </a:xfrm>
+          <a:prstGeom prst="rect">
+            <a:avLst/>
+          </a:prstGeom>
+          <a:noFill/>
+          <a:ln/>
+        </p:spPr>
+        <p:txBody>
+          <a:bodyPr wrap="square" lIns="0" tIns="0" rIns="0" bIns="0" rtlCol="0" anchor="ctr"/>
+          <a:lstStyle/>
+          <a:p>
+            <a:pPr marL="0" indent="0">
+              <a:buNone/>
+            </a:pPr>
+            <a:r>
+              <a:rPr lang="en-US" sz="1300" b="1" dirty="0">
+                <a:solidFill>
+                  <a:srgbClr val="991B1B"/>
+                </a:solidFill>
+                <a:latin typeface="Arial" pitchFamily="34" charset="0"/>
+                <a:ea typeface="Arial" pitchFamily="34" charset="-122"/>
+                <a:cs typeface="Arial" pitchFamily="34" charset="-120"/>
+              </a:rPr>
+              <a:t>Limitaciones</a:t>
+            </a:r>
+            <a:endParaRPr lang="en-US" sz="1300" dirty="0"/>
+          </a:p>
+        </p:txBody>
+      </p:sp>
+      <p:sp>
+        <p:nvSpPr>
+          <p:cNvPr id="17" name="Text 12"/>
+          <p:cNvSpPr/>
+          <p:nvPr/>
+        </p:nvSpPr>
+        <p:spPr>
+          <a:xfrm>
+            <a:off x="5029200" y="3611880"/>
+            <a:ext cx="3200400" cy="594360"/>
+          </a:xfrm>
+          <a:prstGeom prst="rect">
+            <a:avLst/>
+          </a:prstGeom>
+          <a:noFill/>
+          <a:ln/>
+        </p:spPr>
+        <p:txBody>
+          <a:bodyPr wrap="square" lIns="0" tIns="0" rIns="0" bIns="0" rtlCol="0" anchor="t"/>
+          <a:lstStyle/>
+          <a:p>
+            <a:pPr marL="0" indent="0">
+              <a:lnSpc>
+                <a:spcPct val="130000"/>
+              </a:lnSpc>
+              <a:buNone/>
+            </a:pPr>
+            <a:r>
+              <a:rPr lang="en-US" sz="1050" dirty="0">
+                <a:solidFill>
+                  <a:srgbClr val="991B1B"/>
+                </a:solidFill>
+                <a:latin typeface="Arial" pitchFamily="34" charset="0"/>
+                <a:ea typeface="Arial" pitchFamily="34" charset="-122"/>
+                <a:cs typeface="Arial" pitchFamily="34" charset="-120"/>
+              </a:rPr>
+              <a:t>No tiene los paneles de RStudio</a:t>
+            </a:r>
+            <a:endParaRPr lang="en-US" sz="1050" dirty="0"/>
+          </a:p>
+          <a:p>
+            <a:pPr marL="0" indent="0">
+              <a:lnSpc>
+                <a:spcPct val="130000"/>
+              </a:lnSpc>
+              <a:buNone/>
+            </a:pPr>
+            <a:r>
+              <a:rPr lang="en-US" sz="1050" dirty="0">
+                <a:solidFill>
+                  <a:srgbClr val="991B1B"/>
+                </a:solidFill>
+                <a:latin typeface="Arial" pitchFamily="34" charset="0"/>
+                <a:ea typeface="Arial" pitchFamily="34" charset="-122"/>
+                <a:cs typeface="Arial" pitchFamily="34" charset="-120"/>
+              </a:rPr>
+              <a:t>Requiere conexión a internet</a:t>
+            </a:r>
+            <a:endParaRPr lang="en-US" sz="1050" dirty="0"/>
+          </a:p>
+          <a:p>
+            <a:pPr marL="0" indent="0">
+              <a:lnSpc>
+                <a:spcPct val="130000"/>
+              </a:lnSpc>
+              <a:buNone/>
+            </a:pPr>
+            <a:r>
+              <a:rPr lang="en-US" sz="1050" dirty="0">
+                <a:solidFill>
                   <a:srgbClr val="991B1B"/>
                 </a:solidFill>
                 <a:latin typeface="Arial" pitchFamily="34" charset="0"/>
@@ -13220,6 +13773,13 @@
           </a:solidFill>
           <a:ln/>
         </p:spPr>
+        <p:txBody>
+          <a:bodyPr/>
+          <a:lstStyle/>
+          <a:p>
+            <a:endParaRPr lang="es-AR"/>
+          </a:p>
+        </p:txBody>
       </p:sp>
       <p:sp>
         <p:nvSpPr>
@@ -13242,7 +13802,7 @@
           <a:bodyPr wrap="square" lIns="0" tIns="0" rIns="0" bIns="0" rtlCol="0" anchor="ctr"/>
           <a:lstStyle/>
           <a:p>
-            <a:pPr indent="0" marL="0">
+            <a:pPr marL="0" indent="0">
               <a:buNone/>
             </a:pPr>
             <a:r>
@@ -13281,7 +13841,7 @@
           <a:bodyPr wrap="square" lIns="0" tIns="0" rIns="0" bIns="0" rtlCol="0" anchor="ctr"/>
           <a:lstStyle/>
           <a:p>
-            <a:pPr algn="r" indent="0" marL="0">
+            <a:pPr marL="0" indent="0" algn="r">
               <a:buNone/>
             </a:pPr>
             <a:r>
@@ -13315,6 +13875,7 @@
         <a:solidFill>
           <a:srgbClr val="F0F9FF"/>
         </a:solidFill>
+        <a:effectLst/>
       </p:bgPr>
     </p:bg>
     <p:spTree>
@@ -13350,6 +13911,13 @@
           </a:solidFill>
           <a:ln/>
         </p:spPr>
+        <p:txBody>
+          <a:bodyPr/>
+          <a:lstStyle/>
+          <a:p>
+            <a:endParaRPr lang="es-AR"/>
+          </a:p>
+        </p:txBody>
       </p:sp>
       <p:sp>
         <p:nvSpPr>
@@ -13372,7 +13940,7 @@
           <a:bodyPr wrap="square" lIns="0" tIns="0" rIns="0" bIns="0" rtlCol="0" anchor="ctr"/>
           <a:lstStyle/>
           <a:p>
-            <a:pPr indent="0" marL="0">
+            <a:pPr marL="0" indent="0">
               <a:buNone/>
             </a:pPr>
             <a:r>
@@ -13411,7 +13979,7 @@
           <a:bodyPr wrap="square" lIns="0" tIns="0" rIns="0" bIns="0" rtlCol="0" anchor="ctr"/>
           <a:lstStyle/>
           <a:p>
-            <a:pPr indent="0" marL="0">
+            <a:pPr marL="0" indent="0">
               <a:buNone/>
             </a:pPr>
             <a:r>
@@ -13448,6 +14016,13 @@
           </a:solidFill>
           <a:ln/>
         </p:spPr>
+        <p:txBody>
+          <a:bodyPr/>
+          <a:lstStyle/>
+          <a:p>
+            <a:endParaRPr lang="es-AR"/>
+          </a:p>
+        </p:txBody>
       </p:sp>
       <p:sp>
         <p:nvSpPr>
@@ -13470,7 +14045,7 @@
           <a:bodyPr wrap="square" lIns="0" tIns="0" rIns="0" bIns="0" rtlCol="0" anchor="t"/>
           <a:lstStyle/>
           <a:p>
-            <a:pPr indent="0" marL="0">
+            <a:pPr marL="0" indent="0">
               <a:lnSpc>
                 <a:spcPct val="125000"/>
               </a:lnSpc>
@@ -13490,7 +14065,7 @@
             <a:endParaRPr lang="en-US" sz="1200" dirty="0"/>
           </a:p>
           <a:p>
-            <a:pPr indent="0" marL="0">
+            <a:pPr marL="0" indent="0">
               <a:lnSpc>
                 <a:spcPct val="125000"/>
               </a:lnSpc>
@@ -13510,7 +14085,7 @@
             <a:endParaRPr lang="en-US" sz="1200" dirty="0"/>
           </a:p>
           <a:p>
-            <a:pPr indent="0" marL="0">
+            <a:pPr marL="0" indent="0">
               <a:lnSpc>
                 <a:spcPct val="125000"/>
               </a:lnSpc>
@@ -13530,7 +14105,7 @@
             <a:endParaRPr lang="en-US" sz="1200" dirty="0"/>
           </a:p>
           <a:p>
-            <a:pPr indent="0" marL="0">
+            <a:pPr marL="0" indent="0">
               <a:lnSpc>
                 <a:spcPct val="125000"/>
               </a:lnSpc>
@@ -13550,7 +14125,7 @@
             <a:endParaRPr lang="en-US" sz="1200" dirty="0"/>
           </a:p>
           <a:p>
-            <a:pPr indent="0" marL="0">
+            <a:pPr marL="0" indent="0">
               <a:lnSpc>
                 <a:spcPct val="125000"/>
               </a:lnSpc>
@@ -13559,7 +14134,7 @@
             <a:endParaRPr lang="en-US" sz="1200" dirty="0"/>
           </a:p>
           <a:p>
-            <a:pPr indent="0" marL="0">
+            <a:pPr marL="0" indent="0">
               <a:lnSpc>
                 <a:spcPct val="125000"/>
               </a:lnSpc>
@@ -13579,7 +14154,7 @@
             <a:endParaRPr lang="en-US" sz="1200" dirty="0"/>
           </a:p>
           <a:p>
-            <a:pPr indent="0" marL="0">
+            <a:pPr marL="0" indent="0">
               <a:lnSpc>
                 <a:spcPct val="125000"/>
               </a:lnSpc>
@@ -13599,7 +14174,7 @@
             <a:endParaRPr lang="en-US" sz="1200" dirty="0"/>
           </a:p>
           <a:p>
-            <a:pPr indent="0" marL="0">
+            <a:pPr marL="0" indent="0">
               <a:lnSpc>
                 <a:spcPct val="125000"/>
               </a:lnSpc>
@@ -13608,7 +14183,7 @@
             <a:endParaRPr lang="en-US" sz="1200" dirty="0"/>
           </a:p>
           <a:p>
-            <a:pPr indent="0" marL="0">
+            <a:pPr marL="0" indent="0">
               <a:lnSpc>
                 <a:spcPct val="125000"/>
               </a:lnSpc>
@@ -13628,7 +14203,7 @@
             <a:endParaRPr lang="en-US" sz="1200" dirty="0"/>
           </a:p>
           <a:p>
-            <a:pPr indent="0" marL="0">
+            <a:pPr marL="0" indent="0">
               <a:lnSpc>
                 <a:spcPct val="125000"/>
               </a:lnSpc>
@@ -13668,13 +14243,20 @@
           </a:solidFill>
           <a:ln/>
           <a:effectLst>
-            <a:outerShdw sx="100000" sy="100000" kx="0" ky="0" algn="bl" rotWithShape="0" blurRad="101600" dist="38100" dir="8100000">
+            <a:outerShdw blurRad="101600" dist="38100" dir="8100000" algn="bl" rotWithShape="0">
               <a:srgbClr val="000000">
                 <a:alpha val="10000"/>
               </a:srgbClr>
             </a:outerShdw>
           </a:effectLst>
         </p:spPr>
+        <p:txBody>
+          <a:bodyPr/>
+          <a:lstStyle/>
+          <a:p>
+            <a:endParaRPr lang="es-AR"/>
+          </a:p>
+        </p:txBody>
       </p:sp>
       <p:sp>
         <p:nvSpPr>
@@ -13695,6 +14277,13 @@
           </a:solidFill>
           <a:ln/>
         </p:spPr>
+        <p:txBody>
+          <a:bodyPr/>
+          <a:lstStyle/>
+          <a:p>
+            <a:endParaRPr lang="es-AR"/>
+          </a:p>
+        </p:txBody>
       </p:sp>
       <p:sp>
         <p:nvSpPr>
@@ -13717,7 +14306,7 @@
           <a:bodyPr wrap="square" lIns="0" tIns="0" rIns="0" bIns="0" rtlCol="0" anchor="b"/>
           <a:lstStyle/>
           <a:p>
-            <a:pPr indent="0" marL="0">
+            <a:pPr marL="0" indent="0">
               <a:buNone/>
             </a:pPr>
             <a:r>
@@ -13756,7 +14345,7 @@
           <a:bodyPr wrap="square" lIns="0" tIns="0" rIns="0" bIns="0" rtlCol="0" anchor="t"/>
           <a:lstStyle/>
           <a:p>
-            <a:pPr indent="0" marL="0">
+            <a:pPr marL="0" indent="0">
               <a:buNone/>
             </a:pPr>
             <a:r>
@@ -13793,13 +14382,20 @@
           </a:solidFill>
           <a:ln/>
           <a:effectLst>
-            <a:outerShdw sx="100000" sy="100000" kx="0" ky="0" algn="bl" rotWithShape="0" blurRad="101600" dist="38100" dir="8100000">
+            <a:outerShdw blurRad="101600" dist="38100" dir="8100000" algn="bl" rotWithShape="0">
               <a:srgbClr val="000000">
                 <a:alpha val="10000"/>
               </a:srgbClr>
             </a:outerShdw>
           </a:effectLst>
         </p:spPr>
+        <p:txBody>
+          <a:bodyPr/>
+          <a:lstStyle/>
+          <a:p>
+            <a:endParaRPr lang="es-AR"/>
+          </a:p>
+        </p:txBody>
       </p:sp>
       <p:sp>
         <p:nvSpPr>
@@ -13820,6 +14416,13 @@
           </a:solidFill>
           <a:ln/>
         </p:spPr>
+        <p:txBody>
+          <a:bodyPr/>
+          <a:lstStyle/>
+          <a:p>
+            <a:endParaRPr lang="es-AR"/>
+          </a:p>
+        </p:txBody>
       </p:sp>
       <p:sp>
         <p:nvSpPr>
@@ -13842,7 +14445,7 @@
           <a:bodyPr wrap="square" lIns="0" tIns="0" rIns="0" bIns="0" rtlCol="0" anchor="b"/>
           <a:lstStyle/>
           <a:p>
-            <a:pPr indent="0" marL="0">
+            <a:pPr marL="0" indent="0">
               <a:buNone/>
             </a:pPr>
             <a:r>
@@ -13881,7 +14484,7 @@
           <a:bodyPr wrap="square" lIns="0" tIns="0" rIns="0" bIns="0" rtlCol="0" anchor="t"/>
           <a:lstStyle/>
           <a:p>
-            <a:pPr indent="0" marL="0">
+            <a:pPr marL="0" indent="0">
               <a:buNone/>
             </a:pPr>
             <a:r>
@@ -13918,13 +14521,20 @@
           </a:solidFill>
           <a:ln/>
           <a:effectLst>
-            <a:outerShdw sx="100000" sy="100000" kx="0" ky="0" algn="bl" rotWithShape="0" blurRad="101600" dist="38100" dir="8100000">
+            <a:outerShdw blurRad="101600" dist="38100" dir="8100000" algn="bl" rotWithShape="0">
               <a:srgbClr val="000000">
                 <a:alpha val="10000"/>
               </a:srgbClr>
             </a:outerShdw>
           </a:effectLst>
         </p:spPr>
+        <p:txBody>
+          <a:bodyPr/>
+          <a:lstStyle/>
+          <a:p>
+            <a:endParaRPr lang="es-AR"/>
+          </a:p>
+        </p:txBody>
       </p:sp>
       <p:sp>
         <p:nvSpPr>
@@ -13945,6 +14555,13 @@
           </a:solidFill>
           <a:ln/>
         </p:spPr>
+        <p:txBody>
+          <a:bodyPr/>
+          <a:lstStyle/>
+          <a:p>
+            <a:endParaRPr lang="es-AR"/>
+          </a:p>
+        </p:txBody>
       </p:sp>
       <p:sp>
         <p:nvSpPr>
@@ -13967,7 +14584,7 @@
           <a:bodyPr wrap="square" lIns="0" tIns="0" rIns="0" bIns="0" rtlCol="0" anchor="b"/>
           <a:lstStyle/>
           <a:p>
-            <a:pPr indent="0" marL="0">
+            <a:pPr marL="0" indent="0">
               <a:buNone/>
             </a:pPr>
             <a:r>
@@ -14006,7 +14623,7 @@
           <a:bodyPr wrap="square" lIns="0" tIns="0" rIns="0" bIns="0" rtlCol="0" anchor="t"/>
           <a:lstStyle/>
           <a:p>
-            <a:pPr indent="0" marL="0">
+            <a:pPr marL="0" indent="0">
               <a:buNone/>
             </a:pPr>
             <a:r>
@@ -14023,7 +14640,7 @@
             <a:endParaRPr lang="en-US" sz="900" dirty="0"/>
           </a:p>
           <a:p>
-            <a:pPr indent="0" marL="0">
+            <a:pPr marL="0" indent="0">
               <a:buNone/>
             </a:pPr>
             <a:r>
@@ -14060,13 +14677,20 @@
           </a:solidFill>
           <a:ln/>
           <a:effectLst>
-            <a:outerShdw sx="100000" sy="100000" kx="0" ky="0" algn="bl" rotWithShape="0" blurRad="101600" dist="38100" dir="8100000">
+            <a:outerShdw blurRad="101600" dist="38100" dir="8100000" algn="bl" rotWithShape="0">
               <a:srgbClr val="000000">
                 <a:alpha val="10000"/>
               </a:srgbClr>
             </a:outerShdw>
           </a:effectLst>
         </p:spPr>
+        <p:txBody>
+          <a:bodyPr/>
+          <a:lstStyle/>
+          <a:p>
+            <a:endParaRPr lang="es-AR"/>
+          </a:p>
+        </p:txBody>
       </p:sp>
       <p:sp>
         <p:nvSpPr>
@@ -14087,6 +14711,13 @@
           </a:solidFill>
           <a:ln/>
         </p:spPr>
+        <p:txBody>
+          <a:bodyPr/>
+          <a:lstStyle/>
+          <a:p>
+            <a:endParaRPr lang="es-AR"/>
+          </a:p>
+        </p:txBody>
       </p:sp>
       <p:sp>
         <p:nvSpPr>
@@ -14109,7 +14740,7 @@
           <a:bodyPr wrap="square" lIns="0" tIns="0" rIns="0" bIns="0" rtlCol="0" anchor="b"/>
           <a:lstStyle/>
           <a:p>
-            <a:pPr indent="0" marL="0">
+            <a:pPr marL="0" indent="0">
               <a:buNone/>
             </a:pPr>
             <a:r>
@@ -14148,7 +14779,7 @@
           <a:bodyPr wrap="square" lIns="0" tIns="0" rIns="0" bIns="0" rtlCol="0" anchor="t"/>
           <a:lstStyle/>
           <a:p>
-            <a:pPr indent="0" marL="0">
+            <a:pPr marL="0" indent="0">
               <a:buNone/>
             </a:pPr>
             <a:r>
@@ -14165,7 +14796,7 @@
             <a:endParaRPr lang="en-US" sz="900" dirty="0"/>
           </a:p>
           <a:p>
-            <a:pPr indent="0" marL="0">
+            <a:pPr marL="0" indent="0">
               <a:buNone/>
             </a:pPr>
             <a:r>
@@ -14202,6 +14833,13 @@
           </a:solidFill>
           <a:ln/>
         </p:spPr>
+        <p:txBody>
+          <a:bodyPr/>
+          <a:lstStyle/>
+          <a:p>
+            <a:endParaRPr lang="es-AR"/>
+          </a:p>
+        </p:txBody>
       </p:sp>
       <p:sp>
         <p:nvSpPr>
@@ -14224,7 +14862,7 @@
           <a:bodyPr wrap="square" lIns="0" tIns="0" rIns="0" bIns="0" rtlCol="0" anchor="ctr"/>
           <a:lstStyle/>
           <a:p>
-            <a:pPr indent="0" marL="0">
+            <a:pPr marL="0" indent="0">
               <a:buNone/>
             </a:pPr>
             <a:r>
@@ -14263,7 +14901,7 @@
           <a:bodyPr wrap="square" lIns="0" tIns="0" rIns="0" bIns="0" rtlCol="0" anchor="ctr"/>
           <a:lstStyle/>
           <a:p>
-            <a:pPr algn="r" indent="0" marL="0">
+            <a:pPr marL="0" indent="0" algn="r">
               <a:buNone/>
             </a:pPr>
             <a:r>
@@ -14297,6 +14935,7 @@
         <a:solidFill>
           <a:srgbClr val="F0F9FF"/>
         </a:solidFill>
+        <a:effectLst/>
       </p:bgPr>
     </p:bg>
     <p:spTree>
@@ -14332,6 +14971,13 @@
           </a:solidFill>
           <a:ln/>
         </p:spPr>
+        <p:txBody>
+          <a:bodyPr/>
+          <a:lstStyle/>
+          <a:p>
+            <a:endParaRPr lang="es-AR"/>
+          </a:p>
+        </p:txBody>
       </p:sp>
       <p:sp>
         <p:nvSpPr>
@@ -14354,7 +15000,7 @@
           <a:bodyPr wrap="square" lIns="0" tIns="0" rIns="0" bIns="0" rtlCol="0" anchor="ctr"/>
           <a:lstStyle/>
           <a:p>
-            <a:pPr indent="0" marL="0">
+            <a:pPr marL="0" indent="0">
               <a:buNone/>
             </a:pPr>
             <a:r>
@@ -14393,7 +15039,7 @@
           <a:bodyPr wrap="square" lIns="0" tIns="0" rIns="0" bIns="0" rtlCol="0" anchor="ctr"/>
           <a:lstStyle/>
           <a:p>
-            <a:pPr indent="0" marL="0">
+            <a:pPr marL="0" indent="0">
               <a:buNone/>
             </a:pPr>
             <a:r>
@@ -14430,6 +15076,13 @@
           </a:solidFill>
           <a:ln/>
         </p:spPr>
+        <p:txBody>
+          <a:bodyPr/>
+          <a:lstStyle/>
+          <a:p>
+            <a:endParaRPr lang="es-AR"/>
+          </a:p>
+        </p:txBody>
       </p:sp>
       <p:sp>
         <p:nvSpPr>
@@ -14452,7 +15105,7 @@
           <a:bodyPr wrap="square" lIns="0" tIns="0" rIns="0" bIns="0" rtlCol="0" anchor="t"/>
           <a:lstStyle/>
           <a:p>
-            <a:pPr indent="0" marL="0">
+            <a:pPr marL="0" indent="0">
               <a:lnSpc>
                 <a:spcPct val="120000"/>
               </a:lnSpc>
@@ -14472,7 +15125,7 @@
             <a:endParaRPr lang="en-US" sz="1150" dirty="0"/>
           </a:p>
           <a:p>
-            <a:pPr indent="0" marL="0">
+            <a:pPr marL="0" indent="0">
               <a:lnSpc>
                 <a:spcPct val="120000"/>
               </a:lnSpc>
@@ -14492,7 +15145,7 @@
             <a:endParaRPr lang="en-US" sz="1150" dirty="0"/>
           </a:p>
           <a:p>
-            <a:pPr indent="0" marL="0">
+            <a:pPr marL="0" indent="0">
               <a:lnSpc>
                 <a:spcPct val="120000"/>
               </a:lnSpc>
@@ -14512,7 +15165,7 @@
             <a:endParaRPr lang="en-US" sz="1150" dirty="0"/>
           </a:p>
           <a:p>
-            <a:pPr indent="0" marL="0">
+            <a:pPr marL="0" indent="0">
               <a:lnSpc>
                 <a:spcPct val="120000"/>
               </a:lnSpc>
@@ -14521,7 +15174,7 @@
             <a:endParaRPr lang="en-US" sz="1150" dirty="0"/>
           </a:p>
           <a:p>
-            <a:pPr indent="0" marL="0">
+            <a:pPr marL="0" indent="0">
               <a:lnSpc>
                 <a:spcPct val="120000"/>
               </a:lnSpc>
@@ -14541,7 +15194,7 @@
             <a:endParaRPr lang="en-US" sz="1150" dirty="0"/>
           </a:p>
           <a:p>
-            <a:pPr indent="0" marL="0">
+            <a:pPr marL="0" indent="0">
               <a:lnSpc>
                 <a:spcPct val="120000"/>
               </a:lnSpc>
@@ -14561,7 +15214,7 @@
             <a:endParaRPr lang="en-US" sz="1150" dirty="0"/>
           </a:p>
           <a:p>
-            <a:pPr indent="0" marL="0">
+            <a:pPr marL="0" indent="0">
               <a:lnSpc>
                 <a:spcPct val="120000"/>
               </a:lnSpc>
@@ -14581,7 +15234,7 @@
             <a:endParaRPr lang="en-US" sz="1150" dirty="0"/>
           </a:p>
           <a:p>
-            <a:pPr indent="0" marL="0">
+            <a:pPr marL="0" indent="0">
               <a:lnSpc>
                 <a:spcPct val="120000"/>
               </a:lnSpc>
@@ -14590,7 +15243,7 @@
             <a:endParaRPr lang="en-US" sz="1150" dirty="0"/>
           </a:p>
           <a:p>
-            <a:pPr indent="0" marL="0">
+            <a:pPr marL="0" indent="0">
               <a:lnSpc>
                 <a:spcPct val="120000"/>
               </a:lnSpc>
@@ -14610,7 +15263,7 @@
             <a:endParaRPr lang="en-US" sz="1150" dirty="0"/>
           </a:p>
           <a:p>
-            <a:pPr indent="0" marL="0">
+            <a:pPr marL="0" indent="0">
               <a:lnSpc>
                 <a:spcPct val="120000"/>
               </a:lnSpc>
@@ -14630,7 +15283,7 @@
             <a:endParaRPr lang="en-US" sz="1150" dirty="0"/>
           </a:p>
           <a:p>
-            <a:pPr indent="0" marL="0">
+            <a:pPr marL="0" indent="0">
               <a:lnSpc>
                 <a:spcPct val="120000"/>
               </a:lnSpc>
@@ -14670,17 +15323,24 @@
           </a:solidFill>
           <a:ln/>
         </p:spPr>
+        <p:txBody>
+          <a:bodyPr/>
+          <a:lstStyle/>
+          <a:p>
+            <a:endParaRPr lang="es-AR"/>
+          </a:p>
+        </p:txBody>
       </p:sp>
       <p:pic>
         <p:nvPicPr>
-          <p:cNvPr id="8" name="Image 0" descr="preencoded.png">    </p:cNvPr>
+          <p:cNvPr id="8" name="Image 0" descr="preencoded.png"/>
           <p:cNvPicPr>
             <a:picLocks noChangeAspect="1"/>
           </p:cNvPicPr>
           <p:nvPr/>
         </p:nvPicPr>
         <p:blipFill>
-          <a:blip r:embed="rId1"/>
+          <a:blip r:embed="rId3"/>
           <a:stretch>
             <a:fillRect/>
           </a:stretch>
@@ -14716,7 +15376,7 @@
           <a:bodyPr wrap="square" lIns="0" tIns="0" rIns="0" bIns="0" rtlCol="0" anchor="ctr"/>
           <a:lstStyle/>
           <a:p>
-            <a:pPr indent="0" marL="0">
+            <a:pPr marL="0" indent="0">
               <a:buNone/>
             </a:pPr>
             <a:r>
@@ -14755,7 +15415,7 @@
           <a:bodyPr wrap="square" lIns="0" tIns="0" rIns="0" bIns="0" rtlCol="0" anchor="t"/>
           <a:lstStyle/>
           <a:p>
-            <a:pPr indent="0" marL="0">
+            <a:pPr marL="0" indent="0">
               <a:buNone/>
             </a:pPr>
             <a:r>
@@ -14792,13 +15452,20 @@
           </a:solidFill>
           <a:ln/>
           <a:effectLst>
-            <a:outerShdw sx="100000" sy="100000" kx="0" ky="0" algn="bl" rotWithShape="0" blurRad="101600" dist="38100" dir="8100000">
+            <a:outerShdw blurRad="101600" dist="38100" dir="8100000" algn="bl" rotWithShape="0">
               <a:srgbClr val="000000">
                 <a:alpha val="10000"/>
               </a:srgbClr>
             </a:outerShdw>
           </a:effectLst>
         </p:spPr>
+        <p:txBody>
+          <a:bodyPr/>
+          <a:lstStyle/>
+          <a:p>
+            <a:endParaRPr lang="es-AR"/>
+          </a:p>
+        </p:txBody>
       </p:sp>
       <p:sp>
         <p:nvSpPr>
@@ -14821,7 +15488,7 @@
           <a:bodyPr wrap="square" lIns="0" tIns="0" rIns="0" bIns="0" rtlCol="0" anchor="ctr"/>
           <a:lstStyle/>
           <a:p>
-            <a:pPr indent="0" marL="0">
+            <a:pPr marL="0" indent="0">
               <a:buNone/>
             </a:pPr>
             <a:r>
@@ -14860,7 +15527,7 @@
           <a:bodyPr wrap="square" lIns="0" tIns="0" rIns="0" bIns="0" rtlCol="0" anchor="t"/>
           <a:lstStyle/>
           <a:p>
-            <a:pPr indent="0" marL="0">
+            <a:pPr marL="0" indent="0">
               <a:buNone/>
             </a:pPr>
             <a:r>
@@ -14877,7 +15544,7 @@
             <a:endParaRPr lang="en-US" sz="1050" dirty="0"/>
           </a:p>
           <a:p>
-            <a:pPr indent="0" marL="0">
+            <a:pPr marL="0" indent="0">
               <a:buNone/>
             </a:pPr>
             <a:r>
@@ -14894,7 +15561,7 @@
             <a:endParaRPr lang="en-US" sz="1050" dirty="0"/>
           </a:p>
           <a:p>
-            <a:pPr indent="0" marL="0">
+            <a:pPr marL="0" indent="0">
               <a:buNone/>
             </a:pPr>
             <a:r>
@@ -14931,13 +15598,20 @@
           </a:solidFill>
           <a:ln/>
           <a:effectLst>
-            <a:outerShdw sx="100000" sy="100000" kx="0" ky="0" algn="bl" rotWithShape="0" blurRad="101600" dist="38100" dir="8100000">
+            <a:outerShdw blurRad="101600" dist="38100" dir="8100000" algn="bl" rotWithShape="0">
               <a:srgbClr val="000000">
                 <a:alpha val="10000"/>
               </a:srgbClr>
             </a:outerShdw>
           </a:effectLst>
         </p:spPr>
+        <p:txBody>
+          <a:bodyPr/>
+          <a:lstStyle/>
+          <a:p>
+            <a:endParaRPr lang="es-AR"/>
+          </a:p>
+        </p:txBody>
       </p:sp>
       <p:sp>
         <p:nvSpPr>
@@ -14960,7 +15634,7 @@
           <a:bodyPr wrap="square" lIns="0" tIns="0" rIns="0" bIns="0" rtlCol="0" anchor="ctr"/>
           <a:lstStyle/>
           <a:p>
-            <a:pPr indent="0" marL="0">
+            <a:pPr marL="0" indent="0">
               <a:buNone/>
             </a:pPr>
             <a:r>
@@ -14977,7 +15651,7 @@
             <a:endParaRPr lang="en-US" sz="1000" dirty="0"/>
           </a:p>
           <a:p>
-            <a:pPr indent="0" marL="0">
+            <a:pPr marL="0" indent="0">
               <a:buNone/>
             </a:pPr>
             <a:r>
@@ -15014,6 +15688,13 @@
           </a:solidFill>
           <a:ln/>
         </p:spPr>
+        <p:txBody>
+          <a:bodyPr/>
+          <a:lstStyle/>
+          <a:p>
+            <a:endParaRPr lang="es-AR"/>
+          </a:p>
+        </p:txBody>
       </p:sp>
       <p:sp>
         <p:nvSpPr>
@@ -15036,7 +15717,7 @@
           <a:bodyPr wrap="square" lIns="0" tIns="0" rIns="0" bIns="0" rtlCol="0" anchor="ctr"/>
           <a:lstStyle/>
           <a:p>
-            <a:pPr indent="0" marL="0">
+            <a:pPr marL="0" indent="0">
               <a:buNone/>
             </a:pPr>
             <a:r>
@@ -15075,7 +15756,7 @@
           <a:bodyPr wrap="square" lIns="0" tIns="0" rIns="0" bIns="0" rtlCol="0" anchor="ctr"/>
           <a:lstStyle/>
           <a:p>
-            <a:pPr algn="r" indent="0" marL="0">
+            <a:pPr marL="0" indent="0" algn="r">
               <a:buNone/>
             </a:pPr>
             <a:r>
@@ -15109,6 +15790,7 @@
         <a:solidFill>
           <a:srgbClr val="F0F9FF"/>
         </a:solidFill>
+        <a:effectLst/>
       </p:bgPr>
     </p:bg>
     <p:spTree>
@@ -15144,6 +15826,13 @@
           </a:solidFill>
           <a:ln/>
         </p:spPr>
+        <p:txBody>
+          <a:bodyPr/>
+          <a:lstStyle/>
+          <a:p>
+            <a:endParaRPr lang="es-AR"/>
+          </a:p>
+        </p:txBody>
       </p:sp>
       <p:sp>
         <p:nvSpPr>
@@ -15166,7 +15855,7 @@
           <a:bodyPr wrap="square" lIns="0" tIns="0" rIns="0" bIns="0" rtlCol="0" anchor="ctr"/>
           <a:lstStyle/>
           <a:p>
-            <a:pPr indent="0" marL="0">
+            <a:pPr marL="0" indent="0">
               <a:buNone/>
             </a:pPr>
             <a:r>
@@ -15205,7 +15894,7 @@
           <a:bodyPr wrap="square" lIns="0" tIns="0" rIns="0" bIns="0" rtlCol="0" anchor="ctr"/>
           <a:lstStyle/>
           <a:p>
-            <a:pPr indent="0" marL="0">
+            <a:pPr marL="0" indent="0">
               <a:buNone/>
             </a:pPr>
             <a:r>
@@ -15242,6 +15931,13 @@
           </a:solidFill>
           <a:ln/>
         </p:spPr>
+        <p:txBody>
+          <a:bodyPr/>
+          <a:lstStyle/>
+          <a:p>
+            <a:endParaRPr lang="es-AR"/>
+          </a:p>
+        </p:txBody>
       </p:sp>
       <p:sp>
         <p:nvSpPr>
@@ -15264,7 +15960,7 @@
           <a:bodyPr wrap="square" lIns="0" tIns="0" rIns="0" bIns="0" rtlCol="0" anchor="t"/>
           <a:lstStyle/>
           <a:p>
-            <a:pPr indent="0" marL="0">
+            <a:pPr marL="0" indent="0">
               <a:lnSpc>
                 <a:spcPct val="120000"/>
               </a:lnSpc>
@@ -15284,7 +15980,7 @@
             <a:endParaRPr lang="en-US" sz="1150" dirty="0"/>
           </a:p>
           <a:p>
-            <a:pPr indent="0" marL="0">
+            <a:pPr marL="0" indent="0">
               <a:lnSpc>
                 <a:spcPct val="120000"/>
               </a:lnSpc>
@@ -15304,7 +16000,7 @@
             <a:endParaRPr lang="en-US" sz="1150" dirty="0"/>
           </a:p>
           <a:p>
-            <a:pPr indent="0" marL="0">
+            <a:pPr marL="0" indent="0">
               <a:lnSpc>
                 <a:spcPct val="120000"/>
               </a:lnSpc>
@@ -15324,7 +16020,7 @@
             <a:endParaRPr lang="en-US" sz="1150" dirty="0"/>
           </a:p>
           <a:p>
-            <a:pPr indent="0" marL="0">
+            <a:pPr marL="0" indent="0">
               <a:lnSpc>
                 <a:spcPct val="120000"/>
               </a:lnSpc>
@@ -15344,7 +16040,7 @@
             <a:endParaRPr lang="en-US" sz="1150" dirty="0"/>
           </a:p>
           <a:p>
-            <a:pPr indent="0" marL="0">
+            <a:pPr marL="0" indent="0">
               <a:lnSpc>
                 <a:spcPct val="120000"/>
               </a:lnSpc>
@@ -15364,7 +16060,7 @@
             <a:endParaRPr lang="en-US" sz="1150" dirty="0"/>
           </a:p>
           <a:p>
-            <a:pPr indent="0" marL="0">
+            <a:pPr marL="0" indent="0">
               <a:lnSpc>
                 <a:spcPct val="120000"/>
               </a:lnSpc>
@@ -15384,7 +16080,7 @@
             <a:endParaRPr lang="en-US" sz="1150" dirty="0"/>
           </a:p>
           <a:p>
-            <a:pPr indent="0" marL="0">
+            <a:pPr marL="0" indent="0">
               <a:lnSpc>
                 <a:spcPct val="120000"/>
               </a:lnSpc>
@@ -15393,7 +16089,7 @@
             <a:endParaRPr lang="en-US" sz="1150" dirty="0"/>
           </a:p>
           <a:p>
-            <a:pPr indent="0" marL="0">
+            <a:pPr marL="0" indent="0">
               <a:lnSpc>
                 <a:spcPct val="120000"/>
               </a:lnSpc>
@@ -15413,7 +16109,7 @@
             <a:endParaRPr lang="en-US" sz="1150" dirty="0"/>
           </a:p>
           <a:p>
-            <a:pPr indent="0" marL="0">
+            <a:pPr marL="0" indent="0">
               <a:lnSpc>
                 <a:spcPct val="120000"/>
               </a:lnSpc>
@@ -15433,7 +16129,7 @@
             <a:endParaRPr lang="en-US" sz="1150" dirty="0"/>
           </a:p>
           <a:p>
-            <a:pPr indent="0" marL="0">
+            <a:pPr marL="0" indent="0">
               <a:lnSpc>
                 <a:spcPct val="120000"/>
               </a:lnSpc>
@@ -15473,13 +16169,20 @@
           </a:solidFill>
           <a:ln/>
           <a:effectLst>
-            <a:outerShdw sx="100000" sy="100000" kx="0" ky="0" algn="bl" rotWithShape="0" blurRad="101600" dist="38100" dir="8100000">
+            <a:outerShdw blurRad="101600" dist="38100" dir="8100000" algn="bl" rotWithShape="0">
               <a:srgbClr val="000000">
                 <a:alpha val="10000"/>
               </a:srgbClr>
             </a:outerShdw>
           </a:effectLst>
         </p:spPr>
+        <p:txBody>
+          <a:bodyPr/>
+          <a:lstStyle/>
+          <a:p>
+            <a:endParaRPr lang="es-AR"/>
+          </a:p>
+        </p:txBody>
       </p:sp>
       <p:sp>
         <p:nvSpPr>
@@ -15502,7 +16205,7 @@
           <a:bodyPr wrap="square" lIns="0" tIns="0" rIns="0" bIns="0" rtlCol="0" anchor="ctr"/>
           <a:lstStyle/>
           <a:p>
-            <a:pPr indent="0" marL="0">
+            <a:pPr marL="0" indent="0">
               <a:buNone/>
             </a:pPr>
             <a:r>
@@ -15541,7 +16244,7 @@
           <a:bodyPr wrap="square" lIns="0" tIns="0" rIns="0" bIns="0" rtlCol="0" anchor="ctr"/>
           <a:lstStyle/>
           <a:p>
-            <a:pPr algn="l" indent="0" marL="0">
+            <a:pPr marL="0" indent="0" algn="l">
               <a:buNone/>
             </a:pPr>
             <a:endParaRPr lang="en-US" sz="950" dirty="0"/>
@@ -15569,7 +16272,7 @@
           <a:bodyPr wrap="square" lIns="0" tIns="0" rIns="0" bIns="0" rtlCol="0" anchor="ctr"/>
           <a:lstStyle/>
           <a:p>
-            <a:pPr algn="ctr" indent="0" marL="0">
+            <a:pPr marL="0" indent="0" algn="ctr">
               <a:buNone/>
             </a:pPr>
             <a:r>
@@ -15608,7 +16311,7 @@
           <a:bodyPr wrap="square" lIns="0" tIns="0" rIns="0" bIns="0" rtlCol="0" anchor="ctr"/>
           <a:lstStyle/>
           <a:p>
-            <a:pPr algn="ctr" indent="0" marL="0">
+            <a:pPr marL="0" indent="0" algn="ctr">
               <a:buNone/>
             </a:pPr>
             <a:r>
@@ -15647,7 +16350,7 @@
           <a:bodyPr wrap="square" lIns="0" tIns="0" rIns="0" bIns="0" rtlCol="0" anchor="ctr"/>
           <a:lstStyle/>
           <a:p>
-            <a:pPr algn="l" indent="0" marL="0">
+            <a:pPr marL="0" indent="0" algn="l">
               <a:buNone/>
             </a:pPr>
             <a:r>
@@ -15686,7 +16389,7 @@
           <a:bodyPr wrap="square" lIns="0" tIns="0" rIns="0" bIns="0" rtlCol="0" anchor="ctr"/>
           <a:lstStyle/>
           <a:p>
-            <a:pPr algn="ctr" indent="0" marL="0">
+            <a:pPr marL="0" indent="0" algn="ctr">
               <a:buNone/>
             </a:pPr>
             <a:r>
@@ -15725,7 +16428,7 @@
           <a:bodyPr wrap="square" lIns="0" tIns="0" rIns="0" bIns="0" rtlCol="0" anchor="ctr"/>
           <a:lstStyle/>
           <a:p>
-            <a:pPr algn="ctr" indent="0" marL="0">
+            <a:pPr marL="0" indent="0" algn="ctr">
               <a:buNone/>
             </a:pPr>
             <a:r>
@@ -15764,7 +16467,7 @@
           <a:bodyPr wrap="square" lIns="0" tIns="0" rIns="0" bIns="0" rtlCol="0" anchor="ctr"/>
           <a:lstStyle/>
           <a:p>
-            <a:pPr algn="l" indent="0" marL="0">
+            <a:pPr marL="0" indent="0" algn="l">
               <a:buNone/>
             </a:pPr>
             <a:r>
@@ -15803,7 +16506,7 @@
           <a:bodyPr wrap="square" lIns="0" tIns="0" rIns="0" bIns="0" rtlCol="0" anchor="ctr"/>
           <a:lstStyle/>
           <a:p>
-            <a:pPr algn="ctr" indent="0" marL="0">
+            <a:pPr marL="0" indent="0" algn="ctr">
               <a:buNone/>
             </a:pPr>
             <a:r>
@@ -15842,7 +16545,7 @@
           <a:bodyPr wrap="square" lIns="0" tIns="0" rIns="0" bIns="0" rtlCol="0" anchor="ctr"/>
           <a:lstStyle/>
           <a:p>
-            <a:pPr algn="ctr" indent="0" marL="0">
+            <a:pPr marL="0" indent="0" algn="ctr">
               <a:buNone/>
             </a:pPr>
             <a:r>
@@ -15881,7 +16584,7 @@
           <a:bodyPr wrap="square" lIns="0" tIns="0" rIns="0" bIns="0" rtlCol="0" anchor="ctr"/>
           <a:lstStyle/>
           <a:p>
-            <a:pPr algn="l" indent="0" marL="0">
+            <a:pPr marL="0" indent="0" algn="l">
               <a:buNone/>
             </a:pPr>
             <a:r>
@@ -15920,7 +16623,7 @@
           <a:bodyPr wrap="square" lIns="0" tIns="0" rIns="0" bIns="0" rtlCol="0" anchor="ctr"/>
           <a:lstStyle/>
           <a:p>
-            <a:pPr algn="ctr" indent="0" marL="0">
+            <a:pPr marL="0" indent="0" algn="ctr">
               <a:buNone/>
             </a:pPr>
             <a:r>
@@ -15959,7 +16662,7 @@
           <a:bodyPr wrap="square" lIns="0" tIns="0" rIns="0" bIns="0" rtlCol="0" anchor="ctr"/>
           <a:lstStyle/>
           <a:p>
-            <a:pPr algn="ctr" indent="0" marL="0">
+            <a:pPr marL="0" indent="0" algn="ctr">
               <a:buNone/>
             </a:pPr>
             <a:r>
@@ -15996,6 +16699,13 @@
           </a:solidFill>
           <a:ln/>
         </p:spPr>
+        <p:txBody>
+          <a:bodyPr/>
+          <a:lstStyle/>
+          <a:p>
+            <a:endParaRPr lang="es-AR"/>
+          </a:p>
+        </p:txBody>
       </p:sp>
       <p:sp>
         <p:nvSpPr>
@@ -16018,7 +16728,7 @@
           <a:bodyPr wrap="square" lIns="0" tIns="0" rIns="0" bIns="0" rtlCol="0" anchor="ctr"/>
           <a:lstStyle/>
           <a:p>
-            <a:pPr indent="0" marL="0">
+            <a:pPr marL="0" indent="0">
               <a:buNone/>
             </a:pPr>
             <a:r>
@@ -16057,7 +16767,7 @@
           <a:bodyPr wrap="square" lIns="0" tIns="0" rIns="0" bIns="0" rtlCol="0" anchor="t"/>
           <a:lstStyle/>
           <a:p>
-            <a:pPr indent="0" marL="0">
+            <a:pPr marL="0" indent="0">
               <a:buNone/>
             </a:pPr>
             <a:r>
@@ -16094,6 +16804,13 @@
           </a:solidFill>
           <a:ln/>
         </p:spPr>
+        <p:txBody>
+          <a:bodyPr/>
+          <a:lstStyle/>
+          <a:p>
+            <a:endParaRPr lang="es-AR"/>
+          </a:p>
+        </p:txBody>
       </p:sp>
       <p:sp>
         <p:nvSpPr>
@@ -16116,7 +16833,7 @@
           <a:bodyPr wrap="square" lIns="0" tIns="0" rIns="0" bIns="0" rtlCol="0" anchor="ctr"/>
           <a:lstStyle/>
           <a:p>
-            <a:pPr indent="0" marL="0">
+            <a:pPr marL="0" indent="0">
               <a:buNone/>
             </a:pPr>
             <a:r>
@@ -16155,7 +16872,7 @@
           <a:bodyPr wrap="square" lIns="0" tIns="0" rIns="0" bIns="0" rtlCol="0" anchor="ctr"/>
           <a:lstStyle/>
           <a:p>
-            <a:pPr algn="r" indent="0" marL="0">
+            <a:pPr marL="0" indent="0" algn="r">
               <a:buNone/>
             </a:pPr>
             <a:r>
@@ -16474,4 +17191,319 @@
     </a:ext>
   </a:extLst>
 </a:theme>
+</file>
+
+<file path=ppt/theme/theme2.xml><?xml version="1.0" encoding="utf-8"?>
+<a:theme xmlns:a="http://schemas.openxmlformats.org/drawingml/2006/main" name="Tema de Office">
+  <a:themeElements>
+    <a:clrScheme name="Office">
+      <a:dk1>
+        <a:sysClr val="windowText" lastClr="000000"/>
+      </a:dk1>
+      <a:lt1>
+        <a:sysClr val="window" lastClr="FFFFFF"/>
+      </a:lt1>
+      <a:dk2>
+        <a:srgbClr val="0E2841"/>
+      </a:dk2>
+      <a:lt2>
+        <a:srgbClr val="E8E8E8"/>
+      </a:lt2>
+      <a:accent1>
+        <a:srgbClr val="156082"/>
+      </a:accent1>
+      <a:accent2>
+        <a:srgbClr val="E97132"/>
+      </a:accent2>
+      <a:accent3>
+        <a:srgbClr val="196B24"/>
+      </a:accent3>
+      <a:accent4>
+        <a:srgbClr val="0F9ED5"/>
+      </a:accent4>
+      <a:accent5>
+        <a:srgbClr val="A02B93"/>
+      </a:accent5>
+      <a:accent6>
+        <a:srgbClr val="4EA72E"/>
+      </a:accent6>
+      <a:hlink>
+        <a:srgbClr val="467886"/>
+      </a:hlink>
+      <a:folHlink>
+        <a:srgbClr val="96607D"/>
+      </a:folHlink>
+    </a:clrScheme>
+    <a:fontScheme name="Office">
+      <a:majorFont>
+        <a:latin typeface="Aptos Display" panose="02110004020202020204"/>
+        <a:ea typeface=""/>
+        <a:cs typeface=""/>
+        <a:font script="Jpan" typeface="游ゴシック Light"/>
+        <a:font script="Hang" typeface="맑은 고딕"/>
+        <a:font script="Hans" typeface="等线 Light"/>
+        <a:font script="Hant" typeface="新細明體"/>
+        <a:font script="Arab" typeface="Times New Roman"/>
+        <a:font script="Hebr" typeface="Times New Roman"/>
+        <a:font script="Thai" typeface="Angsana New"/>
+        <a:font script="Ethi" typeface="Nyala"/>
+        <a:font script="Beng" typeface="Vrinda"/>
+        <a:font script="Gujr" typeface="Shruti"/>
+        <a:font script="Khmr" typeface="MoolBoran"/>
+        <a:font script="Knda" typeface="Tunga"/>
+        <a:font script="Guru" typeface="Raavi"/>
+        <a:font script="Cans" typeface="Euphemia"/>
+        <a:font script="Cher" typeface="Plantagenet Cherokee"/>
+        <a:font script="Yiii" typeface="Microsoft Yi Baiti"/>
+        <a:font script="Tibt" typeface="Microsoft Himalaya"/>
+        <a:font script="Thaa" typeface="MV Boli"/>
+        <a:font script="Deva" typeface="Mangal"/>
+        <a:font script="Telu" typeface="Gautami"/>
+        <a:font script="Taml" typeface="Latha"/>
+        <a:font script="Syrc" typeface="Estrangelo Edessa"/>
+        <a:font script="Orya" typeface="Kalinga"/>
+        <a:font script="Mlym" typeface="Kartika"/>
+        <a:font script="Laoo" typeface="DokChampa"/>
+        <a:font script="Sinh" typeface="Iskoola Pota"/>
+        <a:font script="Mong" typeface="Mongolian Baiti"/>
+        <a:font script="Viet" typeface="Times New Roman"/>
+        <a:font script="Uigh" typeface="Microsoft Uighur"/>
+        <a:font script="Geor" typeface="Sylfaen"/>
+        <a:font script="Armn" typeface="Arial"/>
+        <a:font script="Bugi" typeface="Leelawadee UI"/>
+        <a:font script="Bopo" typeface="Microsoft JhengHei"/>
+        <a:font script="Java" typeface="Javanese Text"/>
+        <a:font script="Lisu" typeface="Segoe UI"/>
+        <a:font script="Mymr" typeface="Myanmar Text"/>
+        <a:font script="Nkoo" typeface="Ebrima"/>
+        <a:font script="Olck" typeface="Nirmala UI"/>
+        <a:font script="Osma" typeface="Ebrima"/>
+        <a:font script="Phag" typeface="Phagspa"/>
+        <a:font script="Syrn" typeface="Estrangelo Edessa"/>
+        <a:font script="Syrj" typeface="Estrangelo Edessa"/>
+        <a:font script="Syre" typeface="Estrangelo Edessa"/>
+        <a:font script="Sora" typeface="Nirmala UI"/>
+        <a:font script="Tale" typeface="Microsoft Tai Le"/>
+        <a:font script="Talu" typeface="Microsoft New Tai Lue"/>
+        <a:font script="Tfng" typeface="Ebrima"/>
+      </a:majorFont>
+      <a:minorFont>
+        <a:latin typeface="Aptos" panose="02110004020202020204"/>
+        <a:ea typeface=""/>
+        <a:cs typeface=""/>
+        <a:font script="Jpan" typeface="游ゴシック"/>
+        <a:font script="Hang" typeface="맑은 고딕"/>
+        <a:font script="Hans" typeface="等线"/>
+        <a:font script="Hant" typeface="新細明體"/>
+        <a:font script="Arab" typeface="Arial"/>
+        <a:font script="Hebr" typeface="Arial"/>
+        <a:font script="Thai" typeface="Cordia New"/>
+        <a:font script="Ethi" typeface="Nyala"/>
+        <a:font script="Beng" typeface="Vrinda"/>
+        <a:font script="Gujr" typeface="Shruti"/>
+        <a:font script="Khmr" typeface="DaunPenh"/>
+        <a:font script="Knda" typeface="Tunga"/>
+        <a:font script="Guru" typeface="Raavi"/>
+        <a:font script="Cans" typeface="Euphemia"/>
+        <a:font script="Cher" typeface="Plantagenet Cherokee"/>
+        <a:font script="Yiii" typeface="Microsoft Yi Baiti"/>
+        <a:font script="Tibt" typeface="Microsoft Himalaya"/>
+        <a:font script="Thaa" typeface="MV Boli"/>
+        <a:font script="Deva" typeface="Mangal"/>
+        <a:font script="Telu" typeface="Gautami"/>
+        <a:font script="Taml" typeface="Latha"/>
+        <a:font script="Syrc" typeface="Estrangelo Edessa"/>
+        <a:font script="Orya" typeface="Kalinga"/>
+        <a:font script="Mlym" typeface="Kartika"/>
+        <a:font script="Laoo" typeface="DokChampa"/>
+        <a:font script="Sinh" typeface="Iskoola Pota"/>
+        <a:font script="Mong" typeface="Mongolian Baiti"/>
+        <a:font script="Viet" typeface="Arial"/>
+        <a:font script="Uigh" typeface="Microsoft Uighur"/>
+        <a:font script="Geor" typeface="Sylfaen"/>
+        <a:font script="Armn" typeface="Arial"/>
+        <a:font script="Bugi" typeface="Leelawadee UI"/>
+        <a:font script="Bopo" typeface="Microsoft JhengHei"/>
+        <a:font script="Java" typeface="Javanese Text"/>
+        <a:font script="Lisu" typeface="Segoe UI"/>
+        <a:font script="Mymr" typeface="Myanmar Text"/>
+        <a:font script="Nkoo" typeface="Ebrima"/>
+        <a:font script="Olck" typeface="Nirmala UI"/>
+        <a:font script="Osma" typeface="Ebrima"/>
+        <a:font script="Phag" typeface="Phagspa"/>
+        <a:font script="Syrn" typeface="Estrangelo Edessa"/>
+        <a:font script="Syrj" typeface="Estrangelo Edessa"/>
+        <a:font script="Syre" typeface="Estrangelo Edessa"/>
+        <a:font script="Sora" typeface="Nirmala UI"/>
+        <a:font script="Tale" typeface="Microsoft Tai Le"/>
+        <a:font script="Talu" typeface="Microsoft New Tai Lue"/>
+        <a:font script="Tfng" typeface="Ebrima"/>
+      </a:minorFont>
+    </a:fontScheme>
+    <a:fmtScheme name="Office">
+      <a:fillStyleLst>
+        <a:solidFill>
+          <a:schemeClr val="phClr"/>
+        </a:solidFill>
+        <a:gradFill rotWithShape="1">
+          <a:gsLst>
+            <a:gs pos="0">
+              <a:schemeClr val="phClr">
+                <a:lumMod val="110000"/>
+                <a:satMod val="105000"/>
+                <a:tint val="67000"/>
+              </a:schemeClr>
+            </a:gs>
+            <a:gs pos="50000">
+              <a:schemeClr val="phClr">
+                <a:lumMod val="105000"/>
+                <a:satMod val="103000"/>
+                <a:tint val="73000"/>
+              </a:schemeClr>
+            </a:gs>
+            <a:gs pos="100000">
+              <a:schemeClr val="phClr">
+                <a:lumMod val="105000"/>
+                <a:satMod val="109000"/>
+                <a:tint val="81000"/>
+              </a:schemeClr>
+            </a:gs>
+          </a:gsLst>
+          <a:lin ang="5400000" scaled="0"/>
+        </a:gradFill>
+        <a:gradFill rotWithShape="1">
+          <a:gsLst>
+            <a:gs pos="0">
+              <a:schemeClr val="phClr">
+                <a:satMod val="103000"/>
+                <a:lumMod val="102000"/>
+                <a:tint val="94000"/>
+              </a:schemeClr>
+            </a:gs>
+            <a:gs pos="50000">
+              <a:schemeClr val="phClr">
+                <a:satMod val="110000"/>
+                <a:lumMod val="100000"/>
+                <a:shade val="100000"/>
+              </a:schemeClr>
+            </a:gs>
+            <a:gs pos="100000">
+              <a:schemeClr val="phClr">
+                <a:lumMod val="99000"/>
+                <a:satMod val="120000"/>
+                <a:shade val="78000"/>
+              </a:schemeClr>
+            </a:gs>
+          </a:gsLst>
+          <a:lin ang="5400000" scaled="0"/>
+        </a:gradFill>
+      </a:fillStyleLst>
+      <a:lnStyleLst>
+        <a:ln w="12700" cap="flat" cmpd="sng" algn="ctr">
+          <a:solidFill>
+            <a:schemeClr val="phClr"/>
+          </a:solidFill>
+          <a:prstDash val="solid"/>
+          <a:miter lim="800000"/>
+        </a:ln>
+        <a:ln w="19050" cap="flat" cmpd="sng" algn="ctr">
+          <a:solidFill>
+            <a:schemeClr val="phClr"/>
+          </a:solidFill>
+          <a:prstDash val="solid"/>
+          <a:miter lim="800000"/>
+        </a:ln>
+        <a:ln w="25400" cap="flat" cmpd="sng" algn="ctr">
+          <a:solidFill>
+            <a:schemeClr val="phClr"/>
+          </a:solidFill>
+          <a:prstDash val="solid"/>
+          <a:miter lim="800000"/>
+        </a:ln>
+      </a:lnStyleLst>
+      <a:effectStyleLst>
+        <a:effectStyle>
+          <a:effectLst/>
+        </a:effectStyle>
+        <a:effectStyle>
+          <a:effectLst/>
+        </a:effectStyle>
+        <a:effectStyle>
+          <a:effectLst>
+            <a:outerShdw blurRad="57150" dist="19050" dir="5400000" algn="ctr" rotWithShape="0">
+              <a:srgbClr val="000000">
+                <a:alpha val="63000"/>
+              </a:srgbClr>
+            </a:outerShdw>
+          </a:effectLst>
+        </a:effectStyle>
+      </a:effectStyleLst>
+      <a:bgFillStyleLst>
+        <a:solidFill>
+          <a:schemeClr val="phClr"/>
+        </a:solidFill>
+        <a:solidFill>
+          <a:schemeClr val="phClr">
+            <a:tint val="95000"/>
+            <a:satMod val="170000"/>
+          </a:schemeClr>
+        </a:solidFill>
+        <a:gradFill rotWithShape="1">
+          <a:gsLst>
+            <a:gs pos="0">
+              <a:schemeClr val="phClr">
+                <a:tint val="93000"/>
+                <a:satMod val="150000"/>
+                <a:shade val="98000"/>
+                <a:lumMod val="102000"/>
+              </a:schemeClr>
+            </a:gs>
+            <a:gs pos="50000">
+              <a:schemeClr val="phClr">
+                <a:tint val="98000"/>
+                <a:satMod val="130000"/>
+                <a:shade val="90000"/>
+                <a:lumMod val="103000"/>
+              </a:schemeClr>
+            </a:gs>
+            <a:gs pos="100000">
+              <a:schemeClr val="phClr">
+                <a:shade val="63000"/>
+                <a:satMod val="120000"/>
+              </a:schemeClr>
+            </a:gs>
+          </a:gsLst>
+          <a:lin ang="5400000" scaled="0"/>
+        </a:gradFill>
+      </a:bgFillStyleLst>
+    </a:fmtScheme>
+  </a:themeElements>
+  <a:objectDefaults>
+    <a:lnDef>
+      <a:spPr/>
+      <a:bodyPr/>
+      <a:lstStyle/>
+      <a:style>
+        <a:lnRef idx="2">
+          <a:schemeClr val="accent1"/>
+        </a:lnRef>
+        <a:fillRef idx="0">
+          <a:schemeClr val="accent1"/>
+        </a:fillRef>
+        <a:effectRef idx="1">
+          <a:schemeClr val="accent1"/>
+        </a:effectRef>
+        <a:fontRef idx="minor">
+          <a:schemeClr val="tx1"/>
+        </a:fontRef>
+      </a:style>
+    </a:lnDef>
+  </a:objectDefaults>
+  <a:extraClrSchemeLst/>
+  <a:extLst>
+    <a:ext uri="{05A4C25C-085E-4340-85A3-A5531E510DB2}">
+      <thm15:themeFamily xmlns:thm15="http://schemas.microsoft.com/office/thememl/2012/main" name="Office Theme" id="{2E142A2C-CD16-42D6-873A-C26D2A0506FA}" vid="{1BDDFF52-6CD6-40A5-AB3C-68EB2F1E4D0A}"/>
+    </a:ext>
+  </a:extLst>
+</a:theme>
 </file>